--- a/assets/plantilla_estado_cartera.pptx
+++ b/assets/plantilla_estado_cartera.pptx
@@ -14,6 +14,7 @@
     <p:sldId id="259" r:id="rId5"/>
     <p:sldId id="260" r:id="rId6"/>
     <p:sldId id="261" r:id="rId7"/>
+    <p:sldId id="264" r:id="rId14"/>
     <p:sldId id="262" r:id="rId8"/>
   </p:sldIdLst>
   <p:sldSz cx="9144000" cy="5143500" type="screen16x9"/>
@@ -22205,6 +22206,6382 @@
           </a:p>
         </p:txBody>
       </p:sp>
+    </p:spTree>
+  </p:cSld>
+  <p:clrMapOvr>
+    <a:masterClrMapping/>
+  </p:clrMapOvr>
+</p:sld>
+</file>
+
+<file path=ppt/slides/slide8.xml><?xml version="1.0" encoding="utf-8"?>
+<p:sld xmlns:a="http://schemas.openxmlformats.org/drawingml/2006/main" xmlns:p="http://schemas.openxmlformats.org/presentationml/2006/main" xmlns:r="http://schemas.openxmlformats.org/officeDocument/2006/relationships">
+  <p:cSld>
+    <p:spTree>
+      <p:nvGrpSpPr>
+        <p:cNvPr id="1" name=""/>
+        <p:cNvGrpSpPr/>
+        <p:nvPr/>
+      </p:nvGrpSpPr>
+      <p:grpSpPr/>
+      <p:sp>
+        <p:nvSpPr>
+          <p:cNvPr id="2" name="Shape 0"/>
+          <p:cNvSpPr/>
+          <p:nvPr/>
+        </p:nvSpPr>
+        <p:spPr>
+          <a:xfrm>
+            <a:off x="1078508" y="0"/>
+            <a:ext cx="8065492" cy="749808"/>
+          </a:xfrm>
+          <a:prstGeom prst="rect">
+            <a:avLst/>
+          </a:prstGeom>
+          <a:solidFill>
+            <a:srgbClr val="1B2A4A"/>
+          </a:solidFill>
+          <a:ln w="12700">
+            <a:solidFill>
+              <a:srgbClr val="1B2A4A"/>
+            </a:solidFill>
+            <a:prstDash val="solid"/>
+          </a:ln>
+        </p:spPr>
+        <p:txBody>
+          <a:bodyPr/>
+          <a:lstStyle/>
+          <a:p>
+            <a:endParaRPr lang="es-CL"/>
+          </a:p>
+        </p:txBody>
+      </p:sp>
+      <p:sp>
+        <p:nvSpPr>
+          <p:cNvPr id="4" name="Shape 1"/>
+          <p:cNvSpPr/>
+          <p:nvPr/>
+        </p:nvSpPr>
+        <p:spPr>
+          <a:xfrm>
+            <a:off x="1143000" y="164592"/>
+            <a:ext cx="36576" cy="420624"/>
+          </a:xfrm>
+          <a:prstGeom prst="rect">
+            <a:avLst/>
+          </a:prstGeom>
+          <a:solidFill>
+            <a:srgbClr val="14A8A0"/>
+          </a:solidFill>
+          <a:ln w="12700">
+            <a:solidFill>
+              <a:srgbClr val="14A8A0"/>
+            </a:solidFill>
+            <a:prstDash val="solid"/>
+          </a:ln>
+        </p:spPr>
+        <p:txBody>
+          <a:bodyPr/>
+          <a:lstStyle/>
+          <a:p>
+            <a:endParaRPr lang="es-CL"/>
+          </a:p>
+        </p:txBody>
+      </p:sp>
+      <p:sp>
+        <p:nvSpPr>
+          <p:cNvPr id="5" name="Text 2"/>
+          <p:cNvSpPr/>
+          <p:nvPr/>
+        </p:nvSpPr>
+        <p:spPr>
+          <a:xfrm>
+            <a:off x="1234440" y="82296"/>
+            <a:ext cx="6217920" cy="566928"/>
+          </a:xfrm>
+          <a:prstGeom prst="rect">
+            <a:avLst/>
+          </a:prstGeom>
+          <a:noFill/>
+          <a:ln/>
+        </p:spPr>
+        <p:txBody>
+          <a:bodyPr wrap="square" lIns="0" tIns="0" rIns="0" bIns="0" rtlCol="0" anchor="ctr"/>
+          <a:lstStyle/>
+          <a:p>
+            <a:pPr marL="0" indent="0">
+              <a:buNone/>
+            </a:pPr>
+            <a:r>
+              <a:rPr lang="en-US" sz="1700" b="1" dirty="0">
+                <a:solidFill>
+                  <a:srgbClr val="FFFFFF"/>
+                </a:solidFill>
+                <a:latin typeface="Calibri" pitchFamily="34" charset="0"/>
+                <a:ea typeface="Calibri" pitchFamily="34" charset="-122"/>
+                <a:cs typeface="Calibri" pitchFamily="34" charset="-120"/>
+              </a:rPr>
+              <a:t>TIEMPOS DE RESIDENCIA</a:t>
+            </a:r>
+            <a:endParaRPr lang="en-US" sz="1700" dirty="0"/>
+          </a:p>
+        </p:txBody>
+      </p:sp>
+      <p:sp>
+        <p:nvSpPr>
+          <p:cNvPr id="6" name="Text 3"/>
+          <p:cNvSpPr/>
+          <p:nvPr/>
+        </p:nvSpPr>
+        <p:spPr>
+          <a:xfrm>
+            <a:off x="7498080" y="82296"/>
+            <a:ext cx="1463040" cy="566928"/>
+          </a:xfrm>
+          <a:prstGeom prst="rect">
+            <a:avLst/>
+          </a:prstGeom>
+          <a:noFill/>
+          <a:ln/>
+        </p:spPr>
+        <p:txBody>
+          <a:bodyPr wrap="square" lIns="0" tIns="0" rIns="0" bIns="0" rtlCol="0" anchor="ctr"/>
+          <a:lstStyle/>
+          <a:p>
+            <a:pPr marL="0" indent="0" algn="r">
+              <a:buNone/>
+            </a:pPr>
+            <a:r>
+              <a:rPr lang="en-US" sz="1000" i="1" dirty="0">
+                <a:solidFill>
+                  <a:srgbClr val="14A8A0"/>
+                </a:solidFill>
+                <a:latin typeface="Calibri" pitchFamily="34" charset="0"/>
+                <a:ea typeface="Calibri" pitchFamily="34" charset="-122"/>
+                <a:cs typeface="Calibri" pitchFamily="34" charset="-120"/>
+              </a:rPr>
+              <a:t>Top 10 más antiguos</a:t>
+            </a:r>
+            <a:endParaRPr lang="en-US" sz="1000" dirty="0"/>
+          </a:p>
+        </p:txBody>
+      </p:sp>
+      <p:sp>
+        <p:nvSpPr>
+          <p:cNvPr id="7" name="Shape 4"/>
+          <p:cNvSpPr/>
+          <p:nvPr/>
+        </p:nvSpPr>
+        <p:spPr>
+          <a:xfrm>
+            <a:off x="0" y="749808"/>
+            <a:ext cx="9144000" cy="36576"/>
+          </a:xfrm>
+          <a:prstGeom prst="rect">
+            <a:avLst/>
+          </a:prstGeom>
+          <a:solidFill>
+            <a:srgbClr val="0D7377"/>
+          </a:solidFill>
+          <a:ln w="12700">
+            <a:solidFill>
+              <a:srgbClr val="0D7377"/>
+            </a:solidFill>
+            <a:prstDash val="solid"/>
+          </a:ln>
+        </p:spPr>
+        <p:txBody>
+          <a:bodyPr/>
+          <a:lstStyle/>
+          <a:p>
+            <a:endParaRPr lang="es-CL"/>
+          </a:p>
+        </p:txBody>
+      </p:sp>
+      <p:sp>
+        <p:nvSpPr>
+          <p:cNvPr id="8" name="Shape 5"/>
+          <p:cNvSpPr/>
+          <p:nvPr/>
+        </p:nvSpPr>
+        <p:spPr>
+          <a:xfrm>
+            <a:off x="256032" y="896112"/>
+            <a:ext cx="2724912" cy="658368"/>
+          </a:xfrm>
+          <a:prstGeom prst="roundRect">
+            <a:avLst>
+              <a:gd name="adj" fmla="val 13889"/>
+            </a:avLst>
+          </a:prstGeom>
+          <a:solidFill>
+            <a:srgbClr val="991B1B"/>
+          </a:solidFill>
+          <a:ln w="12700">
+            <a:solidFill>
+              <a:srgbClr val="991B1B"/>
+            </a:solidFill>
+            <a:prstDash val="solid"/>
+          </a:ln>
+          <a:effectLst>
+            <a:outerShdw blurRad="88900" dist="25400" dir="8100000" algn="bl" rotWithShape="0">
+              <a:srgbClr val="000000">
+                <a:alpha val="9000"/>
+              </a:srgbClr>
+            </a:outerShdw>
+          </a:effectLst>
+        </p:spPr>
+        <p:txBody>
+          <a:bodyPr/>
+          <a:lstStyle/>
+          <a:p>
+            <a:endParaRPr lang="es-CL"/>
+          </a:p>
+        </p:txBody>
+      </p:sp>
+      <p:sp>
+        <p:nvSpPr>
+          <p:cNvPr id="9" name="Text 6"/>
+          <p:cNvSpPr/>
+          <p:nvPr/>
+        </p:nvSpPr>
+        <p:spPr>
+          <a:xfrm>
+            <a:off x="256032" y="896112"/>
+            <a:ext cx="2724912" cy="365760"/>
+          </a:xfrm>
+          <a:prstGeom prst="rect">
+            <a:avLst/>
+          </a:prstGeom>
+          <a:noFill/>
+          <a:ln/>
+        </p:spPr>
+        <p:txBody>
+          <a:bodyPr wrap="square" lIns="0" tIns="0" rIns="0" bIns="0" rtlCol="0" anchor="b"/>
+          <a:lstStyle/>
+          <a:p>
+            <a:pPr marL="0" indent="0" algn="ctr">
+              <a:buNone/>
+            </a:pPr>
+            <a:r>
+              <a:rPr lang="en-US" sz="1700" b="1" dirty="0">
+                <a:solidFill>
+                  <a:srgbClr val="FFFFFF"/>
+                </a:solidFill>
+                <a:latin typeface="Cambria" pitchFamily="34" charset="0"/>
+                <a:ea typeface="Cambria" pitchFamily="34" charset="-122"/>
+                <a:cs typeface="Cambria" pitchFamily="34" charset="-120"/>
+              </a:rPr>
+              <a:t>985 días</a:t>
+            </a:r>
+            <a:endParaRPr lang="en-US" sz="1700" dirty="0"/>
+          </a:p>
+        </p:txBody>
+      </p:sp>
+      <p:sp>
+        <p:nvSpPr>
+          <p:cNvPr id="10" name="Text 7"/>
+          <p:cNvSpPr/>
+          <p:nvPr/>
+        </p:nvSpPr>
+        <p:spPr>
+          <a:xfrm>
+            <a:off x="256032" y="1261872"/>
+            <a:ext cx="2724912" cy="256032"/>
+          </a:xfrm>
+          <a:prstGeom prst="rect">
+            <a:avLst/>
+          </a:prstGeom>
+          <a:noFill/>
+          <a:ln/>
+        </p:spPr>
+        <p:txBody>
+          <a:bodyPr wrap="square" lIns="0" tIns="0" rIns="0" bIns="0" rtlCol="0" anchor="t"/>
+          <a:lstStyle/>
+          <a:p>
+            <a:pPr marL="0" indent="0" algn="ctr">
+              <a:buNone/>
+            </a:pPr>
+            <a:r>
+              <a:rPr lang="en-US" sz="900" dirty="0">
+                <a:solidFill>
+                  <a:srgbClr val="FFFFFF"/>
+                </a:solidFill>
+                <a:latin typeface="Calibri" pitchFamily="34" charset="0"/>
+                <a:ea typeface="Calibri" pitchFamily="34" charset="-122"/>
+                <a:cs typeface="Calibri" pitchFamily="34" charset="-120"/>
+              </a:rPr>
+              <a:t>Caso más antiguo</a:t>
+            </a:r>
+            <a:endParaRPr lang="en-US" sz="900" dirty="0"/>
+          </a:p>
+        </p:txBody>
+      </p:sp>
+      <p:sp>
+        <p:nvSpPr>
+          <p:cNvPr id="11" name="Shape 8"/>
+          <p:cNvSpPr/>
+          <p:nvPr/>
+        </p:nvSpPr>
+        <p:spPr>
+          <a:xfrm>
+            <a:off x="3127248" y="896112"/>
+            <a:ext cx="2724912" cy="658368"/>
+          </a:xfrm>
+          <a:prstGeom prst="roundRect">
+            <a:avLst>
+              <a:gd name="adj" fmla="val 13889"/>
+            </a:avLst>
+          </a:prstGeom>
+          <a:solidFill>
+            <a:srgbClr val="0D7377"/>
+          </a:solidFill>
+          <a:ln w="12700">
+            <a:solidFill>
+              <a:srgbClr val="0D7377"/>
+            </a:solidFill>
+            <a:prstDash val="solid"/>
+          </a:ln>
+          <a:effectLst>
+            <a:outerShdw blurRad="88900" dist="25400" dir="8100000" algn="bl" rotWithShape="0">
+              <a:srgbClr val="000000">
+                <a:alpha val="9000"/>
+              </a:srgbClr>
+            </a:outerShdw>
+          </a:effectLst>
+        </p:spPr>
+        <p:txBody>
+          <a:bodyPr/>
+          <a:lstStyle/>
+          <a:p>
+            <a:endParaRPr lang="es-CL"/>
+          </a:p>
+        </p:txBody>
+      </p:sp>
+      <p:sp>
+        <p:nvSpPr>
+          <p:cNvPr id="12" name="Text 9"/>
+          <p:cNvSpPr/>
+          <p:nvPr/>
+        </p:nvSpPr>
+        <p:spPr>
+          <a:xfrm>
+            <a:off x="3127248" y="896112"/>
+            <a:ext cx="2724912" cy="365760"/>
+          </a:xfrm>
+          <a:prstGeom prst="rect">
+            <a:avLst/>
+          </a:prstGeom>
+          <a:noFill/>
+          <a:ln/>
+        </p:spPr>
+        <p:txBody>
+          <a:bodyPr wrap="square" lIns="0" tIns="0" rIns="0" bIns="0" rtlCol="0" anchor="b"/>
+          <a:lstStyle/>
+          <a:p>
+            <a:pPr marL="0" indent="0" algn="ctr">
+              <a:buNone/>
+            </a:pPr>
+            <a:r>
+              <a:rPr lang="en-US" sz="1700" b="1" dirty="0">
+                <a:solidFill>
+                  <a:srgbClr val="FFFFFF"/>
+                </a:solidFill>
+                <a:latin typeface="Cambria" pitchFamily="34" charset="0"/>
+                <a:ea typeface="Cambria" pitchFamily="34" charset="-122"/>
+                <a:cs typeface="Cambria" pitchFamily="34" charset="-120"/>
+              </a:rPr>
+              <a:t>~288 días</a:t>
+            </a:r>
+            <a:endParaRPr lang="en-US" sz="1700" dirty="0"/>
+          </a:p>
+        </p:txBody>
+      </p:sp>
+      <p:sp>
+        <p:nvSpPr>
+          <p:cNvPr id="13" name="Text 10"/>
+          <p:cNvSpPr/>
+          <p:nvPr/>
+        </p:nvSpPr>
+        <p:spPr>
+          <a:xfrm>
+            <a:off x="3127248" y="1261872"/>
+            <a:ext cx="2724912" cy="256032"/>
+          </a:xfrm>
+          <a:prstGeom prst="rect">
+            <a:avLst/>
+          </a:prstGeom>
+          <a:noFill/>
+          <a:ln/>
+        </p:spPr>
+        <p:txBody>
+          <a:bodyPr wrap="square" lIns="0" tIns="0" rIns="0" bIns="0" rtlCol="0" anchor="t"/>
+          <a:lstStyle/>
+          <a:p>
+            <a:pPr marL="0" indent="0" algn="ctr">
+              <a:buNone/>
+            </a:pPr>
+            <a:r>
+              <a:rPr lang="en-US" sz="900" dirty="0">
+                <a:solidFill>
+                  <a:srgbClr val="FFFFFF"/>
+                </a:solidFill>
+                <a:latin typeface="Calibri" pitchFamily="34" charset="0"/>
+                <a:ea typeface="Calibri" pitchFamily="34" charset="-122"/>
+                <a:cs typeface="Calibri" pitchFamily="34" charset="-120"/>
+              </a:rPr>
+              <a:t>Promedio cartera Marsh</a:t>
+            </a:r>
+            <a:endParaRPr lang="en-US" sz="900" dirty="0"/>
+          </a:p>
+        </p:txBody>
+      </p:sp>
+      <p:sp>
+        <p:nvSpPr>
+          <p:cNvPr id="14" name="Shape 11"/>
+          <p:cNvSpPr/>
+          <p:nvPr/>
+        </p:nvSpPr>
+        <p:spPr>
+          <a:xfrm>
+            <a:off x="5998464" y="896112"/>
+            <a:ext cx="2724912" cy="658368"/>
+          </a:xfrm>
+          <a:prstGeom prst="roundRect">
+            <a:avLst>
+              <a:gd name="adj" fmla="val 13889"/>
+            </a:avLst>
+          </a:prstGeom>
+          <a:solidFill>
+            <a:srgbClr val="B45309"/>
+          </a:solidFill>
+          <a:ln w="12700">
+            <a:solidFill>
+              <a:srgbClr val="B45309"/>
+            </a:solidFill>
+            <a:prstDash val="solid"/>
+          </a:ln>
+          <a:effectLst>
+            <a:outerShdw blurRad="88900" dist="25400" dir="8100000" algn="bl" rotWithShape="0">
+              <a:srgbClr val="000000">
+                <a:alpha val="9000"/>
+              </a:srgbClr>
+            </a:outerShdw>
+          </a:effectLst>
+        </p:spPr>
+        <p:txBody>
+          <a:bodyPr/>
+          <a:lstStyle/>
+          <a:p>
+            <a:endParaRPr lang="es-CL"/>
+          </a:p>
+        </p:txBody>
+      </p:sp>
+      <p:sp>
+        <p:nvSpPr>
+          <p:cNvPr id="15" name="Text 12"/>
+          <p:cNvSpPr/>
+          <p:nvPr/>
+        </p:nvSpPr>
+        <p:spPr>
+          <a:xfrm>
+            <a:off x="5998464" y="896112"/>
+            <a:ext cx="2724912" cy="365760"/>
+          </a:xfrm>
+          <a:prstGeom prst="rect">
+            <a:avLst/>
+          </a:prstGeom>
+          <a:noFill/>
+          <a:ln/>
+        </p:spPr>
+        <p:txBody>
+          <a:bodyPr wrap="square" lIns="0" tIns="0" rIns="0" bIns="0" rtlCol="0" anchor="b"/>
+          <a:lstStyle/>
+          <a:p>
+            <a:pPr marL="0" indent="0" algn="ctr">
+              <a:buNone/>
+            </a:pPr>
+            <a:r>
+              <a:rPr lang="en-US" sz="1700" b="1" dirty="0">
+                <a:solidFill>
+                  <a:srgbClr val="FFFFFF"/>
+                </a:solidFill>
+                <a:latin typeface="Cambria" pitchFamily="34" charset="0"/>
+                <a:ea typeface="Cambria" pitchFamily="34" charset="-122"/>
+                <a:cs typeface="Cambria" pitchFamily="34" charset="-120"/>
+              </a:rPr>
+              <a:t>5 casos</a:t>
+            </a:r>
+            <a:endParaRPr lang="en-US" sz="1700" dirty="0"/>
+          </a:p>
+        </p:txBody>
+      </p:sp>
+      <p:sp>
+        <p:nvSpPr>
+          <p:cNvPr id="16" name="Text 13"/>
+          <p:cNvSpPr/>
+          <p:nvPr/>
+        </p:nvSpPr>
+        <p:spPr>
+          <a:xfrm>
+            <a:off x="5998464" y="1261872"/>
+            <a:ext cx="2724912" cy="256032"/>
+          </a:xfrm>
+          <a:prstGeom prst="rect">
+            <a:avLst/>
+          </a:prstGeom>
+          <a:noFill/>
+          <a:ln/>
+        </p:spPr>
+        <p:txBody>
+          <a:bodyPr wrap="square" lIns="0" tIns="0" rIns="0" bIns="0" rtlCol="0" anchor="t"/>
+          <a:lstStyle/>
+          <a:p>
+            <a:pPr marL="0" indent="0" algn="ctr">
+              <a:buNone/>
+            </a:pPr>
+            <a:r>
+              <a:rPr lang="en-US" sz="900" dirty="0">
+                <a:solidFill>
+                  <a:srgbClr val="FFFFFF"/>
+                </a:solidFill>
+                <a:latin typeface="Calibri" pitchFamily="34" charset="0"/>
+                <a:ea typeface="Calibri" pitchFamily="34" charset="-122"/>
+                <a:cs typeface="Calibri" pitchFamily="34" charset="-120"/>
+              </a:rPr>
+              <a:t>Con más de 600 días</a:t>
+            </a:r>
+            <a:endParaRPr lang="en-US" sz="900" dirty="0"/>
+          </a:p>
+        </p:txBody>
+      </p:sp>
+      <p:graphicFrame>
+        <p:nvGraphicFramePr>
+          <p:cNvPr id="17" name="Table 0"/>
+          <p:cNvGraphicFramePr>
+            <a:graphicFrameLocks noGrp="1"/>
+          </p:cNvGraphicFramePr>
+          <p:nvPr>
+            <p:extLst>
+              <p:ext uri="{D42A27DB-BD31-4B8C-83A1-F6EECF244321}">
+                <p14:modId xmlns:p14="http://schemas.microsoft.com/office/powerpoint/2010/main" val="2268471846"/>
+              </p:ext>
+            </p:extLst>
+          </p:nvPr>
+        </p:nvGraphicFramePr>
+        <p:xfrm>
+          <a:off x="256032" y="1622909"/>
+          <a:ext cx="7644384" cy="3323995"/>
+        </p:xfrm>
+        <a:graphic>
+          <a:graphicData uri="http://schemas.openxmlformats.org/drawingml/2006/table">
+            <a:tbl>
+              <a:tblPr/>
+              <a:tblGrid>
+                <a:gridCol w="329184">
+                  <a:extLst>
+                    <a:ext uri="{9D8B030D-6E8A-4147-A177-3AD203B41FA5}">
+                      <a16:colId xmlns:a16="http://schemas.microsoft.com/office/drawing/2014/main" val="20000"/>
+                    </a:ext>
+                  </a:extLst>
+                </a:gridCol>
+                <a:gridCol w="658368">
+                  <a:extLst>
+                    <a:ext uri="{9D8B030D-6E8A-4147-A177-3AD203B41FA5}">
+                      <a16:colId xmlns:a16="http://schemas.microsoft.com/office/drawing/2014/main" val="20001"/>
+                    </a:ext>
+                  </a:extLst>
+                </a:gridCol>
+                <a:gridCol w="2286000">
+                  <a:extLst>
+                    <a:ext uri="{9D8B030D-6E8A-4147-A177-3AD203B41FA5}">
+                      <a16:colId xmlns:a16="http://schemas.microsoft.com/office/drawing/2014/main" val="20002"/>
+                    </a:ext>
+                  </a:extLst>
+                </a:gridCol>
+                <a:gridCol w="475488">
+                  <a:extLst>
+                    <a:ext uri="{9D8B030D-6E8A-4147-A177-3AD203B41FA5}">
+                      <a16:colId xmlns:a16="http://schemas.microsoft.com/office/drawing/2014/main" val="20003"/>
+                    </a:ext>
+                  </a:extLst>
+                </a:gridCol>
+                <a:gridCol w="475488">
+                  <a:extLst>
+                    <a:ext uri="{9D8B030D-6E8A-4147-A177-3AD203B41FA5}">
+                      <a16:colId xmlns:a16="http://schemas.microsoft.com/office/drawing/2014/main" val="20005"/>
+                    </a:ext>
+                  </a:extLst>
+                </a:gridCol>
+                <a:gridCol w="475488">
+                  <a:extLst>
+                    <a:ext uri="{9D8B030D-6E8A-4147-A177-3AD203B41FA5}">
+                      <a16:colId xmlns:a16="http://schemas.microsoft.com/office/drawing/2014/main" val="20006"/>
+                    </a:ext>
+                  </a:extLst>
+                </a:gridCol>
+                <a:gridCol w="2944368">
+                  <a:extLst>
+                    <a:ext uri="{9D8B030D-6E8A-4147-A177-3AD203B41FA5}">
+                      <a16:colId xmlns:a16="http://schemas.microsoft.com/office/drawing/2014/main" val="20007"/>
+                    </a:ext>
+                  </a:extLst>
+                </a:gridCol>
+              </a:tblGrid>
+              <a:tr h="306475">
+                <a:tc>
+                  <a:txBody>
+                    <a:bodyPr/>
+                    <a:lstStyle/>
+                    <a:p>
+                      <a:pPr marL="0" indent="0" algn="ctr">
+                        <a:buNone/>
+                      </a:pPr>
+                      <a:r>
+                        <a:rPr lang="en-US" sz="900" b="1" dirty="0">
+                          <a:solidFill>
+                            <a:srgbClr val="FFFFFF"/>
+                          </a:solidFill>
+                          <a:latin typeface="Calibri" pitchFamily="34" charset="0"/>
+                          <a:ea typeface="Calibri" pitchFamily="34" charset="-122"/>
+                          <a:cs typeface="Calibri" pitchFamily="34" charset="-120"/>
+                        </a:rPr>
+                        <a:t>#</a:t>
+                      </a:r>
+                      <a:endParaRPr lang="en-US" sz="900" dirty="0">
+                        <a:latin typeface="Calibri" charset="0"/>
+                        <a:ea typeface="Calibri" charset="0"/>
+                        <a:cs typeface="Calibri" charset="0"/>
+                      </a:endParaRPr>
+                    </a:p>
+                  </a:txBody>
+                  <a:tcPr>
+                    <a:lnL w="5080" cap="flat" cmpd="sng" algn="ctr">
+                      <a:solidFill>
+                        <a:srgbClr val="D1DDE8"/>
+                      </a:solidFill>
+                      <a:prstDash val="solid"/>
+                      <a:round/>
+                      <a:headEnd type="none" w="med" len="med"/>
+                      <a:tailEnd type="none" w="med" len="med"/>
+                    </a:lnL>
+                    <a:lnR w="5080" cap="flat" cmpd="sng" algn="ctr">
+                      <a:solidFill>
+                        <a:srgbClr val="D1DDE8"/>
+                      </a:solidFill>
+                      <a:prstDash val="solid"/>
+                      <a:round/>
+                      <a:headEnd type="none" w="med" len="med"/>
+                      <a:tailEnd type="none" w="med" len="med"/>
+                    </a:lnR>
+                    <a:lnT w="5080" cap="flat" cmpd="sng" algn="ctr">
+                      <a:solidFill>
+                        <a:srgbClr val="D1DDE8"/>
+                      </a:solidFill>
+                      <a:prstDash val="solid"/>
+                      <a:round/>
+                      <a:headEnd type="none" w="med" len="med"/>
+                      <a:tailEnd type="none" w="med" len="med"/>
+                    </a:lnT>
+                    <a:lnB w="5080" cap="flat" cmpd="sng" algn="ctr">
+                      <a:solidFill>
+                        <a:srgbClr val="D1DDE8"/>
+                      </a:solidFill>
+                      <a:prstDash val="solid"/>
+                      <a:round/>
+                      <a:headEnd type="none" w="med" len="med"/>
+                      <a:tailEnd type="none" w="med" len="med"/>
+                    </a:lnB>
+                    <a:solidFill>
+                      <a:srgbClr val="0D1F38"/>
+                    </a:solidFill>
+                  </a:tcPr>
+                </a:tc>
+                <a:tc>
+                  <a:txBody>
+                    <a:bodyPr/>
+                    <a:lstStyle/>
+                    <a:p>
+                      <a:pPr marL="0" indent="0">
+                        <a:buNone/>
+                      </a:pPr>
+                      <a:r>
+                        <a:rPr lang="en-US" sz="900" b="1" dirty="0">
+                          <a:solidFill>
+                            <a:srgbClr val="FFFFFF"/>
+                          </a:solidFill>
+                          <a:latin typeface="Calibri" pitchFamily="34" charset="0"/>
+                          <a:ea typeface="Calibri" pitchFamily="34" charset="-122"/>
+                          <a:cs typeface="Calibri" pitchFamily="34" charset="-120"/>
+                        </a:rPr>
+                        <a:t>Caso</a:t>
+                      </a:r>
+                      <a:endParaRPr lang="en-US" sz="900" dirty="0">
+                        <a:latin typeface="Calibri" charset="0"/>
+                        <a:ea typeface="Calibri" charset="0"/>
+                        <a:cs typeface="Calibri" charset="0"/>
+                      </a:endParaRPr>
+                    </a:p>
+                  </a:txBody>
+                  <a:tcPr>
+                    <a:lnL w="5080" cap="flat" cmpd="sng" algn="ctr">
+                      <a:solidFill>
+                        <a:srgbClr val="D1DDE8"/>
+                      </a:solidFill>
+                      <a:prstDash val="solid"/>
+                      <a:round/>
+                      <a:headEnd type="none" w="med" len="med"/>
+                      <a:tailEnd type="none" w="med" len="med"/>
+                    </a:lnL>
+                    <a:lnR w="5080" cap="flat" cmpd="sng" algn="ctr">
+                      <a:solidFill>
+                        <a:srgbClr val="D1DDE8"/>
+                      </a:solidFill>
+                      <a:prstDash val="solid"/>
+                      <a:round/>
+                      <a:headEnd type="none" w="med" len="med"/>
+                      <a:tailEnd type="none" w="med" len="med"/>
+                    </a:lnR>
+                    <a:lnT w="5080" cap="flat" cmpd="sng" algn="ctr">
+                      <a:solidFill>
+                        <a:srgbClr val="D1DDE8"/>
+                      </a:solidFill>
+                      <a:prstDash val="solid"/>
+                      <a:round/>
+                      <a:headEnd type="none" w="med" len="med"/>
+                      <a:tailEnd type="none" w="med" len="med"/>
+                    </a:lnT>
+                    <a:lnB w="5080" cap="flat" cmpd="sng" algn="ctr">
+                      <a:solidFill>
+                        <a:srgbClr val="D1DDE8"/>
+                      </a:solidFill>
+                      <a:prstDash val="solid"/>
+                      <a:round/>
+                      <a:headEnd type="none" w="med" len="med"/>
+                      <a:tailEnd type="none" w="med" len="med"/>
+                    </a:lnB>
+                    <a:solidFill>
+                      <a:srgbClr val="0D1F38"/>
+                    </a:solidFill>
+                  </a:tcPr>
+                </a:tc>
+                <a:tc>
+                  <a:txBody>
+                    <a:bodyPr/>
+                    <a:lstStyle/>
+                    <a:p>
+                      <a:pPr marL="0" indent="0">
+                        <a:buNone/>
+                      </a:pPr>
+                      <a:r>
+                        <a:rPr lang="en-US" sz="900" b="1" dirty="0">
+                          <a:solidFill>
+                            <a:srgbClr val="FFFFFF"/>
+                          </a:solidFill>
+                          <a:latin typeface="Calibri" pitchFamily="34" charset="0"/>
+                          <a:ea typeface="Calibri" pitchFamily="34" charset="-122"/>
+                          <a:cs typeface="Calibri" pitchFamily="34" charset="-120"/>
+                        </a:rPr>
+                        <a:t>Siniestro / Nickname</a:t>
+                      </a:r>
+                      <a:endParaRPr lang="en-US" sz="900" dirty="0">
+                        <a:latin typeface="Calibri" charset="0"/>
+                        <a:ea typeface="Calibri" charset="0"/>
+                        <a:cs typeface="Calibri" charset="0"/>
+                      </a:endParaRPr>
+                    </a:p>
+                  </a:txBody>
+                  <a:tcPr>
+                    <a:lnL w="5080" cap="flat" cmpd="sng" algn="ctr">
+                      <a:solidFill>
+                        <a:srgbClr val="D1DDE8"/>
+                      </a:solidFill>
+                      <a:prstDash val="solid"/>
+                      <a:round/>
+                      <a:headEnd type="none" w="med" len="med"/>
+                      <a:tailEnd type="none" w="med" len="med"/>
+                    </a:lnL>
+                    <a:lnR w="5080" cap="flat" cmpd="sng" algn="ctr">
+                      <a:solidFill>
+                        <a:srgbClr val="D1DDE8"/>
+                      </a:solidFill>
+                      <a:prstDash val="solid"/>
+                      <a:round/>
+                      <a:headEnd type="none" w="med" len="med"/>
+                      <a:tailEnd type="none" w="med" len="med"/>
+                    </a:lnR>
+                    <a:lnT w="5080" cap="flat" cmpd="sng" algn="ctr">
+                      <a:solidFill>
+                        <a:srgbClr val="D1DDE8"/>
+                      </a:solidFill>
+                      <a:prstDash val="solid"/>
+                      <a:round/>
+                      <a:headEnd type="none" w="med" len="med"/>
+                      <a:tailEnd type="none" w="med" len="med"/>
+                    </a:lnT>
+                    <a:lnB w="5080" cap="flat" cmpd="sng" algn="ctr">
+                      <a:solidFill>
+                        <a:srgbClr val="D1DDE8"/>
+                      </a:solidFill>
+                      <a:prstDash val="solid"/>
+                      <a:round/>
+                      <a:headEnd type="none" w="med" len="med"/>
+                      <a:tailEnd type="none" w="med" len="med"/>
+                    </a:lnB>
+                    <a:solidFill>
+                      <a:srgbClr val="0D1F38"/>
+                    </a:solidFill>
+                  </a:tcPr>
+                </a:tc>
+                <a:tc>
+                  <a:txBody>
+                    <a:bodyPr/>
+                    <a:lstStyle/>
+                    <a:p>
+                      <a:pPr marL="0" indent="0" algn="ctr">
+                        <a:buNone/>
+                      </a:pPr>
+                      <a:r>
+                        <a:rPr lang="en-US" sz="900" b="1" dirty="0">
+                          <a:solidFill>
+                            <a:srgbClr val="FFFFFF"/>
+                          </a:solidFill>
+                          <a:latin typeface="Calibri" pitchFamily="34" charset="0"/>
+                          <a:ea typeface="Calibri" pitchFamily="34" charset="-122"/>
+                          <a:cs typeface="Calibri" pitchFamily="34" charset="-120"/>
+                        </a:rPr>
+                        <a:t>Divisa</a:t>
+                      </a:r>
+                      <a:endParaRPr lang="en-US" sz="900" dirty="0">
+                        <a:latin typeface="Calibri" charset="0"/>
+                        <a:ea typeface="Calibri" charset="0"/>
+                        <a:cs typeface="Calibri" charset="0"/>
+                      </a:endParaRPr>
+                    </a:p>
+                  </a:txBody>
+                  <a:tcPr>
+                    <a:lnL w="5080" cap="flat" cmpd="sng" algn="ctr">
+                      <a:solidFill>
+                        <a:srgbClr val="D1DDE8"/>
+                      </a:solidFill>
+                      <a:prstDash val="solid"/>
+                      <a:round/>
+                      <a:headEnd type="none" w="med" len="med"/>
+                      <a:tailEnd type="none" w="med" len="med"/>
+                    </a:lnL>
+                    <a:lnR w="5080" cap="flat" cmpd="sng" algn="ctr">
+                      <a:solidFill>
+                        <a:srgbClr val="D1DDE8"/>
+                      </a:solidFill>
+                      <a:prstDash val="solid"/>
+                      <a:round/>
+                      <a:headEnd type="none" w="med" len="med"/>
+                      <a:tailEnd type="none" w="med" len="med"/>
+                    </a:lnR>
+                    <a:lnT w="5080" cap="flat" cmpd="sng" algn="ctr">
+                      <a:solidFill>
+                        <a:srgbClr val="D1DDE8"/>
+                      </a:solidFill>
+                      <a:prstDash val="solid"/>
+                      <a:round/>
+                      <a:headEnd type="none" w="med" len="med"/>
+                      <a:tailEnd type="none" w="med" len="med"/>
+                    </a:lnT>
+                    <a:lnB w="5080" cap="flat" cmpd="sng" algn="ctr">
+                      <a:solidFill>
+                        <a:srgbClr val="D1DDE8"/>
+                      </a:solidFill>
+                      <a:prstDash val="solid"/>
+                      <a:round/>
+                      <a:headEnd type="none" w="med" len="med"/>
+                      <a:tailEnd type="none" w="med" len="med"/>
+                    </a:lnB>
+                    <a:solidFill>
+                      <a:srgbClr val="0D1F38"/>
+                    </a:solidFill>
+                  </a:tcPr>
+                </a:tc>
+                <a:tc>
+                  <a:txBody>
+                    <a:bodyPr/>
+                    <a:lstStyle/>
+                    <a:p>
+                      <a:pPr marL="0" indent="0" algn="ctr">
+                        <a:buNone/>
+                      </a:pPr>
+                      <a:r>
+                        <a:rPr lang="en-US" sz="900" b="1" dirty="0">
+                          <a:solidFill>
+                            <a:srgbClr val="FFFFFF"/>
+                          </a:solidFill>
+                          <a:latin typeface="Calibri" pitchFamily="34" charset="0"/>
+                          <a:ea typeface="Calibri" pitchFamily="34" charset="-122"/>
+                          <a:cs typeface="Calibri" pitchFamily="34" charset="-120"/>
+                        </a:rPr>
+                        <a:t>Días</a:t>
+                      </a:r>
+                      <a:endParaRPr lang="en-US" sz="900" dirty="0">
+                        <a:latin typeface="Calibri" charset="0"/>
+                        <a:ea typeface="Calibri" charset="0"/>
+                        <a:cs typeface="Calibri" charset="0"/>
+                      </a:endParaRPr>
+                    </a:p>
+                  </a:txBody>
+                  <a:tcPr>
+                    <a:lnL w="5080" cap="flat" cmpd="sng" algn="ctr">
+                      <a:solidFill>
+                        <a:srgbClr val="D1DDE8"/>
+                      </a:solidFill>
+                      <a:prstDash val="solid"/>
+                      <a:round/>
+                      <a:headEnd type="none" w="med" len="med"/>
+                      <a:tailEnd type="none" w="med" len="med"/>
+                    </a:lnL>
+                    <a:lnR w="5080" cap="flat" cmpd="sng" algn="ctr">
+                      <a:solidFill>
+                        <a:srgbClr val="D1DDE8"/>
+                      </a:solidFill>
+                      <a:prstDash val="solid"/>
+                      <a:round/>
+                      <a:headEnd type="none" w="med" len="med"/>
+                      <a:tailEnd type="none" w="med" len="med"/>
+                    </a:lnR>
+                    <a:lnT w="5080" cap="flat" cmpd="sng" algn="ctr">
+                      <a:solidFill>
+                        <a:srgbClr val="D1DDE8"/>
+                      </a:solidFill>
+                      <a:prstDash val="solid"/>
+                      <a:round/>
+                      <a:headEnd type="none" w="med" len="med"/>
+                      <a:tailEnd type="none" w="med" len="med"/>
+                    </a:lnT>
+                    <a:lnB w="5080" cap="flat" cmpd="sng" algn="ctr">
+                      <a:solidFill>
+                        <a:srgbClr val="D1DDE8"/>
+                      </a:solidFill>
+                      <a:prstDash val="solid"/>
+                      <a:round/>
+                      <a:headEnd type="none" w="med" len="med"/>
+                      <a:tailEnd type="none" w="med" len="med"/>
+                    </a:lnB>
+                    <a:solidFill>
+                      <a:srgbClr val="0D1F38"/>
+                    </a:solidFill>
+                  </a:tcPr>
+                </a:tc>
+                <a:tc>
+                  <a:txBody>
+                    <a:bodyPr/>
+                    <a:lstStyle/>
+                    <a:p>
+                      <a:pPr marL="0" indent="0" algn="ctr">
+                        <a:buNone/>
+                      </a:pPr>
+                      <a:r>
+                        <a:rPr lang="en-US" sz="900" b="1" dirty="0">
+                          <a:solidFill>
+                            <a:srgbClr val="FFFFFF"/>
+                          </a:solidFill>
+                          <a:latin typeface="Calibri" pitchFamily="34" charset="0"/>
+                          <a:ea typeface="Calibri" pitchFamily="34" charset="-122"/>
+                          <a:cs typeface="Calibri" pitchFamily="34" charset="-120"/>
+                        </a:rPr>
+                        <a:t>Prob.</a:t>
+                      </a:r>
+                      <a:endParaRPr lang="en-US" sz="900" dirty="0">
+                        <a:latin typeface="Calibri" charset="0"/>
+                        <a:ea typeface="Calibri" charset="0"/>
+                        <a:cs typeface="Calibri" charset="0"/>
+                      </a:endParaRPr>
+                    </a:p>
+                  </a:txBody>
+                  <a:tcPr>
+                    <a:lnL w="5080" cap="flat" cmpd="sng" algn="ctr">
+                      <a:solidFill>
+                        <a:srgbClr val="D1DDE8"/>
+                      </a:solidFill>
+                      <a:prstDash val="solid"/>
+                      <a:round/>
+                      <a:headEnd type="none" w="med" len="med"/>
+                      <a:tailEnd type="none" w="med" len="med"/>
+                    </a:lnL>
+                    <a:lnR w="5080" cap="flat" cmpd="sng" algn="ctr">
+                      <a:solidFill>
+                        <a:srgbClr val="D1DDE8"/>
+                      </a:solidFill>
+                      <a:prstDash val="solid"/>
+                      <a:round/>
+                      <a:headEnd type="none" w="med" len="med"/>
+                      <a:tailEnd type="none" w="med" len="med"/>
+                    </a:lnR>
+                    <a:lnT w="5080" cap="flat" cmpd="sng" algn="ctr">
+                      <a:solidFill>
+                        <a:srgbClr val="D1DDE8"/>
+                      </a:solidFill>
+                      <a:prstDash val="solid"/>
+                      <a:round/>
+                      <a:headEnd type="none" w="med" len="med"/>
+                      <a:tailEnd type="none" w="med" len="med"/>
+                    </a:lnT>
+                    <a:lnB w="5080" cap="flat" cmpd="sng" algn="ctr">
+                      <a:solidFill>
+                        <a:srgbClr val="D1DDE8"/>
+                      </a:solidFill>
+                      <a:prstDash val="solid"/>
+                      <a:round/>
+                      <a:headEnd type="none" w="med" len="med"/>
+                      <a:tailEnd type="none" w="med" len="med"/>
+                    </a:lnB>
+                    <a:solidFill>
+                      <a:srgbClr val="0D1F38"/>
+                    </a:solidFill>
+                  </a:tcPr>
+                </a:tc>
+                <a:tc>
+                  <a:txBody>
+                    <a:bodyPr/>
+                    <a:lstStyle/>
+                    <a:p>
+                      <a:pPr marL="0" indent="0">
+                        <a:buNone/>
+                      </a:pPr>
+                      <a:r>
+                        <a:rPr lang="en-US" sz="900" b="1" dirty="0">
+                          <a:solidFill>
+                            <a:srgbClr val="FFFFFF"/>
+                          </a:solidFill>
+                          <a:latin typeface="Calibri" pitchFamily="34" charset="0"/>
+                          <a:ea typeface="Calibri" pitchFamily="34" charset="-122"/>
+                          <a:cs typeface="Calibri" pitchFamily="34" charset="-120"/>
+                        </a:rPr>
+                        <a:t>Estado / Obs.</a:t>
+                      </a:r>
+                      <a:endParaRPr lang="en-US" sz="900" dirty="0">
+                        <a:latin typeface="Calibri" charset="0"/>
+                        <a:ea typeface="Calibri" charset="0"/>
+                        <a:cs typeface="Calibri" charset="0"/>
+                      </a:endParaRPr>
+                    </a:p>
+                  </a:txBody>
+                  <a:tcPr>
+                    <a:lnL w="5080" cap="flat" cmpd="sng" algn="ctr">
+                      <a:solidFill>
+                        <a:srgbClr val="D1DDE8"/>
+                      </a:solidFill>
+                      <a:prstDash val="solid"/>
+                      <a:round/>
+                      <a:headEnd type="none" w="med" len="med"/>
+                      <a:tailEnd type="none" w="med" len="med"/>
+                    </a:lnL>
+                    <a:lnR w="5080" cap="flat" cmpd="sng" algn="ctr">
+                      <a:solidFill>
+                        <a:srgbClr val="D1DDE8"/>
+                      </a:solidFill>
+                      <a:prstDash val="solid"/>
+                      <a:round/>
+                      <a:headEnd type="none" w="med" len="med"/>
+                      <a:tailEnd type="none" w="med" len="med"/>
+                    </a:lnR>
+                    <a:lnT w="5080" cap="flat" cmpd="sng" algn="ctr">
+                      <a:solidFill>
+                        <a:srgbClr val="D1DDE8"/>
+                      </a:solidFill>
+                      <a:prstDash val="solid"/>
+                      <a:round/>
+                      <a:headEnd type="none" w="med" len="med"/>
+                      <a:tailEnd type="none" w="med" len="med"/>
+                    </a:lnT>
+                    <a:lnB w="5080" cap="flat" cmpd="sng" algn="ctr">
+                      <a:solidFill>
+                        <a:srgbClr val="D1DDE8"/>
+                      </a:solidFill>
+                      <a:prstDash val="solid"/>
+                      <a:round/>
+                      <a:headEnd type="none" w="med" len="med"/>
+                      <a:tailEnd type="none" w="med" len="med"/>
+                    </a:lnB>
+                    <a:solidFill>
+                      <a:srgbClr val="0D1F38"/>
+                    </a:solidFill>
+                  </a:tcPr>
+                </a:tc>
+                <a:extLst>
+                  <a:ext uri="{0D108BD9-81ED-4DB2-BD59-A6C34878D82A}">
+                    <a16:rowId xmlns:a16="http://schemas.microsoft.com/office/drawing/2014/main" val="10000"/>
+                  </a:ext>
+                </a:extLst>
+              </a:tr>
+              <a:tr h="301752">
+                <a:tc>
+                  <a:txBody>
+                    <a:bodyPr/>
+                    <a:lstStyle/>
+                    <a:p>
+                      <a:pPr marL="0" indent="0" algn="ctr">
+                        <a:buNone/>
+                      </a:pPr>
+                      <a:r>
+                        <a:rPr lang="en-US" sz="850" dirty="0">
+                          <a:solidFill>
+                            <a:srgbClr val="1E293B"/>
+                          </a:solidFill>
+                          <a:latin typeface="Calibri" pitchFamily="34" charset="0"/>
+                          <a:ea typeface="Calibri" pitchFamily="34" charset="-122"/>
+                          <a:cs typeface="Calibri" pitchFamily="34" charset="-120"/>
+                        </a:rPr>
+                        <a:t>1</a:t>
+                      </a:r>
+                      <a:endParaRPr lang="en-US" sz="850" dirty="0">
+                        <a:latin typeface="Calibri" charset="0"/>
+                        <a:ea typeface="Calibri" charset="0"/>
+                        <a:cs typeface="Calibri" charset="0"/>
+                      </a:endParaRPr>
+                    </a:p>
+                  </a:txBody>
+                  <a:tcPr>
+                    <a:lnL w="5080" cap="flat" cmpd="sng" algn="ctr">
+                      <a:solidFill>
+                        <a:srgbClr val="D1DDE8"/>
+                      </a:solidFill>
+                      <a:prstDash val="solid"/>
+                      <a:round/>
+                      <a:headEnd type="none" w="med" len="med"/>
+                      <a:tailEnd type="none" w="med" len="med"/>
+                    </a:lnL>
+                    <a:lnR w="5080" cap="flat" cmpd="sng" algn="ctr">
+                      <a:solidFill>
+                        <a:srgbClr val="D1DDE8"/>
+                      </a:solidFill>
+                      <a:prstDash val="solid"/>
+                      <a:round/>
+                      <a:headEnd type="none" w="med" len="med"/>
+                      <a:tailEnd type="none" w="med" len="med"/>
+                    </a:lnR>
+                    <a:lnT w="5080" cap="flat" cmpd="sng" algn="ctr">
+                      <a:solidFill>
+                        <a:srgbClr val="D1DDE8"/>
+                      </a:solidFill>
+                      <a:prstDash val="solid"/>
+                      <a:round/>
+                      <a:headEnd type="none" w="med" len="med"/>
+                      <a:tailEnd type="none" w="med" len="med"/>
+                    </a:lnT>
+                    <a:lnB w="5080" cap="flat" cmpd="sng" algn="ctr">
+                      <a:solidFill>
+                        <a:srgbClr val="D1DDE8"/>
+                      </a:solidFill>
+                      <a:prstDash val="solid"/>
+                      <a:round/>
+                      <a:headEnd type="none" w="med" len="med"/>
+                      <a:tailEnd type="none" w="med" len="med"/>
+                    </a:lnB>
+                    <a:solidFill>
+                      <a:srgbClr val="FFF5F5"/>
+                    </a:solidFill>
+                  </a:tcPr>
+                </a:tc>
+                <a:tc>
+                  <a:txBody>
+                    <a:bodyPr/>
+                    <a:lstStyle/>
+                    <a:p>
+                      <a:pPr marL="0" indent="0">
+                        <a:buNone/>
+                      </a:pPr>
+                      <a:r>
+                        <a:rPr lang="en-US" sz="850" b="1" dirty="0">
+                          <a:solidFill>
+                            <a:srgbClr val="1E293B"/>
+                          </a:solidFill>
+                          <a:latin typeface="Calibri" pitchFamily="34" charset="0"/>
+                          <a:ea typeface="Calibri" pitchFamily="34" charset="-122"/>
+                          <a:cs typeface="Calibri" pitchFamily="34" charset="-120"/>
+                        </a:rPr>
+                        <a:t>170489</a:t>
+                      </a:r>
+                      <a:endParaRPr lang="en-US" sz="850" dirty="0">
+                        <a:latin typeface="Calibri" charset="0"/>
+                        <a:ea typeface="Calibri" charset="0"/>
+                        <a:cs typeface="Calibri" charset="0"/>
+                      </a:endParaRPr>
+                    </a:p>
+                  </a:txBody>
+                  <a:tcPr>
+                    <a:lnL w="5080" cap="flat" cmpd="sng" algn="ctr">
+                      <a:solidFill>
+                        <a:srgbClr val="D1DDE8"/>
+                      </a:solidFill>
+                      <a:prstDash val="solid"/>
+                      <a:round/>
+                      <a:headEnd type="none" w="med" len="med"/>
+                      <a:tailEnd type="none" w="med" len="med"/>
+                    </a:lnL>
+                    <a:lnR w="5080" cap="flat" cmpd="sng" algn="ctr">
+                      <a:solidFill>
+                        <a:srgbClr val="D1DDE8"/>
+                      </a:solidFill>
+                      <a:prstDash val="solid"/>
+                      <a:round/>
+                      <a:headEnd type="none" w="med" len="med"/>
+                      <a:tailEnd type="none" w="med" len="med"/>
+                    </a:lnR>
+                    <a:lnT w="5080" cap="flat" cmpd="sng" algn="ctr">
+                      <a:solidFill>
+                        <a:srgbClr val="D1DDE8"/>
+                      </a:solidFill>
+                      <a:prstDash val="solid"/>
+                      <a:round/>
+                      <a:headEnd type="none" w="med" len="med"/>
+                      <a:tailEnd type="none" w="med" len="med"/>
+                    </a:lnT>
+                    <a:lnB w="5080" cap="flat" cmpd="sng" algn="ctr">
+                      <a:solidFill>
+                        <a:srgbClr val="D1DDE8"/>
+                      </a:solidFill>
+                      <a:prstDash val="solid"/>
+                      <a:round/>
+                      <a:headEnd type="none" w="med" len="med"/>
+                      <a:tailEnd type="none" w="med" len="med"/>
+                    </a:lnB>
+                    <a:solidFill>
+                      <a:srgbClr val="FFF5F5"/>
+                    </a:solidFill>
+                  </a:tcPr>
+                </a:tc>
+                <a:tc>
+                  <a:txBody>
+                    <a:bodyPr/>
+                    <a:lstStyle/>
+                    <a:p>
+                      <a:pPr marL="0" indent="0">
+                        <a:buNone/>
+                      </a:pPr>
+                      <a:r>
+                        <a:rPr lang="en-US" sz="850" dirty="0">
+                          <a:solidFill>
+                            <a:srgbClr val="1E293B"/>
+                          </a:solidFill>
+                          <a:latin typeface="Calibri" pitchFamily="34" charset="0"/>
+                          <a:ea typeface="Calibri" pitchFamily="34" charset="-122"/>
+                          <a:cs typeface="Calibri" pitchFamily="34" charset="-120"/>
+                        </a:rPr>
+                        <a:t>Inundaciones ago-2023 · NUEVOSUR</a:t>
+                      </a:r>
+                      <a:endParaRPr lang="en-US" sz="850" dirty="0">
+                        <a:latin typeface="Calibri" charset="0"/>
+                        <a:ea typeface="Calibri" charset="0"/>
+                        <a:cs typeface="Calibri" charset="0"/>
+                      </a:endParaRPr>
+                    </a:p>
+                  </a:txBody>
+                  <a:tcPr>
+                    <a:lnL w="5080" cap="flat" cmpd="sng" algn="ctr">
+                      <a:solidFill>
+                        <a:srgbClr val="D1DDE8"/>
+                      </a:solidFill>
+                      <a:prstDash val="solid"/>
+                      <a:round/>
+                      <a:headEnd type="none" w="med" len="med"/>
+                      <a:tailEnd type="none" w="med" len="med"/>
+                    </a:lnL>
+                    <a:lnR w="5080" cap="flat" cmpd="sng" algn="ctr">
+                      <a:solidFill>
+                        <a:srgbClr val="D1DDE8"/>
+                      </a:solidFill>
+                      <a:prstDash val="solid"/>
+                      <a:round/>
+                      <a:headEnd type="none" w="med" len="med"/>
+                      <a:tailEnd type="none" w="med" len="med"/>
+                    </a:lnR>
+                    <a:lnT w="5080" cap="flat" cmpd="sng" algn="ctr">
+                      <a:solidFill>
+                        <a:srgbClr val="D1DDE8"/>
+                      </a:solidFill>
+                      <a:prstDash val="solid"/>
+                      <a:round/>
+                      <a:headEnd type="none" w="med" len="med"/>
+                      <a:tailEnd type="none" w="med" len="med"/>
+                    </a:lnT>
+                    <a:lnB w="5080" cap="flat" cmpd="sng" algn="ctr">
+                      <a:solidFill>
+                        <a:srgbClr val="D1DDE8"/>
+                      </a:solidFill>
+                      <a:prstDash val="solid"/>
+                      <a:round/>
+                      <a:headEnd type="none" w="med" len="med"/>
+                      <a:tailEnd type="none" w="med" len="med"/>
+                    </a:lnB>
+                    <a:solidFill>
+                      <a:srgbClr val="FFF5F5"/>
+                    </a:solidFill>
+                  </a:tcPr>
+                </a:tc>
+                <a:tc>
+                  <a:txBody>
+                    <a:bodyPr/>
+                    <a:lstStyle/>
+                    <a:p>
+                      <a:pPr marL="0" indent="0" algn="ctr">
+                        <a:buNone/>
+                      </a:pPr>
+                      <a:r>
+                        <a:rPr lang="en-US" sz="850" dirty="0">
+                          <a:solidFill>
+                            <a:srgbClr val="64748B"/>
+                          </a:solidFill>
+                          <a:latin typeface="Calibri" pitchFamily="34" charset="0"/>
+                          <a:ea typeface="Calibri" pitchFamily="34" charset="-122"/>
+                          <a:cs typeface="Calibri" pitchFamily="34" charset="-120"/>
+                        </a:rPr>
+                        <a:t>UF</a:t>
+                      </a:r>
+                      <a:endParaRPr lang="en-US" sz="850" dirty="0">
+                        <a:latin typeface="Calibri" charset="0"/>
+                        <a:ea typeface="Calibri" charset="0"/>
+                        <a:cs typeface="Calibri" charset="0"/>
+                      </a:endParaRPr>
+                    </a:p>
+                  </a:txBody>
+                  <a:tcPr>
+                    <a:lnL w="5080" cap="flat" cmpd="sng" algn="ctr">
+                      <a:solidFill>
+                        <a:srgbClr val="D1DDE8"/>
+                      </a:solidFill>
+                      <a:prstDash val="solid"/>
+                      <a:round/>
+                      <a:headEnd type="none" w="med" len="med"/>
+                      <a:tailEnd type="none" w="med" len="med"/>
+                    </a:lnL>
+                    <a:lnR w="5080" cap="flat" cmpd="sng" algn="ctr">
+                      <a:solidFill>
+                        <a:srgbClr val="D1DDE8"/>
+                      </a:solidFill>
+                      <a:prstDash val="solid"/>
+                      <a:round/>
+                      <a:headEnd type="none" w="med" len="med"/>
+                      <a:tailEnd type="none" w="med" len="med"/>
+                    </a:lnR>
+                    <a:lnT w="5080" cap="flat" cmpd="sng" algn="ctr">
+                      <a:solidFill>
+                        <a:srgbClr val="D1DDE8"/>
+                      </a:solidFill>
+                      <a:prstDash val="solid"/>
+                      <a:round/>
+                      <a:headEnd type="none" w="med" len="med"/>
+                      <a:tailEnd type="none" w="med" len="med"/>
+                    </a:lnT>
+                    <a:lnB w="5080" cap="flat" cmpd="sng" algn="ctr">
+                      <a:solidFill>
+                        <a:srgbClr val="D1DDE8"/>
+                      </a:solidFill>
+                      <a:prstDash val="solid"/>
+                      <a:round/>
+                      <a:headEnd type="none" w="med" len="med"/>
+                      <a:tailEnd type="none" w="med" len="med"/>
+                    </a:lnB>
+                    <a:solidFill>
+                      <a:srgbClr val="FFF5F5"/>
+                    </a:solidFill>
+                  </a:tcPr>
+                </a:tc>
+                <a:tc>
+                  <a:txBody>
+                    <a:bodyPr/>
+                    <a:lstStyle/>
+                    <a:p>
+                      <a:pPr marL="0" indent="0" algn="ctr">
+                        <a:buNone/>
+                      </a:pPr>
+                      <a:r>
+                        <a:rPr lang="en-US" sz="900" b="1" dirty="0">
+                          <a:solidFill>
+                            <a:srgbClr val="991B1B"/>
+                          </a:solidFill>
+                          <a:latin typeface="Calibri" pitchFamily="34" charset="0"/>
+                          <a:ea typeface="Calibri" pitchFamily="34" charset="-122"/>
+                          <a:cs typeface="Calibri" pitchFamily="34" charset="-120"/>
+                        </a:rPr>
+                        <a:t>985</a:t>
+                      </a:r>
+                      <a:endParaRPr lang="en-US" sz="900" dirty="0">
+                        <a:latin typeface="Calibri" charset="0"/>
+                        <a:ea typeface="Calibri" charset="0"/>
+                        <a:cs typeface="Calibri" charset="0"/>
+                      </a:endParaRPr>
+                    </a:p>
+                  </a:txBody>
+                  <a:tcPr>
+                    <a:lnL w="5080" cap="flat" cmpd="sng" algn="ctr">
+                      <a:solidFill>
+                        <a:srgbClr val="D1DDE8"/>
+                      </a:solidFill>
+                      <a:prstDash val="solid"/>
+                      <a:round/>
+                      <a:headEnd type="none" w="med" len="med"/>
+                      <a:tailEnd type="none" w="med" len="med"/>
+                    </a:lnL>
+                    <a:lnR w="5080" cap="flat" cmpd="sng" algn="ctr">
+                      <a:solidFill>
+                        <a:srgbClr val="D1DDE8"/>
+                      </a:solidFill>
+                      <a:prstDash val="solid"/>
+                      <a:round/>
+                      <a:headEnd type="none" w="med" len="med"/>
+                      <a:tailEnd type="none" w="med" len="med"/>
+                    </a:lnR>
+                    <a:lnT w="5080" cap="flat" cmpd="sng" algn="ctr">
+                      <a:solidFill>
+                        <a:srgbClr val="D1DDE8"/>
+                      </a:solidFill>
+                      <a:prstDash val="solid"/>
+                      <a:round/>
+                      <a:headEnd type="none" w="med" len="med"/>
+                      <a:tailEnd type="none" w="med" len="med"/>
+                    </a:lnT>
+                    <a:lnB w="5080" cap="flat" cmpd="sng" algn="ctr">
+                      <a:solidFill>
+                        <a:srgbClr val="D1DDE8"/>
+                      </a:solidFill>
+                      <a:prstDash val="solid"/>
+                      <a:round/>
+                      <a:headEnd type="none" w="med" len="med"/>
+                      <a:tailEnd type="none" w="med" len="med"/>
+                    </a:lnB>
+                    <a:solidFill>
+                      <a:srgbClr val="FFF5F5"/>
+                    </a:solidFill>
+                  </a:tcPr>
+                </a:tc>
+                <a:tc>
+                  <a:txBody>
+                    <a:bodyPr/>
+                    <a:lstStyle/>
+                    <a:p>
+                      <a:pPr marL="0" indent="0" algn="ctr">
+                        <a:buNone/>
+                      </a:pPr>
+                      <a:r>
+                        <a:rPr lang="en-US" sz="900" b="1" dirty="0">
+                          <a:solidFill>
+                            <a:srgbClr val="0D7377"/>
+                          </a:solidFill>
+                          <a:latin typeface="Calibri" pitchFamily="34" charset="0"/>
+                          <a:ea typeface="Calibri" pitchFamily="34" charset="-122"/>
+                          <a:cs typeface="Calibri" pitchFamily="34" charset="-120"/>
+                        </a:rPr>
+                        <a:t>75%</a:t>
+                      </a:r>
+                      <a:endParaRPr lang="en-US" sz="900" dirty="0">
+                        <a:latin typeface="Calibri" charset="0"/>
+                        <a:ea typeface="Calibri" charset="0"/>
+                        <a:cs typeface="Calibri" charset="0"/>
+                      </a:endParaRPr>
+                    </a:p>
+                  </a:txBody>
+                  <a:tcPr>
+                    <a:lnL w="5080" cap="flat" cmpd="sng" algn="ctr">
+                      <a:solidFill>
+                        <a:srgbClr val="D1DDE8"/>
+                      </a:solidFill>
+                      <a:prstDash val="solid"/>
+                      <a:round/>
+                      <a:headEnd type="none" w="med" len="med"/>
+                      <a:tailEnd type="none" w="med" len="med"/>
+                    </a:lnL>
+                    <a:lnR w="5080" cap="flat" cmpd="sng" algn="ctr">
+                      <a:solidFill>
+                        <a:srgbClr val="D1DDE8"/>
+                      </a:solidFill>
+                      <a:prstDash val="solid"/>
+                      <a:round/>
+                      <a:headEnd type="none" w="med" len="med"/>
+                      <a:tailEnd type="none" w="med" len="med"/>
+                    </a:lnR>
+                    <a:lnT w="5080" cap="flat" cmpd="sng" algn="ctr">
+                      <a:solidFill>
+                        <a:srgbClr val="D1DDE8"/>
+                      </a:solidFill>
+                      <a:prstDash val="solid"/>
+                      <a:round/>
+                      <a:headEnd type="none" w="med" len="med"/>
+                      <a:tailEnd type="none" w="med" len="med"/>
+                    </a:lnT>
+                    <a:lnB w="5080" cap="flat" cmpd="sng" algn="ctr">
+                      <a:solidFill>
+                        <a:srgbClr val="D1DDE8"/>
+                      </a:solidFill>
+                      <a:prstDash val="solid"/>
+                      <a:round/>
+                      <a:headEnd type="none" w="med" len="med"/>
+                      <a:tailEnd type="none" w="med" len="med"/>
+                    </a:lnB>
+                    <a:solidFill>
+                      <a:srgbClr val="FFF5F5"/>
+                    </a:solidFill>
+                  </a:tcPr>
+                </a:tc>
+                <a:tc>
+                  <a:txBody>
+                    <a:bodyPr/>
+                    <a:lstStyle/>
+                    <a:p>
+                      <a:pPr marL="0" indent="0">
+                        <a:buNone/>
+                      </a:pPr>
+                      <a:r>
+                        <a:rPr lang="en-US" sz="750" i="1" dirty="0">
+                          <a:solidFill>
+                            <a:srgbClr val="64748B"/>
+                          </a:solidFill>
+                          <a:latin typeface="Calibri" pitchFamily="34" charset="0"/>
+                          <a:ea typeface="Calibri" pitchFamily="34" charset="-122"/>
+                          <a:cs typeface="Calibri" pitchFamily="34" charset="-120"/>
+                        </a:rPr>
+                        <a:t>Para ajuste fines de junio</a:t>
+                      </a:r>
+                      <a:endParaRPr lang="en-US" sz="750" dirty="0">
+                        <a:latin typeface="Calibri" charset="0"/>
+                        <a:ea typeface="Calibri" charset="0"/>
+                        <a:cs typeface="Calibri" charset="0"/>
+                      </a:endParaRPr>
+                    </a:p>
+                  </a:txBody>
+                  <a:tcPr>
+                    <a:lnL w="5080" cap="flat" cmpd="sng" algn="ctr">
+                      <a:solidFill>
+                        <a:srgbClr val="D1DDE8"/>
+                      </a:solidFill>
+                      <a:prstDash val="solid"/>
+                      <a:round/>
+                      <a:headEnd type="none" w="med" len="med"/>
+                      <a:tailEnd type="none" w="med" len="med"/>
+                    </a:lnL>
+                    <a:lnR w="5080" cap="flat" cmpd="sng" algn="ctr">
+                      <a:solidFill>
+                        <a:srgbClr val="D1DDE8"/>
+                      </a:solidFill>
+                      <a:prstDash val="solid"/>
+                      <a:round/>
+                      <a:headEnd type="none" w="med" len="med"/>
+                      <a:tailEnd type="none" w="med" len="med"/>
+                    </a:lnR>
+                    <a:lnT w="5080" cap="flat" cmpd="sng" algn="ctr">
+                      <a:solidFill>
+                        <a:srgbClr val="D1DDE8"/>
+                      </a:solidFill>
+                      <a:prstDash val="solid"/>
+                      <a:round/>
+                      <a:headEnd type="none" w="med" len="med"/>
+                      <a:tailEnd type="none" w="med" len="med"/>
+                    </a:lnT>
+                    <a:lnB w="5080" cap="flat" cmpd="sng" algn="ctr">
+                      <a:solidFill>
+                        <a:srgbClr val="D1DDE8"/>
+                      </a:solidFill>
+                      <a:prstDash val="solid"/>
+                      <a:round/>
+                      <a:headEnd type="none" w="med" len="med"/>
+                      <a:tailEnd type="none" w="med" len="med"/>
+                    </a:lnB>
+                    <a:solidFill>
+                      <a:srgbClr val="FFF5F5"/>
+                    </a:solidFill>
+                  </a:tcPr>
+                </a:tc>
+                <a:extLst>
+                  <a:ext uri="{0D108BD9-81ED-4DB2-BD59-A6C34878D82A}">
+                    <a16:rowId xmlns:a16="http://schemas.microsoft.com/office/drawing/2014/main" val="10001"/>
+                  </a:ext>
+                </a:extLst>
+              </a:tr>
+              <a:tr h="301752">
+                <a:tc>
+                  <a:txBody>
+                    <a:bodyPr/>
+                    <a:lstStyle/>
+                    <a:p>
+                      <a:pPr marL="0" indent="0" algn="ctr">
+                        <a:buNone/>
+                      </a:pPr>
+                      <a:r>
+                        <a:rPr lang="en-US" sz="850" dirty="0">
+                          <a:solidFill>
+                            <a:srgbClr val="1E293B"/>
+                          </a:solidFill>
+                          <a:latin typeface="Calibri" pitchFamily="34" charset="0"/>
+                          <a:ea typeface="Calibri" pitchFamily="34" charset="-122"/>
+                          <a:cs typeface="Calibri" pitchFamily="34" charset="-120"/>
+                        </a:rPr>
+                        <a:t>2</a:t>
+                      </a:r>
+                      <a:endParaRPr lang="en-US" sz="850" dirty="0">
+                        <a:latin typeface="Calibri" charset="0"/>
+                        <a:ea typeface="Calibri" charset="0"/>
+                        <a:cs typeface="Calibri" charset="0"/>
+                      </a:endParaRPr>
+                    </a:p>
+                  </a:txBody>
+                  <a:tcPr>
+                    <a:lnL w="5080" cap="flat" cmpd="sng" algn="ctr">
+                      <a:solidFill>
+                        <a:srgbClr val="D1DDE8"/>
+                      </a:solidFill>
+                      <a:prstDash val="solid"/>
+                      <a:round/>
+                      <a:headEnd type="none" w="med" len="med"/>
+                      <a:tailEnd type="none" w="med" len="med"/>
+                    </a:lnL>
+                    <a:lnR w="5080" cap="flat" cmpd="sng" algn="ctr">
+                      <a:solidFill>
+                        <a:srgbClr val="D1DDE8"/>
+                      </a:solidFill>
+                      <a:prstDash val="solid"/>
+                      <a:round/>
+                      <a:headEnd type="none" w="med" len="med"/>
+                      <a:tailEnd type="none" w="med" len="med"/>
+                    </a:lnR>
+                    <a:lnT w="5080" cap="flat" cmpd="sng" algn="ctr">
+                      <a:solidFill>
+                        <a:srgbClr val="D1DDE8"/>
+                      </a:solidFill>
+                      <a:prstDash val="solid"/>
+                      <a:round/>
+                      <a:headEnd type="none" w="med" len="med"/>
+                      <a:tailEnd type="none" w="med" len="med"/>
+                    </a:lnT>
+                    <a:lnB w="5080" cap="flat" cmpd="sng" algn="ctr">
+                      <a:solidFill>
+                        <a:srgbClr val="D1DDE8"/>
+                      </a:solidFill>
+                      <a:prstDash val="solid"/>
+                      <a:round/>
+                      <a:headEnd type="none" w="med" len="med"/>
+                      <a:tailEnd type="none" w="med" len="med"/>
+                    </a:lnB>
+                    <a:solidFill>
+                      <a:srgbClr val="FFF5F5"/>
+                    </a:solidFill>
+                  </a:tcPr>
+                </a:tc>
+                <a:tc>
+                  <a:txBody>
+                    <a:bodyPr/>
+                    <a:lstStyle/>
+                    <a:p>
+                      <a:pPr marL="0" indent="0">
+                        <a:buNone/>
+                      </a:pPr>
+                      <a:r>
+                        <a:rPr lang="en-US" sz="850" b="1" dirty="0">
+                          <a:solidFill>
+                            <a:srgbClr val="1E293B"/>
+                          </a:solidFill>
+                          <a:latin typeface="Calibri" pitchFamily="34" charset="0"/>
+                          <a:ea typeface="Calibri" pitchFamily="34" charset="-122"/>
+                          <a:cs typeface="Calibri" pitchFamily="34" charset="-120"/>
+                        </a:rPr>
+                        <a:t>173279</a:t>
+                      </a:r>
+                      <a:endParaRPr lang="en-US" sz="850" dirty="0">
+                        <a:latin typeface="Calibri" charset="0"/>
+                        <a:ea typeface="Calibri" charset="0"/>
+                        <a:cs typeface="Calibri" charset="0"/>
+                      </a:endParaRPr>
+                    </a:p>
+                  </a:txBody>
+                  <a:tcPr>
+                    <a:lnL w="5080" cap="flat" cmpd="sng" algn="ctr">
+                      <a:solidFill>
+                        <a:srgbClr val="D1DDE8"/>
+                      </a:solidFill>
+                      <a:prstDash val="solid"/>
+                      <a:round/>
+                      <a:headEnd type="none" w="med" len="med"/>
+                      <a:tailEnd type="none" w="med" len="med"/>
+                    </a:lnL>
+                    <a:lnR w="5080" cap="flat" cmpd="sng" algn="ctr">
+                      <a:solidFill>
+                        <a:srgbClr val="D1DDE8"/>
+                      </a:solidFill>
+                      <a:prstDash val="solid"/>
+                      <a:round/>
+                      <a:headEnd type="none" w="med" len="med"/>
+                      <a:tailEnd type="none" w="med" len="med"/>
+                    </a:lnR>
+                    <a:lnT w="5080" cap="flat" cmpd="sng" algn="ctr">
+                      <a:solidFill>
+                        <a:srgbClr val="D1DDE8"/>
+                      </a:solidFill>
+                      <a:prstDash val="solid"/>
+                      <a:round/>
+                      <a:headEnd type="none" w="med" len="med"/>
+                      <a:tailEnd type="none" w="med" len="med"/>
+                    </a:lnT>
+                    <a:lnB w="5080" cap="flat" cmpd="sng" algn="ctr">
+                      <a:solidFill>
+                        <a:srgbClr val="D1DDE8"/>
+                      </a:solidFill>
+                      <a:prstDash val="solid"/>
+                      <a:round/>
+                      <a:headEnd type="none" w="med" len="med"/>
+                      <a:tailEnd type="none" w="med" len="med"/>
+                    </a:lnB>
+                    <a:solidFill>
+                      <a:srgbClr val="FFF5F5"/>
+                    </a:solidFill>
+                  </a:tcPr>
+                </a:tc>
+                <a:tc>
+                  <a:txBody>
+                    <a:bodyPr/>
+                    <a:lstStyle/>
+                    <a:p>
+                      <a:pPr marL="0" indent="0">
+                        <a:buNone/>
+                      </a:pPr>
+                      <a:r>
+                        <a:rPr lang="en-US" sz="850" dirty="0">
+                          <a:solidFill>
+                            <a:srgbClr val="1E293B"/>
+                          </a:solidFill>
+                          <a:latin typeface="Calibri" pitchFamily="34" charset="0"/>
+                          <a:ea typeface="Calibri" pitchFamily="34" charset="-122"/>
+                          <a:cs typeface="Calibri" pitchFamily="34" charset="-120"/>
+                        </a:rPr>
+                        <a:t>Turbina CTM3 – ENGIE (Starr)</a:t>
+                      </a:r>
+                      <a:endParaRPr lang="en-US" sz="850" dirty="0">
+                        <a:latin typeface="Calibri" charset="0"/>
+                        <a:ea typeface="Calibri" charset="0"/>
+                        <a:cs typeface="Calibri" charset="0"/>
+                      </a:endParaRPr>
+                    </a:p>
+                  </a:txBody>
+                  <a:tcPr>
+                    <a:lnL w="5080" cap="flat" cmpd="sng" algn="ctr">
+                      <a:solidFill>
+                        <a:srgbClr val="D1DDE8"/>
+                      </a:solidFill>
+                      <a:prstDash val="solid"/>
+                      <a:round/>
+                      <a:headEnd type="none" w="med" len="med"/>
+                      <a:tailEnd type="none" w="med" len="med"/>
+                    </a:lnL>
+                    <a:lnR w="5080" cap="flat" cmpd="sng" algn="ctr">
+                      <a:solidFill>
+                        <a:srgbClr val="D1DDE8"/>
+                      </a:solidFill>
+                      <a:prstDash val="solid"/>
+                      <a:round/>
+                      <a:headEnd type="none" w="med" len="med"/>
+                      <a:tailEnd type="none" w="med" len="med"/>
+                    </a:lnR>
+                    <a:lnT w="5080" cap="flat" cmpd="sng" algn="ctr">
+                      <a:solidFill>
+                        <a:srgbClr val="D1DDE8"/>
+                      </a:solidFill>
+                      <a:prstDash val="solid"/>
+                      <a:round/>
+                      <a:headEnd type="none" w="med" len="med"/>
+                      <a:tailEnd type="none" w="med" len="med"/>
+                    </a:lnT>
+                    <a:lnB w="5080" cap="flat" cmpd="sng" algn="ctr">
+                      <a:solidFill>
+                        <a:srgbClr val="D1DDE8"/>
+                      </a:solidFill>
+                      <a:prstDash val="solid"/>
+                      <a:round/>
+                      <a:headEnd type="none" w="med" len="med"/>
+                      <a:tailEnd type="none" w="med" len="med"/>
+                    </a:lnB>
+                    <a:solidFill>
+                      <a:srgbClr val="FFF5F5"/>
+                    </a:solidFill>
+                  </a:tcPr>
+                </a:tc>
+                <a:tc>
+                  <a:txBody>
+                    <a:bodyPr/>
+                    <a:lstStyle/>
+                    <a:p>
+                      <a:pPr marL="0" indent="0" algn="ctr">
+                        <a:buNone/>
+                      </a:pPr>
+                      <a:r>
+                        <a:rPr lang="en-US" sz="850" dirty="0">
+                          <a:solidFill>
+                            <a:srgbClr val="64748B"/>
+                          </a:solidFill>
+                          <a:latin typeface="Calibri" pitchFamily="34" charset="0"/>
+                          <a:ea typeface="Calibri" pitchFamily="34" charset="-122"/>
+                          <a:cs typeface="Calibri" pitchFamily="34" charset="-120"/>
+                        </a:rPr>
+                        <a:t>USD</a:t>
+                      </a:r>
+                      <a:endParaRPr lang="en-US" sz="850" dirty="0">
+                        <a:latin typeface="Calibri" charset="0"/>
+                        <a:ea typeface="Calibri" charset="0"/>
+                        <a:cs typeface="Calibri" charset="0"/>
+                      </a:endParaRPr>
+                    </a:p>
+                  </a:txBody>
+                  <a:tcPr>
+                    <a:lnL w="5080" cap="flat" cmpd="sng" algn="ctr">
+                      <a:solidFill>
+                        <a:srgbClr val="D1DDE8"/>
+                      </a:solidFill>
+                      <a:prstDash val="solid"/>
+                      <a:round/>
+                      <a:headEnd type="none" w="med" len="med"/>
+                      <a:tailEnd type="none" w="med" len="med"/>
+                    </a:lnL>
+                    <a:lnR w="5080" cap="flat" cmpd="sng" algn="ctr">
+                      <a:solidFill>
+                        <a:srgbClr val="D1DDE8"/>
+                      </a:solidFill>
+                      <a:prstDash val="solid"/>
+                      <a:round/>
+                      <a:headEnd type="none" w="med" len="med"/>
+                      <a:tailEnd type="none" w="med" len="med"/>
+                    </a:lnR>
+                    <a:lnT w="5080" cap="flat" cmpd="sng" algn="ctr">
+                      <a:solidFill>
+                        <a:srgbClr val="D1DDE8"/>
+                      </a:solidFill>
+                      <a:prstDash val="solid"/>
+                      <a:round/>
+                      <a:headEnd type="none" w="med" len="med"/>
+                      <a:tailEnd type="none" w="med" len="med"/>
+                    </a:lnT>
+                    <a:lnB w="5080" cap="flat" cmpd="sng" algn="ctr">
+                      <a:solidFill>
+                        <a:srgbClr val="D1DDE8"/>
+                      </a:solidFill>
+                      <a:prstDash val="solid"/>
+                      <a:round/>
+                      <a:headEnd type="none" w="med" len="med"/>
+                      <a:tailEnd type="none" w="med" len="med"/>
+                    </a:lnB>
+                    <a:solidFill>
+                      <a:srgbClr val="FFF5F5"/>
+                    </a:solidFill>
+                  </a:tcPr>
+                </a:tc>
+                <a:tc>
+                  <a:txBody>
+                    <a:bodyPr/>
+                    <a:lstStyle/>
+                    <a:p>
+                      <a:pPr marL="0" indent="0" algn="ctr">
+                        <a:buNone/>
+                      </a:pPr>
+                      <a:r>
+                        <a:rPr lang="en-US" sz="900" b="1" dirty="0">
+                          <a:solidFill>
+                            <a:srgbClr val="991B1B"/>
+                          </a:solidFill>
+                          <a:latin typeface="Calibri" pitchFamily="34" charset="0"/>
+                          <a:ea typeface="Calibri" pitchFamily="34" charset="-122"/>
+                          <a:cs typeface="Calibri" pitchFamily="34" charset="-120"/>
+                        </a:rPr>
+                        <a:t>923</a:t>
+                      </a:r>
+                      <a:endParaRPr lang="en-US" sz="900" dirty="0">
+                        <a:latin typeface="Calibri" charset="0"/>
+                        <a:ea typeface="Calibri" charset="0"/>
+                        <a:cs typeface="Calibri" charset="0"/>
+                      </a:endParaRPr>
+                    </a:p>
+                  </a:txBody>
+                  <a:tcPr>
+                    <a:lnL w="5080" cap="flat" cmpd="sng" algn="ctr">
+                      <a:solidFill>
+                        <a:srgbClr val="D1DDE8"/>
+                      </a:solidFill>
+                      <a:prstDash val="solid"/>
+                      <a:round/>
+                      <a:headEnd type="none" w="med" len="med"/>
+                      <a:tailEnd type="none" w="med" len="med"/>
+                    </a:lnL>
+                    <a:lnR w="5080" cap="flat" cmpd="sng" algn="ctr">
+                      <a:solidFill>
+                        <a:srgbClr val="D1DDE8"/>
+                      </a:solidFill>
+                      <a:prstDash val="solid"/>
+                      <a:round/>
+                      <a:headEnd type="none" w="med" len="med"/>
+                      <a:tailEnd type="none" w="med" len="med"/>
+                    </a:lnR>
+                    <a:lnT w="5080" cap="flat" cmpd="sng" algn="ctr">
+                      <a:solidFill>
+                        <a:srgbClr val="D1DDE8"/>
+                      </a:solidFill>
+                      <a:prstDash val="solid"/>
+                      <a:round/>
+                      <a:headEnd type="none" w="med" len="med"/>
+                      <a:tailEnd type="none" w="med" len="med"/>
+                    </a:lnT>
+                    <a:lnB w="5080" cap="flat" cmpd="sng" algn="ctr">
+                      <a:solidFill>
+                        <a:srgbClr val="D1DDE8"/>
+                      </a:solidFill>
+                      <a:prstDash val="solid"/>
+                      <a:round/>
+                      <a:headEnd type="none" w="med" len="med"/>
+                      <a:tailEnd type="none" w="med" len="med"/>
+                    </a:lnB>
+                    <a:solidFill>
+                      <a:srgbClr val="FFF5F5"/>
+                    </a:solidFill>
+                  </a:tcPr>
+                </a:tc>
+                <a:tc>
+                  <a:txBody>
+                    <a:bodyPr/>
+                    <a:lstStyle/>
+                    <a:p>
+                      <a:pPr marL="0" indent="0" algn="ctr">
+                        <a:buNone/>
+                      </a:pPr>
+                      <a:r>
+                        <a:rPr lang="en-US" sz="900" b="1" dirty="0">
+                          <a:solidFill>
+                            <a:srgbClr val="0D7377"/>
+                          </a:solidFill>
+                          <a:latin typeface="Calibri" pitchFamily="34" charset="0"/>
+                          <a:ea typeface="Calibri" pitchFamily="34" charset="-122"/>
+                          <a:cs typeface="Calibri" pitchFamily="34" charset="-120"/>
+                        </a:rPr>
+                        <a:t>75%</a:t>
+                      </a:r>
+                      <a:endParaRPr lang="en-US" sz="900" dirty="0">
+                        <a:latin typeface="Calibri" charset="0"/>
+                        <a:ea typeface="Calibri" charset="0"/>
+                        <a:cs typeface="Calibri" charset="0"/>
+                      </a:endParaRPr>
+                    </a:p>
+                  </a:txBody>
+                  <a:tcPr>
+                    <a:lnL w="5080" cap="flat" cmpd="sng" algn="ctr">
+                      <a:solidFill>
+                        <a:srgbClr val="D1DDE8"/>
+                      </a:solidFill>
+                      <a:prstDash val="solid"/>
+                      <a:round/>
+                      <a:headEnd type="none" w="med" len="med"/>
+                      <a:tailEnd type="none" w="med" len="med"/>
+                    </a:lnL>
+                    <a:lnR w="5080" cap="flat" cmpd="sng" algn="ctr">
+                      <a:solidFill>
+                        <a:srgbClr val="D1DDE8"/>
+                      </a:solidFill>
+                      <a:prstDash val="solid"/>
+                      <a:round/>
+                      <a:headEnd type="none" w="med" len="med"/>
+                      <a:tailEnd type="none" w="med" len="med"/>
+                    </a:lnR>
+                    <a:lnT w="5080" cap="flat" cmpd="sng" algn="ctr">
+                      <a:solidFill>
+                        <a:srgbClr val="D1DDE8"/>
+                      </a:solidFill>
+                      <a:prstDash val="solid"/>
+                      <a:round/>
+                      <a:headEnd type="none" w="med" len="med"/>
+                      <a:tailEnd type="none" w="med" len="med"/>
+                    </a:lnT>
+                    <a:lnB w="5080" cap="flat" cmpd="sng" algn="ctr">
+                      <a:solidFill>
+                        <a:srgbClr val="D1DDE8"/>
+                      </a:solidFill>
+                      <a:prstDash val="solid"/>
+                      <a:round/>
+                      <a:headEnd type="none" w="med" len="med"/>
+                      <a:tailEnd type="none" w="med" len="med"/>
+                    </a:lnB>
+                    <a:solidFill>
+                      <a:srgbClr val="FFF5F5"/>
+                    </a:solidFill>
+                  </a:tcPr>
+                </a:tc>
+                <a:tc>
+                  <a:txBody>
+                    <a:bodyPr/>
+                    <a:lstStyle/>
+                    <a:p>
+                      <a:pPr marL="0" indent="0">
+                        <a:buNone/>
+                      </a:pPr>
+                      <a:r>
+                        <a:rPr lang="en-US" sz="750" i="1" dirty="0">
+                          <a:solidFill>
+                            <a:srgbClr val="64748B"/>
+                          </a:solidFill>
+                          <a:latin typeface="Calibri" pitchFamily="34" charset="0"/>
+                          <a:ea typeface="Calibri" pitchFamily="34" charset="-122"/>
+                          <a:cs typeface="Calibri" pitchFamily="34" charset="-120"/>
+                        </a:rPr>
+                        <a:t>A</a:t>
+                      </a:r>
+                      <a:r>
+                        <a:rPr lang="en-US" sz="750" i="1" baseline="0" dirty="0">
+                          <a:solidFill>
+                            <a:srgbClr val="64748B"/>
+                          </a:solidFill>
+                          <a:latin typeface="Calibri" pitchFamily="34" charset="0"/>
+                          <a:ea typeface="Calibri" pitchFamily="34" charset="-122"/>
+                          <a:cs typeface="Calibri" pitchFamily="34" charset="-120"/>
+                        </a:rPr>
+                        <a:t> la </a:t>
+                      </a:r>
+                      <a:r>
+                        <a:rPr lang="en-US" sz="750" i="1" baseline="0" dirty="0" err="1">
+                          <a:solidFill>
+                            <a:srgbClr val="64748B"/>
+                          </a:solidFill>
+                          <a:latin typeface="Calibri" pitchFamily="34" charset="0"/>
+                          <a:ea typeface="Calibri" pitchFamily="34" charset="-122"/>
+                          <a:cs typeface="Calibri" pitchFamily="34" charset="-120"/>
+                        </a:rPr>
+                        <a:t>espera</a:t>
+                      </a:r>
+                      <a:r>
+                        <a:rPr lang="en-US" sz="750" i="1" baseline="0" dirty="0">
+                          <a:solidFill>
+                            <a:srgbClr val="64748B"/>
+                          </a:solidFill>
+                          <a:latin typeface="Calibri" pitchFamily="34" charset="0"/>
+                          <a:ea typeface="Calibri" pitchFamily="34" charset="-122"/>
+                          <a:cs typeface="Calibri" pitchFamily="34" charset="-120"/>
+                        </a:rPr>
+                        <a:t> de la </a:t>
+                      </a:r>
+                      <a:r>
+                        <a:rPr lang="en-US" sz="750" i="1" baseline="0" dirty="0" err="1">
+                          <a:solidFill>
+                            <a:srgbClr val="64748B"/>
+                          </a:solidFill>
+                          <a:latin typeface="Calibri" pitchFamily="34" charset="0"/>
+                          <a:ea typeface="Calibri" pitchFamily="34" charset="-122"/>
+                          <a:cs typeface="Calibri" pitchFamily="34" charset="-120"/>
+                        </a:rPr>
+                        <a:t>aprobación</a:t>
+                      </a:r>
+                      <a:r>
+                        <a:rPr lang="en-US" sz="750" i="1" baseline="0" dirty="0">
+                          <a:solidFill>
+                            <a:srgbClr val="64748B"/>
+                          </a:solidFill>
+                          <a:latin typeface="Calibri" pitchFamily="34" charset="0"/>
+                          <a:ea typeface="Calibri" pitchFamily="34" charset="-122"/>
+                          <a:cs typeface="Calibri" pitchFamily="34" charset="-120"/>
+                        </a:rPr>
+                        <a:t> del BI </a:t>
+                      </a:r>
+                      <a:r>
+                        <a:rPr lang="en-US" sz="750" i="1" baseline="0" dirty="0" err="1">
+                          <a:solidFill>
+                            <a:srgbClr val="64748B"/>
+                          </a:solidFill>
+                          <a:latin typeface="Calibri" pitchFamily="34" charset="0"/>
+                          <a:ea typeface="Calibri" pitchFamily="34" charset="-122"/>
+                          <a:cs typeface="Calibri" pitchFamily="34" charset="-120"/>
+                        </a:rPr>
+                        <a:t>por</a:t>
+                      </a:r>
+                      <a:r>
+                        <a:rPr lang="en-US" sz="750" i="1" baseline="0" dirty="0">
+                          <a:solidFill>
+                            <a:srgbClr val="64748B"/>
+                          </a:solidFill>
+                          <a:latin typeface="Calibri" pitchFamily="34" charset="0"/>
+                          <a:ea typeface="Calibri" pitchFamily="34" charset="-122"/>
+                          <a:cs typeface="Calibri" pitchFamily="34" charset="-120"/>
+                        </a:rPr>
+                        <a:t> </a:t>
+                      </a:r>
+                      <a:r>
+                        <a:rPr lang="en-US" sz="750" i="1" baseline="0" dirty="0" err="1">
+                          <a:solidFill>
+                            <a:srgbClr val="64748B"/>
+                          </a:solidFill>
+                          <a:latin typeface="Calibri" pitchFamily="34" charset="0"/>
+                          <a:ea typeface="Calibri" pitchFamily="34" charset="-122"/>
+                          <a:cs typeface="Calibri" pitchFamily="34" charset="-120"/>
+                        </a:rPr>
+                        <a:t>parte</a:t>
+                      </a:r>
+                      <a:r>
+                        <a:rPr lang="en-US" sz="750" i="1" baseline="0" dirty="0">
+                          <a:solidFill>
+                            <a:srgbClr val="64748B"/>
+                          </a:solidFill>
+                          <a:latin typeface="Calibri" pitchFamily="34" charset="0"/>
+                          <a:ea typeface="Calibri" pitchFamily="34" charset="-122"/>
+                          <a:cs typeface="Calibri" pitchFamily="34" charset="-120"/>
+                        </a:rPr>
+                        <a:t> de Engie</a:t>
+                      </a:r>
+                      <a:endParaRPr lang="en-US" sz="750" dirty="0">
+                        <a:latin typeface="Calibri" charset="0"/>
+                        <a:ea typeface="Calibri" charset="0"/>
+                        <a:cs typeface="Calibri" charset="0"/>
+                      </a:endParaRPr>
+                    </a:p>
+                  </a:txBody>
+                  <a:tcPr>
+                    <a:lnL w="5080" cap="flat" cmpd="sng" algn="ctr">
+                      <a:solidFill>
+                        <a:srgbClr val="D1DDE8"/>
+                      </a:solidFill>
+                      <a:prstDash val="solid"/>
+                      <a:round/>
+                      <a:headEnd type="none" w="med" len="med"/>
+                      <a:tailEnd type="none" w="med" len="med"/>
+                    </a:lnL>
+                    <a:lnR w="5080" cap="flat" cmpd="sng" algn="ctr">
+                      <a:solidFill>
+                        <a:srgbClr val="D1DDE8"/>
+                      </a:solidFill>
+                      <a:prstDash val="solid"/>
+                      <a:round/>
+                      <a:headEnd type="none" w="med" len="med"/>
+                      <a:tailEnd type="none" w="med" len="med"/>
+                    </a:lnR>
+                    <a:lnT w="5080" cap="flat" cmpd="sng" algn="ctr">
+                      <a:solidFill>
+                        <a:srgbClr val="D1DDE8"/>
+                      </a:solidFill>
+                      <a:prstDash val="solid"/>
+                      <a:round/>
+                      <a:headEnd type="none" w="med" len="med"/>
+                      <a:tailEnd type="none" w="med" len="med"/>
+                    </a:lnT>
+                    <a:lnB w="5080" cap="flat" cmpd="sng" algn="ctr">
+                      <a:solidFill>
+                        <a:srgbClr val="D1DDE8"/>
+                      </a:solidFill>
+                      <a:prstDash val="solid"/>
+                      <a:round/>
+                      <a:headEnd type="none" w="med" len="med"/>
+                      <a:tailEnd type="none" w="med" len="med"/>
+                    </a:lnB>
+                    <a:solidFill>
+                      <a:srgbClr val="FFF5F5"/>
+                    </a:solidFill>
+                  </a:tcPr>
+                </a:tc>
+                <a:extLst>
+                  <a:ext uri="{0D108BD9-81ED-4DB2-BD59-A6C34878D82A}">
+                    <a16:rowId xmlns:a16="http://schemas.microsoft.com/office/drawing/2014/main" val="10002"/>
+                  </a:ext>
+                </a:extLst>
+              </a:tr>
+              <a:tr h="301752">
+                <a:tc>
+                  <a:txBody>
+                    <a:bodyPr/>
+                    <a:lstStyle/>
+                    <a:p>
+                      <a:pPr marL="0" indent="0" algn="ctr">
+                        <a:buNone/>
+                      </a:pPr>
+                      <a:r>
+                        <a:rPr lang="en-US" sz="850" dirty="0">
+                          <a:solidFill>
+                            <a:srgbClr val="1E293B"/>
+                          </a:solidFill>
+                          <a:latin typeface="Calibri" pitchFamily="34" charset="0"/>
+                          <a:ea typeface="Calibri" pitchFamily="34" charset="-122"/>
+                          <a:cs typeface="Calibri" pitchFamily="34" charset="-120"/>
+                        </a:rPr>
+                        <a:t>3</a:t>
+                      </a:r>
+                      <a:endParaRPr lang="en-US" sz="850" dirty="0">
+                        <a:latin typeface="Calibri" charset="0"/>
+                        <a:ea typeface="Calibri" charset="0"/>
+                        <a:cs typeface="Calibri" charset="0"/>
+                      </a:endParaRPr>
+                    </a:p>
+                  </a:txBody>
+                  <a:tcPr>
+                    <a:lnL w="5080" cap="flat" cmpd="sng" algn="ctr">
+                      <a:solidFill>
+                        <a:srgbClr val="D1DDE8"/>
+                      </a:solidFill>
+                      <a:prstDash val="solid"/>
+                      <a:round/>
+                      <a:headEnd type="none" w="med" len="med"/>
+                      <a:tailEnd type="none" w="med" len="med"/>
+                    </a:lnL>
+                    <a:lnR w="5080" cap="flat" cmpd="sng" algn="ctr">
+                      <a:solidFill>
+                        <a:srgbClr val="D1DDE8"/>
+                      </a:solidFill>
+                      <a:prstDash val="solid"/>
+                      <a:round/>
+                      <a:headEnd type="none" w="med" len="med"/>
+                      <a:tailEnd type="none" w="med" len="med"/>
+                    </a:lnR>
+                    <a:lnT w="5080" cap="flat" cmpd="sng" algn="ctr">
+                      <a:solidFill>
+                        <a:srgbClr val="D1DDE8"/>
+                      </a:solidFill>
+                      <a:prstDash val="solid"/>
+                      <a:round/>
+                      <a:headEnd type="none" w="med" len="med"/>
+                      <a:tailEnd type="none" w="med" len="med"/>
+                    </a:lnT>
+                    <a:lnB w="5080" cap="flat" cmpd="sng" algn="ctr">
+                      <a:solidFill>
+                        <a:srgbClr val="D1DDE8"/>
+                      </a:solidFill>
+                      <a:prstDash val="solid"/>
+                      <a:round/>
+                      <a:headEnd type="none" w="med" len="med"/>
+                      <a:tailEnd type="none" w="med" len="med"/>
+                    </a:lnB>
+                    <a:solidFill>
+                      <a:srgbClr val="FFF5F5"/>
+                    </a:solidFill>
+                  </a:tcPr>
+                </a:tc>
+                <a:tc>
+                  <a:txBody>
+                    <a:bodyPr/>
+                    <a:lstStyle/>
+                    <a:p>
+                      <a:pPr marL="0" indent="0">
+                        <a:buNone/>
+                      </a:pPr>
+                      <a:r>
+                        <a:rPr lang="en-US" sz="850" b="1" dirty="0">
+                          <a:solidFill>
+                            <a:srgbClr val="1E293B"/>
+                          </a:solidFill>
+                          <a:latin typeface="Calibri" pitchFamily="34" charset="0"/>
+                          <a:ea typeface="Calibri" pitchFamily="34" charset="-122"/>
+                          <a:cs typeface="Calibri" pitchFamily="34" charset="-120"/>
+                        </a:rPr>
+                        <a:t>173278</a:t>
+                      </a:r>
+                      <a:endParaRPr lang="en-US" sz="850" dirty="0">
+                        <a:latin typeface="Calibri" charset="0"/>
+                        <a:ea typeface="Calibri" charset="0"/>
+                        <a:cs typeface="Calibri" charset="0"/>
+                      </a:endParaRPr>
+                    </a:p>
+                  </a:txBody>
+                  <a:tcPr>
+                    <a:lnL w="5080" cap="flat" cmpd="sng" algn="ctr">
+                      <a:solidFill>
+                        <a:srgbClr val="D1DDE8"/>
+                      </a:solidFill>
+                      <a:prstDash val="solid"/>
+                      <a:round/>
+                      <a:headEnd type="none" w="med" len="med"/>
+                      <a:tailEnd type="none" w="med" len="med"/>
+                    </a:lnL>
+                    <a:lnR w="5080" cap="flat" cmpd="sng" algn="ctr">
+                      <a:solidFill>
+                        <a:srgbClr val="D1DDE8"/>
+                      </a:solidFill>
+                      <a:prstDash val="solid"/>
+                      <a:round/>
+                      <a:headEnd type="none" w="med" len="med"/>
+                      <a:tailEnd type="none" w="med" len="med"/>
+                    </a:lnR>
+                    <a:lnT w="5080" cap="flat" cmpd="sng" algn="ctr">
+                      <a:solidFill>
+                        <a:srgbClr val="D1DDE8"/>
+                      </a:solidFill>
+                      <a:prstDash val="solid"/>
+                      <a:round/>
+                      <a:headEnd type="none" w="med" len="med"/>
+                      <a:tailEnd type="none" w="med" len="med"/>
+                    </a:lnT>
+                    <a:lnB w="5080" cap="flat" cmpd="sng" algn="ctr">
+                      <a:solidFill>
+                        <a:srgbClr val="D1DDE8"/>
+                      </a:solidFill>
+                      <a:prstDash val="solid"/>
+                      <a:round/>
+                      <a:headEnd type="none" w="med" len="med"/>
+                      <a:tailEnd type="none" w="med" len="med"/>
+                    </a:lnB>
+                    <a:solidFill>
+                      <a:srgbClr val="FFF5F5"/>
+                    </a:solidFill>
+                  </a:tcPr>
+                </a:tc>
+                <a:tc>
+                  <a:txBody>
+                    <a:bodyPr/>
+                    <a:lstStyle/>
+                    <a:p>
+                      <a:pPr marL="0" indent="0">
+                        <a:buNone/>
+                      </a:pPr>
+                      <a:r>
+                        <a:rPr lang="en-US" sz="850" dirty="0">
+                          <a:solidFill>
+                            <a:srgbClr val="1E293B"/>
+                          </a:solidFill>
+                          <a:latin typeface="Calibri" pitchFamily="34" charset="0"/>
+                          <a:ea typeface="Calibri" pitchFamily="34" charset="-122"/>
+                          <a:cs typeface="Calibri" pitchFamily="34" charset="-120"/>
+                        </a:rPr>
+                        <a:t>Turbina CTM3 – ENGIE (Sura)</a:t>
+                      </a:r>
+                      <a:endParaRPr lang="en-US" sz="850" dirty="0">
+                        <a:latin typeface="Calibri" charset="0"/>
+                        <a:ea typeface="Calibri" charset="0"/>
+                        <a:cs typeface="Calibri" charset="0"/>
+                      </a:endParaRPr>
+                    </a:p>
+                  </a:txBody>
+                  <a:tcPr>
+                    <a:lnL w="5080" cap="flat" cmpd="sng" algn="ctr">
+                      <a:solidFill>
+                        <a:srgbClr val="D1DDE8"/>
+                      </a:solidFill>
+                      <a:prstDash val="solid"/>
+                      <a:round/>
+                      <a:headEnd type="none" w="med" len="med"/>
+                      <a:tailEnd type="none" w="med" len="med"/>
+                    </a:lnL>
+                    <a:lnR w="5080" cap="flat" cmpd="sng" algn="ctr">
+                      <a:solidFill>
+                        <a:srgbClr val="D1DDE8"/>
+                      </a:solidFill>
+                      <a:prstDash val="solid"/>
+                      <a:round/>
+                      <a:headEnd type="none" w="med" len="med"/>
+                      <a:tailEnd type="none" w="med" len="med"/>
+                    </a:lnR>
+                    <a:lnT w="5080" cap="flat" cmpd="sng" algn="ctr">
+                      <a:solidFill>
+                        <a:srgbClr val="D1DDE8"/>
+                      </a:solidFill>
+                      <a:prstDash val="solid"/>
+                      <a:round/>
+                      <a:headEnd type="none" w="med" len="med"/>
+                      <a:tailEnd type="none" w="med" len="med"/>
+                    </a:lnT>
+                    <a:lnB w="5080" cap="flat" cmpd="sng" algn="ctr">
+                      <a:solidFill>
+                        <a:srgbClr val="D1DDE8"/>
+                      </a:solidFill>
+                      <a:prstDash val="solid"/>
+                      <a:round/>
+                      <a:headEnd type="none" w="med" len="med"/>
+                      <a:tailEnd type="none" w="med" len="med"/>
+                    </a:lnB>
+                    <a:solidFill>
+                      <a:srgbClr val="FFF5F5"/>
+                    </a:solidFill>
+                  </a:tcPr>
+                </a:tc>
+                <a:tc>
+                  <a:txBody>
+                    <a:bodyPr/>
+                    <a:lstStyle/>
+                    <a:p>
+                      <a:pPr marL="0" indent="0" algn="ctr">
+                        <a:buNone/>
+                      </a:pPr>
+                      <a:r>
+                        <a:rPr lang="en-US" sz="850" dirty="0">
+                          <a:solidFill>
+                            <a:srgbClr val="64748B"/>
+                          </a:solidFill>
+                          <a:latin typeface="Calibri" pitchFamily="34" charset="0"/>
+                          <a:ea typeface="Calibri" pitchFamily="34" charset="-122"/>
+                          <a:cs typeface="Calibri" pitchFamily="34" charset="-120"/>
+                        </a:rPr>
+                        <a:t>USD</a:t>
+                      </a:r>
+                      <a:endParaRPr lang="en-US" sz="850" dirty="0">
+                        <a:latin typeface="Calibri" charset="0"/>
+                        <a:ea typeface="Calibri" charset="0"/>
+                        <a:cs typeface="Calibri" charset="0"/>
+                      </a:endParaRPr>
+                    </a:p>
+                  </a:txBody>
+                  <a:tcPr>
+                    <a:lnL w="5080" cap="flat" cmpd="sng" algn="ctr">
+                      <a:solidFill>
+                        <a:srgbClr val="D1DDE8"/>
+                      </a:solidFill>
+                      <a:prstDash val="solid"/>
+                      <a:round/>
+                      <a:headEnd type="none" w="med" len="med"/>
+                      <a:tailEnd type="none" w="med" len="med"/>
+                    </a:lnL>
+                    <a:lnR w="5080" cap="flat" cmpd="sng" algn="ctr">
+                      <a:solidFill>
+                        <a:srgbClr val="D1DDE8"/>
+                      </a:solidFill>
+                      <a:prstDash val="solid"/>
+                      <a:round/>
+                      <a:headEnd type="none" w="med" len="med"/>
+                      <a:tailEnd type="none" w="med" len="med"/>
+                    </a:lnR>
+                    <a:lnT w="5080" cap="flat" cmpd="sng" algn="ctr">
+                      <a:solidFill>
+                        <a:srgbClr val="D1DDE8"/>
+                      </a:solidFill>
+                      <a:prstDash val="solid"/>
+                      <a:round/>
+                      <a:headEnd type="none" w="med" len="med"/>
+                      <a:tailEnd type="none" w="med" len="med"/>
+                    </a:lnT>
+                    <a:lnB w="5080" cap="flat" cmpd="sng" algn="ctr">
+                      <a:solidFill>
+                        <a:srgbClr val="D1DDE8"/>
+                      </a:solidFill>
+                      <a:prstDash val="solid"/>
+                      <a:round/>
+                      <a:headEnd type="none" w="med" len="med"/>
+                      <a:tailEnd type="none" w="med" len="med"/>
+                    </a:lnB>
+                    <a:solidFill>
+                      <a:srgbClr val="FFF5F5"/>
+                    </a:solidFill>
+                  </a:tcPr>
+                </a:tc>
+                <a:tc>
+                  <a:txBody>
+                    <a:bodyPr/>
+                    <a:lstStyle/>
+                    <a:p>
+                      <a:pPr marL="0" indent="0" algn="ctr">
+                        <a:buNone/>
+                      </a:pPr>
+                      <a:r>
+                        <a:rPr lang="en-US" sz="900" b="1" dirty="0">
+                          <a:solidFill>
+                            <a:srgbClr val="991B1B"/>
+                          </a:solidFill>
+                          <a:latin typeface="Calibri" pitchFamily="34" charset="0"/>
+                          <a:ea typeface="Calibri" pitchFamily="34" charset="-122"/>
+                          <a:cs typeface="Calibri" pitchFamily="34" charset="-120"/>
+                        </a:rPr>
+                        <a:t>923</a:t>
+                      </a:r>
+                      <a:endParaRPr lang="en-US" sz="900" dirty="0">
+                        <a:latin typeface="Calibri" charset="0"/>
+                        <a:ea typeface="Calibri" charset="0"/>
+                        <a:cs typeface="Calibri" charset="0"/>
+                      </a:endParaRPr>
+                    </a:p>
+                  </a:txBody>
+                  <a:tcPr>
+                    <a:lnL w="5080" cap="flat" cmpd="sng" algn="ctr">
+                      <a:solidFill>
+                        <a:srgbClr val="D1DDE8"/>
+                      </a:solidFill>
+                      <a:prstDash val="solid"/>
+                      <a:round/>
+                      <a:headEnd type="none" w="med" len="med"/>
+                      <a:tailEnd type="none" w="med" len="med"/>
+                    </a:lnL>
+                    <a:lnR w="5080" cap="flat" cmpd="sng" algn="ctr">
+                      <a:solidFill>
+                        <a:srgbClr val="D1DDE8"/>
+                      </a:solidFill>
+                      <a:prstDash val="solid"/>
+                      <a:round/>
+                      <a:headEnd type="none" w="med" len="med"/>
+                      <a:tailEnd type="none" w="med" len="med"/>
+                    </a:lnR>
+                    <a:lnT w="5080" cap="flat" cmpd="sng" algn="ctr">
+                      <a:solidFill>
+                        <a:srgbClr val="D1DDE8"/>
+                      </a:solidFill>
+                      <a:prstDash val="solid"/>
+                      <a:round/>
+                      <a:headEnd type="none" w="med" len="med"/>
+                      <a:tailEnd type="none" w="med" len="med"/>
+                    </a:lnT>
+                    <a:lnB w="5080" cap="flat" cmpd="sng" algn="ctr">
+                      <a:solidFill>
+                        <a:srgbClr val="D1DDE8"/>
+                      </a:solidFill>
+                      <a:prstDash val="solid"/>
+                      <a:round/>
+                      <a:headEnd type="none" w="med" len="med"/>
+                      <a:tailEnd type="none" w="med" len="med"/>
+                    </a:lnB>
+                    <a:solidFill>
+                      <a:srgbClr val="FFF5F5"/>
+                    </a:solidFill>
+                  </a:tcPr>
+                </a:tc>
+                <a:tc>
+                  <a:txBody>
+                    <a:bodyPr/>
+                    <a:lstStyle/>
+                    <a:p>
+                      <a:pPr marL="0" indent="0" algn="ctr">
+                        <a:buNone/>
+                      </a:pPr>
+                      <a:r>
+                        <a:rPr lang="en-US" sz="900" b="1" dirty="0">
+                          <a:solidFill>
+                            <a:srgbClr val="065F46"/>
+                          </a:solidFill>
+                          <a:latin typeface="Calibri" pitchFamily="34" charset="0"/>
+                          <a:ea typeface="Calibri" pitchFamily="34" charset="-122"/>
+                          <a:cs typeface="Calibri" pitchFamily="34" charset="-120"/>
+                        </a:rPr>
+                        <a:t>100%</a:t>
+                      </a:r>
+                      <a:endParaRPr lang="en-US" sz="900" dirty="0">
+                        <a:latin typeface="Calibri" charset="0"/>
+                        <a:ea typeface="Calibri" charset="0"/>
+                        <a:cs typeface="Calibri" charset="0"/>
+                      </a:endParaRPr>
+                    </a:p>
+                  </a:txBody>
+                  <a:tcPr>
+                    <a:lnL w="5080" cap="flat" cmpd="sng" algn="ctr">
+                      <a:solidFill>
+                        <a:srgbClr val="D1DDE8"/>
+                      </a:solidFill>
+                      <a:prstDash val="solid"/>
+                      <a:round/>
+                      <a:headEnd type="none" w="med" len="med"/>
+                      <a:tailEnd type="none" w="med" len="med"/>
+                    </a:lnL>
+                    <a:lnR w="5080" cap="flat" cmpd="sng" algn="ctr">
+                      <a:solidFill>
+                        <a:srgbClr val="D1DDE8"/>
+                      </a:solidFill>
+                      <a:prstDash val="solid"/>
+                      <a:round/>
+                      <a:headEnd type="none" w="med" len="med"/>
+                      <a:tailEnd type="none" w="med" len="med"/>
+                    </a:lnR>
+                    <a:lnT w="5080" cap="flat" cmpd="sng" algn="ctr">
+                      <a:solidFill>
+                        <a:srgbClr val="D1DDE8"/>
+                      </a:solidFill>
+                      <a:prstDash val="solid"/>
+                      <a:round/>
+                      <a:headEnd type="none" w="med" len="med"/>
+                      <a:tailEnd type="none" w="med" len="med"/>
+                    </a:lnT>
+                    <a:lnB w="5080" cap="flat" cmpd="sng" algn="ctr">
+                      <a:solidFill>
+                        <a:srgbClr val="D1DDE8"/>
+                      </a:solidFill>
+                      <a:prstDash val="solid"/>
+                      <a:round/>
+                      <a:headEnd type="none" w="med" len="med"/>
+                      <a:tailEnd type="none" w="med" len="med"/>
+                    </a:lnB>
+                    <a:solidFill>
+                      <a:srgbClr val="FFF5F5"/>
+                    </a:solidFill>
+                  </a:tcPr>
+                </a:tc>
+                <a:tc>
+                  <a:txBody>
+                    <a:bodyPr/>
+                    <a:lstStyle/>
+                    <a:p>
+                      <a:pPr marL="0" indent="0">
+                        <a:buNone/>
+                      </a:pPr>
+                      <a:r>
+                        <a:rPr lang="en-US" sz="750" i="1" dirty="0">
+                          <a:solidFill>
+                            <a:srgbClr val="64748B"/>
+                          </a:solidFill>
+                          <a:latin typeface="Calibri" pitchFamily="34" charset="0"/>
+                          <a:ea typeface="Calibri" pitchFamily="34" charset="-122"/>
+                          <a:cs typeface="Calibri" pitchFamily="34" charset="-120"/>
+                        </a:rPr>
+                        <a:t>A</a:t>
+                      </a:r>
+                      <a:r>
+                        <a:rPr lang="en-US" sz="750" i="1" baseline="0" dirty="0">
+                          <a:solidFill>
+                            <a:srgbClr val="64748B"/>
+                          </a:solidFill>
+                          <a:latin typeface="Calibri" pitchFamily="34" charset="0"/>
+                          <a:ea typeface="Calibri" pitchFamily="34" charset="-122"/>
+                          <a:cs typeface="Calibri" pitchFamily="34" charset="-120"/>
+                        </a:rPr>
+                        <a:t> la </a:t>
+                      </a:r>
+                      <a:r>
+                        <a:rPr lang="en-US" sz="750" i="1" baseline="0" dirty="0" err="1">
+                          <a:solidFill>
+                            <a:srgbClr val="64748B"/>
+                          </a:solidFill>
+                          <a:latin typeface="Calibri" pitchFamily="34" charset="0"/>
+                          <a:ea typeface="Calibri" pitchFamily="34" charset="-122"/>
+                          <a:cs typeface="Calibri" pitchFamily="34" charset="-120"/>
+                        </a:rPr>
+                        <a:t>espera</a:t>
+                      </a:r>
+                      <a:r>
+                        <a:rPr lang="en-US" sz="750" i="1" baseline="0" dirty="0">
+                          <a:solidFill>
+                            <a:srgbClr val="64748B"/>
+                          </a:solidFill>
+                          <a:latin typeface="Calibri" pitchFamily="34" charset="0"/>
+                          <a:ea typeface="Calibri" pitchFamily="34" charset="-122"/>
+                          <a:cs typeface="Calibri" pitchFamily="34" charset="-120"/>
+                        </a:rPr>
+                        <a:t> de la </a:t>
+                      </a:r>
+                      <a:r>
+                        <a:rPr lang="en-US" sz="750" i="1" baseline="0" dirty="0" err="1">
+                          <a:solidFill>
+                            <a:srgbClr val="64748B"/>
+                          </a:solidFill>
+                          <a:latin typeface="Calibri" pitchFamily="34" charset="0"/>
+                          <a:ea typeface="Calibri" pitchFamily="34" charset="-122"/>
+                          <a:cs typeface="Calibri" pitchFamily="34" charset="-120"/>
+                        </a:rPr>
+                        <a:t>aprobación</a:t>
+                      </a:r>
+                      <a:r>
+                        <a:rPr lang="en-US" sz="750" i="1" baseline="0" dirty="0">
+                          <a:solidFill>
+                            <a:srgbClr val="64748B"/>
+                          </a:solidFill>
+                          <a:latin typeface="Calibri" pitchFamily="34" charset="0"/>
+                          <a:ea typeface="Calibri" pitchFamily="34" charset="-122"/>
+                          <a:cs typeface="Calibri" pitchFamily="34" charset="-120"/>
+                        </a:rPr>
+                        <a:t> del BI </a:t>
+                      </a:r>
+                      <a:r>
+                        <a:rPr lang="en-US" sz="750" i="1" baseline="0" dirty="0" err="1">
+                          <a:solidFill>
+                            <a:srgbClr val="64748B"/>
+                          </a:solidFill>
+                          <a:latin typeface="Calibri" pitchFamily="34" charset="0"/>
+                          <a:ea typeface="Calibri" pitchFamily="34" charset="-122"/>
+                          <a:cs typeface="Calibri" pitchFamily="34" charset="-120"/>
+                        </a:rPr>
+                        <a:t>por</a:t>
+                      </a:r>
+                      <a:r>
+                        <a:rPr lang="en-US" sz="750" i="1" baseline="0" dirty="0">
+                          <a:solidFill>
+                            <a:srgbClr val="64748B"/>
+                          </a:solidFill>
+                          <a:latin typeface="Calibri" pitchFamily="34" charset="0"/>
+                          <a:ea typeface="Calibri" pitchFamily="34" charset="-122"/>
+                          <a:cs typeface="Calibri" pitchFamily="34" charset="-120"/>
+                        </a:rPr>
+                        <a:t> </a:t>
+                      </a:r>
+                      <a:r>
+                        <a:rPr lang="en-US" sz="750" i="1" baseline="0" dirty="0" err="1">
+                          <a:solidFill>
+                            <a:srgbClr val="64748B"/>
+                          </a:solidFill>
+                          <a:latin typeface="Calibri" pitchFamily="34" charset="0"/>
+                          <a:ea typeface="Calibri" pitchFamily="34" charset="-122"/>
+                          <a:cs typeface="Calibri" pitchFamily="34" charset="-120"/>
+                        </a:rPr>
+                        <a:t>parte</a:t>
+                      </a:r>
+                      <a:r>
+                        <a:rPr lang="en-US" sz="750" i="1" baseline="0" dirty="0">
+                          <a:solidFill>
+                            <a:srgbClr val="64748B"/>
+                          </a:solidFill>
+                          <a:latin typeface="Calibri" pitchFamily="34" charset="0"/>
+                          <a:ea typeface="Calibri" pitchFamily="34" charset="-122"/>
+                          <a:cs typeface="Calibri" pitchFamily="34" charset="-120"/>
+                        </a:rPr>
+                        <a:t> de Engie</a:t>
+                      </a:r>
+                      <a:endParaRPr lang="en-US" sz="750" dirty="0">
+                        <a:latin typeface="Calibri" charset="0"/>
+                        <a:ea typeface="Calibri" charset="0"/>
+                        <a:cs typeface="Calibri" charset="0"/>
+                      </a:endParaRPr>
+                    </a:p>
+                  </a:txBody>
+                  <a:tcPr>
+                    <a:lnL w="5080" cap="flat" cmpd="sng" algn="ctr">
+                      <a:solidFill>
+                        <a:srgbClr val="D1DDE8"/>
+                      </a:solidFill>
+                      <a:prstDash val="solid"/>
+                      <a:round/>
+                      <a:headEnd type="none" w="med" len="med"/>
+                      <a:tailEnd type="none" w="med" len="med"/>
+                    </a:lnL>
+                    <a:lnR w="5080" cap="flat" cmpd="sng" algn="ctr">
+                      <a:solidFill>
+                        <a:srgbClr val="D1DDE8"/>
+                      </a:solidFill>
+                      <a:prstDash val="solid"/>
+                      <a:round/>
+                      <a:headEnd type="none" w="med" len="med"/>
+                      <a:tailEnd type="none" w="med" len="med"/>
+                    </a:lnR>
+                    <a:lnT w="5080" cap="flat" cmpd="sng" algn="ctr">
+                      <a:solidFill>
+                        <a:srgbClr val="D1DDE8"/>
+                      </a:solidFill>
+                      <a:prstDash val="solid"/>
+                      <a:round/>
+                      <a:headEnd type="none" w="med" len="med"/>
+                      <a:tailEnd type="none" w="med" len="med"/>
+                    </a:lnT>
+                    <a:lnB w="5080" cap="flat" cmpd="sng" algn="ctr">
+                      <a:solidFill>
+                        <a:srgbClr val="D1DDE8"/>
+                      </a:solidFill>
+                      <a:prstDash val="solid"/>
+                      <a:round/>
+                      <a:headEnd type="none" w="med" len="med"/>
+                      <a:tailEnd type="none" w="med" len="med"/>
+                    </a:lnB>
+                    <a:solidFill>
+                      <a:srgbClr val="FFF5F5"/>
+                    </a:solidFill>
+                  </a:tcPr>
+                </a:tc>
+                <a:extLst>
+                  <a:ext uri="{0D108BD9-81ED-4DB2-BD59-A6C34878D82A}">
+                    <a16:rowId xmlns:a16="http://schemas.microsoft.com/office/drawing/2014/main" val="10003"/>
+                  </a:ext>
+                </a:extLst>
+              </a:tr>
+              <a:tr h="301752">
+                <a:tc>
+                  <a:txBody>
+                    <a:bodyPr/>
+                    <a:lstStyle/>
+                    <a:p>
+                      <a:pPr marL="0" indent="0" algn="ctr">
+                        <a:buNone/>
+                      </a:pPr>
+                      <a:r>
+                        <a:rPr lang="en-US" sz="850" dirty="0">
+                          <a:solidFill>
+                            <a:srgbClr val="1E293B"/>
+                          </a:solidFill>
+                          <a:latin typeface="Calibri" pitchFamily="34" charset="0"/>
+                          <a:ea typeface="Calibri" pitchFamily="34" charset="-122"/>
+                          <a:cs typeface="Calibri" pitchFamily="34" charset="-120"/>
+                        </a:rPr>
+                        <a:t>4</a:t>
+                      </a:r>
+                      <a:endParaRPr lang="en-US" sz="850" dirty="0">
+                        <a:latin typeface="Calibri" charset="0"/>
+                        <a:ea typeface="Calibri" charset="0"/>
+                        <a:cs typeface="Calibri" charset="0"/>
+                      </a:endParaRPr>
+                    </a:p>
+                  </a:txBody>
+                  <a:tcPr>
+                    <a:lnL w="5080" cap="flat" cmpd="sng" algn="ctr">
+                      <a:solidFill>
+                        <a:srgbClr val="D1DDE8"/>
+                      </a:solidFill>
+                      <a:prstDash val="solid"/>
+                      <a:round/>
+                      <a:headEnd type="none" w="med" len="med"/>
+                      <a:tailEnd type="none" w="med" len="med"/>
+                    </a:lnL>
+                    <a:lnR w="5080" cap="flat" cmpd="sng" algn="ctr">
+                      <a:solidFill>
+                        <a:srgbClr val="D1DDE8"/>
+                      </a:solidFill>
+                      <a:prstDash val="solid"/>
+                      <a:round/>
+                      <a:headEnd type="none" w="med" len="med"/>
+                      <a:tailEnd type="none" w="med" len="med"/>
+                    </a:lnR>
+                    <a:lnT w="5080" cap="flat" cmpd="sng" algn="ctr">
+                      <a:solidFill>
+                        <a:srgbClr val="D1DDE8"/>
+                      </a:solidFill>
+                      <a:prstDash val="solid"/>
+                      <a:round/>
+                      <a:headEnd type="none" w="med" len="med"/>
+                      <a:tailEnd type="none" w="med" len="med"/>
+                    </a:lnT>
+                    <a:lnB w="5080" cap="flat" cmpd="sng" algn="ctr">
+                      <a:solidFill>
+                        <a:srgbClr val="D1DDE8"/>
+                      </a:solidFill>
+                      <a:prstDash val="solid"/>
+                      <a:round/>
+                      <a:headEnd type="none" w="med" len="med"/>
+                      <a:tailEnd type="none" w="med" len="med"/>
+                    </a:lnB>
+                    <a:solidFill>
+                      <a:srgbClr val="FFF5F5"/>
+                    </a:solidFill>
+                  </a:tcPr>
+                </a:tc>
+                <a:tc>
+                  <a:txBody>
+                    <a:bodyPr/>
+                    <a:lstStyle/>
+                    <a:p>
+                      <a:pPr marL="0" indent="0">
+                        <a:buNone/>
+                      </a:pPr>
+                      <a:r>
+                        <a:rPr lang="en-US" sz="850" b="1" dirty="0">
+                          <a:solidFill>
+                            <a:srgbClr val="1E293B"/>
+                          </a:solidFill>
+                          <a:latin typeface="Calibri" pitchFamily="34" charset="0"/>
+                          <a:ea typeface="Calibri" pitchFamily="34" charset="-122"/>
+                          <a:cs typeface="Calibri" pitchFamily="34" charset="-120"/>
+                        </a:rPr>
+                        <a:t>181558</a:t>
+                      </a:r>
+                      <a:endParaRPr lang="en-US" sz="850" dirty="0">
+                        <a:latin typeface="Calibri" charset="0"/>
+                        <a:ea typeface="Calibri" charset="0"/>
+                        <a:cs typeface="Calibri" charset="0"/>
+                      </a:endParaRPr>
+                    </a:p>
+                  </a:txBody>
+                  <a:tcPr>
+                    <a:lnL w="5080" cap="flat" cmpd="sng" algn="ctr">
+                      <a:solidFill>
+                        <a:srgbClr val="D1DDE8"/>
+                      </a:solidFill>
+                      <a:prstDash val="solid"/>
+                      <a:round/>
+                      <a:headEnd type="none" w="med" len="med"/>
+                      <a:tailEnd type="none" w="med" len="med"/>
+                    </a:lnL>
+                    <a:lnR w="5080" cap="flat" cmpd="sng" algn="ctr">
+                      <a:solidFill>
+                        <a:srgbClr val="D1DDE8"/>
+                      </a:solidFill>
+                      <a:prstDash val="solid"/>
+                      <a:round/>
+                      <a:headEnd type="none" w="med" len="med"/>
+                      <a:tailEnd type="none" w="med" len="med"/>
+                    </a:lnR>
+                    <a:lnT w="5080" cap="flat" cmpd="sng" algn="ctr">
+                      <a:solidFill>
+                        <a:srgbClr val="D1DDE8"/>
+                      </a:solidFill>
+                      <a:prstDash val="solid"/>
+                      <a:round/>
+                      <a:headEnd type="none" w="med" len="med"/>
+                      <a:tailEnd type="none" w="med" len="med"/>
+                    </a:lnT>
+                    <a:lnB w="5080" cap="flat" cmpd="sng" algn="ctr">
+                      <a:solidFill>
+                        <a:srgbClr val="D1DDE8"/>
+                      </a:solidFill>
+                      <a:prstDash val="solid"/>
+                      <a:round/>
+                      <a:headEnd type="none" w="med" len="med"/>
+                      <a:tailEnd type="none" w="med" len="med"/>
+                    </a:lnB>
+                    <a:solidFill>
+                      <a:srgbClr val="FFF5F5"/>
+                    </a:solidFill>
+                  </a:tcPr>
+                </a:tc>
+                <a:tc>
+                  <a:txBody>
+                    <a:bodyPr/>
+                    <a:lstStyle/>
+                    <a:p>
+                      <a:pPr marL="0" indent="0">
+                        <a:buNone/>
+                      </a:pPr>
+                      <a:r>
+                        <a:rPr lang="en-US" sz="850" dirty="0">
+                          <a:solidFill>
+                            <a:srgbClr val="1E293B"/>
+                          </a:solidFill>
+                          <a:latin typeface="Calibri" pitchFamily="34" charset="0"/>
+                          <a:ea typeface="Calibri" pitchFamily="34" charset="-122"/>
+                          <a:cs typeface="Calibri" pitchFamily="34" charset="-120"/>
+                        </a:rPr>
+                        <a:t>Essbio – Inundaciones jun-2024</a:t>
+                      </a:r>
+                      <a:endParaRPr lang="en-US" sz="850" dirty="0">
+                        <a:latin typeface="Calibri" charset="0"/>
+                        <a:ea typeface="Calibri" charset="0"/>
+                        <a:cs typeface="Calibri" charset="0"/>
+                      </a:endParaRPr>
+                    </a:p>
+                  </a:txBody>
+                  <a:tcPr>
+                    <a:lnL w="5080" cap="flat" cmpd="sng" algn="ctr">
+                      <a:solidFill>
+                        <a:srgbClr val="D1DDE8"/>
+                      </a:solidFill>
+                      <a:prstDash val="solid"/>
+                      <a:round/>
+                      <a:headEnd type="none" w="med" len="med"/>
+                      <a:tailEnd type="none" w="med" len="med"/>
+                    </a:lnL>
+                    <a:lnR w="5080" cap="flat" cmpd="sng" algn="ctr">
+                      <a:solidFill>
+                        <a:srgbClr val="D1DDE8"/>
+                      </a:solidFill>
+                      <a:prstDash val="solid"/>
+                      <a:round/>
+                      <a:headEnd type="none" w="med" len="med"/>
+                      <a:tailEnd type="none" w="med" len="med"/>
+                    </a:lnR>
+                    <a:lnT w="5080" cap="flat" cmpd="sng" algn="ctr">
+                      <a:solidFill>
+                        <a:srgbClr val="D1DDE8"/>
+                      </a:solidFill>
+                      <a:prstDash val="solid"/>
+                      <a:round/>
+                      <a:headEnd type="none" w="med" len="med"/>
+                      <a:tailEnd type="none" w="med" len="med"/>
+                    </a:lnT>
+                    <a:lnB w="5080" cap="flat" cmpd="sng" algn="ctr">
+                      <a:solidFill>
+                        <a:srgbClr val="D1DDE8"/>
+                      </a:solidFill>
+                      <a:prstDash val="solid"/>
+                      <a:round/>
+                      <a:headEnd type="none" w="med" len="med"/>
+                      <a:tailEnd type="none" w="med" len="med"/>
+                    </a:lnB>
+                    <a:solidFill>
+                      <a:srgbClr val="FFF5F5"/>
+                    </a:solidFill>
+                  </a:tcPr>
+                </a:tc>
+                <a:tc>
+                  <a:txBody>
+                    <a:bodyPr/>
+                    <a:lstStyle/>
+                    <a:p>
+                      <a:pPr marL="0" indent="0" algn="ctr">
+                        <a:buNone/>
+                      </a:pPr>
+                      <a:r>
+                        <a:rPr lang="en-US" sz="850" dirty="0">
+                          <a:solidFill>
+                            <a:srgbClr val="64748B"/>
+                          </a:solidFill>
+                          <a:latin typeface="Calibri" pitchFamily="34" charset="0"/>
+                          <a:ea typeface="Calibri" pitchFamily="34" charset="-122"/>
+                          <a:cs typeface="Calibri" pitchFamily="34" charset="-120"/>
+                        </a:rPr>
+                        <a:t>UF</a:t>
+                      </a:r>
+                      <a:endParaRPr lang="en-US" sz="850" dirty="0">
+                        <a:latin typeface="Calibri" charset="0"/>
+                        <a:ea typeface="Calibri" charset="0"/>
+                        <a:cs typeface="Calibri" charset="0"/>
+                      </a:endParaRPr>
+                    </a:p>
+                  </a:txBody>
+                  <a:tcPr>
+                    <a:lnL w="5080" cap="flat" cmpd="sng" algn="ctr">
+                      <a:solidFill>
+                        <a:srgbClr val="D1DDE8"/>
+                      </a:solidFill>
+                      <a:prstDash val="solid"/>
+                      <a:round/>
+                      <a:headEnd type="none" w="med" len="med"/>
+                      <a:tailEnd type="none" w="med" len="med"/>
+                    </a:lnL>
+                    <a:lnR w="5080" cap="flat" cmpd="sng" algn="ctr">
+                      <a:solidFill>
+                        <a:srgbClr val="D1DDE8"/>
+                      </a:solidFill>
+                      <a:prstDash val="solid"/>
+                      <a:round/>
+                      <a:headEnd type="none" w="med" len="med"/>
+                      <a:tailEnd type="none" w="med" len="med"/>
+                    </a:lnR>
+                    <a:lnT w="5080" cap="flat" cmpd="sng" algn="ctr">
+                      <a:solidFill>
+                        <a:srgbClr val="D1DDE8"/>
+                      </a:solidFill>
+                      <a:prstDash val="solid"/>
+                      <a:round/>
+                      <a:headEnd type="none" w="med" len="med"/>
+                      <a:tailEnd type="none" w="med" len="med"/>
+                    </a:lnT>
+                    <a:lnB w="5080" cap="flat" cmpd="sng" algn="ctr">
+                      <a:solidFill>
+                        <a:srgbClr val="D1DDE8"/>
+                      </a:solidFill>
+                      <a:prstDash val="solid"/>
+                      <a:round/>
+                      <a:headEnd type="none" w="med" len="med"/>
+                      <a:tailEnd type="none" w="med" len="med"/>
+                    </a:lnB>
+                    <a:solidFill>
+                      <a:srgbClr val="FFF5F5"/>
+                    </a:solidFill>
+                  </a:tcPr>
+                </a:tc>
+                <a:tc>
+                  <a:txBody>
+                    <a:bodyPr/>
+                    <a:lstStyle/>
+                    <a:p>
+                      <a:pPr marL="0" indent="0" algn="ctr">
+                        <a:buNone/>
+                      </a:pPr>
+                      <a:r>
+                        <a:rPr lang="en-US" sz="900" b="1" dirty="0">
+                          <a:solidFill>
+                            <a:srgbClr val="991B1B"/>
+                          </a:solidFill>
+                          <a:latin typeface="Calibri" pitchFamily="34" charset="0"/>
+                          <a:ea typeface="Calibri" pitchFamily="34" charset="-122"/>
+                          <a:cs typeface="Calibri" pitchFamily="34" charset="-120"/>
+                        </a:rPr>
+                        <a:t>703</a:t>
+                      </a:r>
+                      <a:endParaRPr lang="en-US" sz="900" dirty="0">
+                        <a:latin typeface="Calibri" charset="0"/>
+                        <a:ea typeface="Calibri" charset="0"/>
+                        <a:cs typeface="Calibri" charset="0"/>
+                      </a:endParaRPr>
+                    </a:p>
+                  </a:txBody>
+                  <a:tcPr>
+                    <a:lnL w="5080" cap="flat" cmpd="sng" algn="ctr">
+                      <a:solidFill>
+                        <a:srgbClr val="D1DDE8"/>
+                      </a:solidFill>
+                      <a:prstDash val="solid"/>
+                      <a:round/>
+                      <a:headEnd type="none" w="med" len="med"/>
+                      <a:tailEnd type="none" w="med" len="med"/>
+                    </a:lnL>
+                    <a:lnR w="5080" cap="flat" cmpd="sng" algn="ctr">
+                      <a:solidFill>
+                        <a:srgbClr val="D1DDE8"/>
+                      </a:solidFill>
+                      <a:prstDash val="solid"/>
+                      <a:round/>
+                      <a:headEnd type="none" w="med" len="med"/>
+                      <a:tailEnd type="none" w="med" len="med"/>
+                    </a:lnR>
+                    <a:lnT w="5080" cap="flat" cmpd="sng" algn="ctr">
+                      <a:solidFill>
+                        <a:srgbClr val="D1DDE8"/>
+                      </a:solidFill>
+                      <a:prstDash val="solid"/>
+                      <a:round/>
+                      <a:headEnd type="none" w="med" len="med"/>
+                      <a:tailEnd type="none" w="med" len="med"/>
+                    </a:lnT>
+                    <a:lnB w="5080" cap="flat" cmpd="sng" algn="ctr">
+                      <a:solidFill>
+                        <a:srgbClr val="D1DDE8"/>
+                      </a:solidFill>
+                      <a:prstDash val="solid"/>
+                      <a:round/>
+                      <a:headEnd type="none" w="med" len="med"/>
+                      <a:tailEnd type="none" w="med" len="med"/>
+                    </a:lnB>
+                    <a:solidFill>
+                      <a:srgbClr val="FFF5F5"/>
+                    </a:solidFill>
+                  </a:tcPr>
+                </a:tc>
+                <a:tc>
+                  <a:txBody>
+                    <a:bodyPr/>
+                    <a:lstStyle/>
+                    <a:p>
+                      <a:pPr marL="0" indent="0" algn="ctr">
+                        <a:buNone/>
+                      </a:pPr>
+                      <a:r>
+                        <a:rPr lang="en-US" sz="900" b="1" dirty="0">
+                          <a:solidFill>
+                            <a:srgbClr val="065F46"/>
+                          </a:solidFill>
+                          <a:latin typeface="Calibri" pitchFamily="34" charset="0"/>
+                          <a:ea typeface="Calibri" pitchFamily="34" charset="-122"/>
+                          <a:cs typeface="Calibri" pitchFamily="34" charset="-120"/>
+                        </a:rPr>
+                        <a:t>100%</a:t>
+                      </a:r>
+                      <a:endParaRPr lang="en-US" sz="900" dirty="0">
+                        <a:latin typeface="Calibri" charset="0"/>
+                        <a:ea typeface="Calibri" charset="0"/>
+                        <a:cs typeface="Calibri" charset="0"/>
+                      </a:endParaRPr>
+                    </a:p>
+                  </a:txBody>
+                  <a:tcPr>
+                    <a:lnL w="5080" cap="flat" cmpd="sng" algn="ctr">
+                      <a:solidFill>
+                        <a:srgbClr val="D1DDE8"/>
+                      </a:solidFill>
+                      <a:prstDash val="solid"/>
+                      <a:round/>
+                      <a:headEnd type="none" w="med" len="med"/>
+                      <a:tailEnd type="none" w="med" len="med"/>
+                    </a:lnL>
+                    <a:lnR w="5080" cap="flat" cmpd="sng" algn="ctr">
+                      <a:solidFill>
+                        <a:srgbClr val="D1DDE8"/>
+                      </a:solidFill>
+                      <a:prstDash val="solid"/>
+                      <a:round/>
+                      <a:headEnd type="none" w="med" len="med"/>
+                      <a:tailEnd type="none" w="med" len="med"/>
+                    </a:lnR>
+                    <a:lnT w="5080" cap="flat" cmpd="sng" algn="ctr">
+                      <a:solidFill>
+                        <a:srgbClr val="D1DDE8"/>
+                      </a:solidFill>
+                      <a:prstDash val="solid"/>
+                      <a:round/>
+                      <a:headEnd type="none" w="med" len="med"/>
+                      <a:tailEnd type="none" w="med" len="med"/>
+                    </a:lnT>
+                    <a:lnB w="5080" cap="flat" cmpd="sng" algn="ctr">
+                      <a:solidFill>
+                        <a:srgbClr val="D1DDE8"/>
+                      </a:solidFill>
+                      <a:prstDash val="solid"/>
+                      <a:round/>
+                      <a:headEnd type="none" w="med" len="med"/>
+                      <a:tailEnd type="none" w="med" len="med"/>
+                    </a:lnB>
+                    <a:solidFill>
+                      <a:srgbClr val="FFF5F5"/>
+                    </a:solidFill>
+                  </a:tcPr>
+                </a:tc>
+                <a:tc>
+                  <a:txBody>
+                    <a:bodyPr/>
+                    <a:lstStyle/>
+                    <a:p>
+                      <a:pPr marL="0" indent="0">
+                        <a:buNone/>
+                      </a:pPr>
+                      <a:r>
+                        <a:rPr lang="en-US" sz="750" i="1" dirty="0">
+                          <a:solidFill>
+                            <a:srgbClr val="64748B"/>
+                          </a:solidFill>
+                          <a:latin typeface="Calibri" pitchFamily="34" charset="0"/>
+                          <a:ea typeface="Calibri" pitchFamily="34" charset="-122"/>
+                          <a:cs typeface="Calibri" pitchFamily="34" charset="-120"/>
+                        </a:rPr>
+                        <a:t>Espera </a:t>
+                      </a:r>
+                      <a:r>
+                        <a:rPr lang="en-US" sz="750" i="1" dirty="0" err="1">
+                          <a:solidFill>
+                            <a:srgbClr val="64748B"/>
+                          </a:solidFill>
+                          <a:latin typeface="Calibri" pitchFamily="34" charset="0"/>
+                          <a:ea typeface="Calibri" pitchFamily="34" charset="-122"/>
+                          <a:cs typeface="Calibri" pitchFamily="34" charset="-120"/>
+                        </a:rPr>
+                        <a:t>aprobac</a:t>
+                      </a:r>
+                      <a:r>
+                        <a:rPr lang="en-US" sz="750" i="1" dirty="0">
+                          <a:solidFill>
+                            <a:srgbClr val="64748B"/>
+                          </a:solidFill>
+                          <a:latin typeface="Calibri" pitchFamily="34" charset="0"/>
+                          <a:ea typeface="Calibri" pitchFamily="34" charset="-122"/>
+                          <a:cs typeface="Calibri" pitchFamily="34" charset="-120"/>
+                        </a:rPr>
+                        <a:t> </a:t>
+                      </a:r>
+                      <a:r>
+                        <a:rPr lang="en-US" sz="750" i="1" dirty="0" err="1">
+                          <a:solidFill>
+                            <a:srgbClr val="64748B"/>
+                          </a:solidFill>
+                          <a:latin typeface="Calibri" pitchFamily="34" charset="0"/>
+                          <a:ea typeface="Calibri" pitchFamily="34" charset="-122"/>
+                          <a:cs typeface="Calibri" pitchFamily="34" charset="-120"/>
+                        </a:rPr>
+                        <a:t>ajuste</a:t>
+                      </a:r>
+                      <a:r>
+                        <a:rPr lang="en-US" sz="750" i="1" dirty="0">
+                          <a:solidFill>
+                            <a:srgbClr val="64748B"/>
+                          </a:solidFill>
+                          <a:latin typeface="Calibri" pitchFamily="34" charset="0"/>
+                          <a:ea typeface="Calibri" pitchFamily="34" charset="-122"/>
+                          <a:cs typeface="Calibri" pitchFamily="34" charset="-120"/>
+                        </a:rPr>
+                        <a:t> </a:t>
+                      </a:r>
+                      <a:r>
+                        <a:rPr lang="en-US" sz="750" i="1" dirty="0" err="1">
+                          <a:solidFill>
+                            <a:srgbClr val="64748B"/>
+                          </a:solidFill>
+                          <a:latin typeface="Calibri" pitchFamily="34" charset="0"/>
+                          <a:ea typeface="Calibri" pitchFamily="34" charset="-122"/>
+                          <a:cs typeface="Calibri" pitchFamily="34" charset="-120"/>
+                        </a:rPr>
+                        <a:t>enviado</a:t>
+                      </a:r>
+                      <a:r>
+                        <a:rPr lang="en-US" sz="750" i="1" dirty="0">
+                          <a:solidFill>
+                            <a:srgbClr val="64748B"/>
+                          </a:solidFill>
+                          <a:latin typeface="Calibri" pitchFamily="34" charset="0"/>
+                          <a:ea typeface="Calibri" pitchFamily="34" charset="-122"/>
+                          <a:cs typeface="Calibri" pitchFamily="34" charset="-120"/>
+                        </a:rPr>
+                        <a:t> 10/10/25 y/o </a:t>
+                      </a:r>
+                      <a:r>
+                        <a:rPr lang="en-US" sz="750" i="1" dirty="0" err="1">
+                          <a:solidFill>
+                            <a:srgbClr val="64748B"/>
+                          </a:solidFill>
+                          <a:latin typeface="Calibri" pitchFamily="34" charset="0"/>
+                          <a:ea typeface="Calibri" pitchFamily="34" charset="-122"/>
+                          <a:cs typeface="Calibri" pitchFamily="34" charset="-120"/>
+                        </a:rPr>
+                        <a:t>nuevas</a:t>
+                      </a:r>
+                      <a:r>
+                        <a:rPr lang="en-US" sz="750" i="1" dirty="0">
+                          <a:solidFill>
+                            <a:srgbClr val="64748B"/>
+                          </a:solidFill>
+                          <a:latin typeface="Calibri" pitchFamily="34" charset="0"/>
+                          <a:ea typeface="Calibri" pitchFamily="34" charset="-122"/>
+                          <a:cs typeface="Calibri" pitchFamily="34" charset="-120"/>
+                        </a:rPr>
+                        <a:t> </a:t>
+                      </a:r>
+                      <a:r>
+                        <a:rPr lang="en-US" sz="750" i="1" dirty="0" err="1">
+                          <a:solidFill>
+                            <a:srgbClr val="64748B"/>
+                          </a:solidFill>
+                          <a:latin typeface="Calibri" pitchFamily="34" charset="0"/>
+                          <a:ea typeface="Calibri" pitchFamily="34" charset="-122"/>
+                          <a:cs typeface="Calibri" pitchFamily="34" charset="-120"/>
+                        </a:rPr>
+                        <a:t>reclamaciones</a:t>
+                      </a:r>
+                      <a:endParaRPr lang="en-US" sz="750" dirty="0">
+                        <a:latin typeface="Calibri" charset="0"/>
+                        <a:ea typeface="Calibri" charset="0"/>
+                        <a:cs typeface="Calibri" charset="0"/>
+                      </a:endParaRPr>
+                    </a:p>
+                  </a:txBody>
+                  <a:tcPr>
+                    <a:lnL w="5080" cap="flat" cmpd="sng" algn="ctr">
+                      <a:solidFill>
+                        <a:srgbClr val="D1DDE8"/>
+                      </a:solidFill>
+                      <a:prstDash val="solid"/>
+                      <a:round/>
+                      <a:headEnd type="none" w="med" len="med"/>
+                      <a:tailEnd type="none" w="med" len="med"/>
+                    </a:lnL>
+                    <a:lnR w="5080" cap="flat" cmpd="sng" algn="ctr">
+                      <a:solidFill>
+                        <a:srgbClr val="D1DDE8"/>
+                      </a:solidFill>
+                      <a:prstDash val="solid"/>
+                      <a:round/>
+                      <a:headEnd type="none" w="med" len="med"/>
+                      <a:tailEnd type="none" w="med" len="med"/>
+                    </a:lnR>
+                    <a:lnT w="5080" cap="flat" cmpd="sng" algn="ctr">
+                      <a:solidFill>
+                        <a:srgbClr val="D1DDE8"/>
+                      </a:solidFill>
+                      <a:prstDash val="solid"/>
+                      <a:round/>
+                      <a:headEnd type="none" w="med" len="med"/>
+                      <a:tailEnd type="none" w="med" len="med"/>
+                    </a:lnT>
+                    <a:lnB w="5080" cap="flat" cmpd="sng" algn="ctr">
+                      <a:solidFill>
+                        <a:srgbClr val="D1DDE8"/>
+                      </a:solidFill>
+                      <a:prstDash val="solid"/>
+                      <a:round/>
+                      <a:headEnd type="none" w="med" len="med"/>
+                      <a:tailEnd type="none" w="med" len="med"/>
+                    </a:lnB>
+                    <a:solidFill>
+                      <a:srgbClr val="FFF5F5"/>
+                    </a:solidFill>
+                  </a:tcPr>
+                </a:tc>
+                <a:extLst>
+                  <a:ext uri="{0D108BD9-81ED-4DB2-BD59-A6C34878D82A}">
+                    <a16:rowId xmlns:a16="http://schemas.microsoft.com/office/drawing/2014/main" val="10004"/>
+                  </a:ext>
+                </a:extLst>
+              </a:tr>
+              <a:tr h="301752">
+                <a:tc>
+                  <a:txBody>
+                    <a:bodyPr/>
+                    <a:lstStyle/>
+                    <a:p>
+                      <a:pPr marL="0" indent="0" algn="ctr">
+                        <a:buNone/>
+                      </a:pPr>
+                      <a:r>
+                        <a:rPr lang="en-US" sz="850" dirty="0">
+                          <a:solidFill>
+                            <a:srgbClr val="1E293B"/>
+                          </a:solidFill>
+                          <a:latin typeface="Calibri" pitchFamily="34" charset="0"/>
+                          <a:ea typeface="Calibri" pitchFamily="34" charset="-122"/>
+                          <a:cs typeface="Calibri" pitchFamily="34" charset="-120"/>
+                        </a:rPr>
+                        <a:t>5</a:t>
+                      </a:r>
+                      <a:endParaRPr lang="en-US" sz="850" dirty="0">
+                        <a:latin typeface="Calibri" charset="0"/>
+                        <a:ea typeface="Calibri" charset="0"/>
+                        <a:cs typeface="Calibri" charset="0"/>
+                      </a:endParaRPr>
+                    </a:p>
+                  </a:txBody>
+                  <a:tcPr>
+                    <a:lnL w="5080" cap="flat" cmpd="sng" algn="ctr">
+                      <a:solidFill>
+                        <a:srgbClr val="D1DDE8"/>
+                      </a:solidFill>
+                      <a:prstDash val="solid"/>
+                      <a:round/>
+                      <a:headEnd type="none" w="med" len="med"/>
+                      <a:tailEnd type="none" w="med" len="med"/>
+                    </a:lnL>
+                    <a:lnR w="5080" cap="flat" cmpd="sng" algn="ctr">
+                      <a:solidFill>
+                        <a:srgbClr val="D1DDE8"/>
+                      </a:solidFill>
+                      <a:prstDash val="solid"/>
+                      <a:round/>
+                      <a:headEnd type="none" w="med" len="med"/>
+                      <a:tailEnd type="none" w="med" len="med"/>
+                    </a:lnR>
+                    <a:lnT w="5080" cap="flat" cmpd="sng" algn="ctr">
+                      <a:solidFill>
+                        <a:srgbClr val="D1DDE8"/>
+                      </a:solidFill>
+                      <a:prstDash val="solid"/>
+                      <a:round/>
+                      <a:headEnd type="none" w="med" len="med"/>
+                      <a:tailEnd type="none" w="med" len="med"/>
+                    </a:lnT>
+                    <a:lnB w="5080" cap="flat" cmpd="sng" algn="ctr">
+                      <a:solidFill>
+                        <a:srgbClr val="D1DDE8"/>
+                      </a:solidFill>
+                      <a:prstDash val="solid"/>
+                      <a:round/>
+                      <a:headEnd type="none" w="med" len="med"/>
+                      <a:tailEnd type="none" w="med" len="med"/>
+                    </a:lnB>
+                    <a:solidFill>
+                      <a:srgbClr val="FFF1F1"/>
+                    </a:solidFill>
+                  </a:tcPr>
+                </a:tc>
+                <a:tc>
+                  <a:txBody>
+                    <a:bodyPr/>
+                    <a:lstStyle/>
+                    <a:p>
+                      <a:pPr marL="0" indent="0">
+                        <a:buNone/>
+                      </a:pPr>
+                      <a:r>
+                        <a:rPr lang="en-US" sz="850" b="1" dirty="0">
+                          <a:solidFill>
+                            <a:srgbClr val="1E293B"/>
+                          </a:solidFill>
+                          <a:latin typeface="Calibri" pitchFamily="34" charset="0"/>
+                          <a:ea typeface="Calibri" pitchFamily="34" charset="-122"/>
+                          <a:cs typeface="Calibri" pitchFamily="34" charset="-120"/>
+                        </a:rPr>
+                        <a:t>182411</a:t>
+                      </a:r>
+                      <a:endParaRPr lang="en-US" sz="850" dirty="0">
+                        <a:latin typeface="Calibri" charset="0"/>
+                        <a:ea typeface="Calibri" charset="0"/>
+                        <a:cs typeface="Calibri" charset="0"/>
+                      </a:endParaRPr>
+                    </a:p>
+                  </a:txBody>
+                  <a:tcPr>
+                    <a:lnL w="5080" cap="flat" cmpd="sng" algn="ctr">
+                      <a:solidFill>
+                        <a:srgbClr val="D1DDE8"/>
+                      </a:solidFill>
+                      <a:prstDash val="solid"/>
+                      <a:round/>
+                      <a:headEnd type="none" w="med" len="med"/>
+                      <a:tailEnd type="none" w="med" len="med"/>
+                    </a:lnL>
+                    <a:lnR w="5080" cap="flat" cmpd="sng" algn="ctr">
+                      <a:solidFill>
+                        <a:srgbClr val="D1DDE8"/>
+                      </a:solidFill>
+                      <a:prstDash val="solid"/>
+                      <a:round/>
+                      <a:headEnd type="none" w="med" len="med"/>
+                      <a:tailEnd type="none" w="med" len="med"/>
+                    </a:lnR>
+                    <a:lnT w="5080" cap="flat" cmpd="sng" algn="ctr">
+                      <a:solidFill>
+                        <a:srgbClr val="D1DDE8"/>
+                      </a:solidFill>
+                      <a:prstDash val="solid"/>
+                      <a:round/>
+                      <a:headEnd type="none" w="med" len="med"/>
+                      <a:tailEnd type="none" w="med" len="med"/>
+                    </a:lnT>
+                    <a:lnB w="5080" cap="flat" cmpd="sng" algn="ctr">
+                      <a:solidFill>
+                        <a:srgbClr val="D1DDE8"/>
+                      </a:solidFill>
+                      <a:prstDash val="solid"/>
+                      <a:round/>
+                      <a:headEnd type="none" w="med" len="med"/>
+                      <a:tailEnd type="none" w="med" len="med"/>
+                    </a:lnB>
+                    <a:solidFill>
+                      <a:srgbClr val="FFF1F1"/>
+                    </a:solidFill>
+                  </a:tcPr>
+                </a:tc>
+                <a:tc>
+                  <a:txBody>
+                    <a:bodyPr/>
+                    <a:lstStyle/>
+                    <a:p>
+                      <a:pPr marL="0" indent="0">
+                        <a:buNone/>
+                      </a:pPr>
+                      <a:r>
+                        <a:rPr lang="en-US" sz="850" dirty="0">
+                          <a:solidFill>
+                            <a:srgbClr val="1E293B"/>
+                          </a:solidFill>
+                          <a:latin typeface="Calibri" pitchFamily="34" charset="0"/>
+                          <a:ea typeface="Calibri" pitchFamily="34" charset="-122"/>
+                          <a:cs typeface="Calibri" pitchFamily="34" charset="-120"/>
+                        </a:rPr>
+                        <a:t>Nuevosur – Inundaciones jun-2024</a:t>
+                      </a:r>
+                      <a:endParaRPr lang="en-US" sz="850" dirty="0">
+                        <a:latin typeface="Calibri" charset="0"/>
+                        <a:ea typeface="Calibri" charset="0"/>
+                        <a:cs typeface="Calibri" charset="0"/>
+                      </a:endParaRPr>
+                    </a:p>
+                  </a:txBody>
+                  <a:tcPr>
+                    <a:lnL w="5080" cap="flat" cmpd="sng" algn="ctr">
+                      <a:solidFill>
+                        <a:srgbClr val="D1DDE8"/>
+                      </a:solidFill>
+                      <a:prstDash val="solid"/>
+                      <a:round/>
+                      <a:headEnd type="none" w="med" len="med"/>
+                      <a:tailEnd type="none" w="med" len="med"/>
+                    </a:lnL>
+                    <a:lnR w="5080" cap="flat" cmpd="sng" algn="ctr">
+                      <a:solidFill>
+                        <a:srgbClr val="D1DDE8"/>
+                      </a:solidFill>
+                      <a:prstDash val="solid"/>
+                      <a:round/>
+                      <a:headEnd type="none" w="med" len="med"/>
+                      <a:tailEnd type="none" w="med" len="med"/>
+                    </a:lnR>
+                    <a:lnT w="5080" cap="flat" cmpd="sng" algn="ctr">
+                      <a:solidFill>
+                        <a:srgbClr val="D1DDE8"/>
+                      </a:solidFill>
+                      <a:prstDash val="solid"/>
+                      <a:round/>
+                      <a:headEnd type="none" w="med" len="med"/>
+                      <a:tailEnd type="none" w="med" len="med"/>
+                    </a:lnT>
+                    <a:lnB w="5080" cap="flat" cmpd="sng" algn="ctr">
+                      <a:solidFill>
+                        <a:srgbClr val="D1DDE8"/>
+                      </a:solidFill>
+                      <a:prstDash val="solid"/>
+                      <a:round/>
+                      <a:headEnd type="none" w="med" len="med"/>
+                      <a:tailEnd type="none" w="med" len="med"/>
+                    </a:lnB>
+                    <a:solidFill>
+                      <a:srgbClr val="FFF1F1"/>
+                    </a:solidFill>
+                  </a:tcPr>
+                </a:tc>
+                <a:tc>
+                  <a:txBody>
+                    <a:bodyPr/>
+                    <a:lstStyle/>
+                    <a:p>
+                      <a:pPr marL="0" indent="0" algn="ctr">
+                        <a:buNone/>
+                      </a:pPr>
+                      <a:r>
+                        <a:rPr lang="en-US" sz="850" dirty="0">
+                          <a:solidFill>
+                            <a:srgbClr val="64748B"/>
+                          </a:solidFill>
+                          <a:latin typeface="Calibri" pitchFamily="34" charset="0"/>
+                          <a:ea typeface="Calibri" pitchFamily="34" charset="-122"/>
+                          <a:cs typeface="Calibri" pitchFamily="34" charset="-120"/>
+                        </a:rPr>
+                        <a:t>UF</a:t>
+                      </a:r>
+                      <a:endParaRPr lang="en-US" sz="850" dirty="0">
+                        <a:latin typeface="Calibri" charset="0"/>
+                        <a:ea typeface="Calibri" charset="0"/>
+                        <a:cs typeface="Calibri" charset="0"/>
+                      </a:endParaRPr>
+                    </a:p>
+                  </a:txBody>
+                  <a:tcPr>
+                    <a:lnL w="5080" cap="flat" cmpd="sng" algn="ctr">
+                      <a:solidFill>
+                        <a:srgbClr val="D1DDE8"/>
+                      </a:solidFill>
+                      <a:prstDash val="solid"/>
+                      <a:round/>
+                      <a:headEnd type="none" w="med" len="med"/>
+                      <a:tailEnd type="none" w="med" len="med"/>
+                    </a:lnL>
+                    <a:lnR w="5080" cap="flat" cmpd="sng" algn="ctr">
+                      <a:solidFill>
+                        <a:srgbClr val="D1DDE8"/>
+                      </a:solidFill>
+                      <a:prstDash val="solid"/>
+                      <a:round/>
+                      <a:headEnd type="none" w="med" len="med"/>
+                      <a:tailEnd type="none" w="med" len="med"/>
+                    </a:lnR>
+                    <a:lnT w="5080" cap="flat" cmpd="sng" algn="ctr">
+                      <a:solidFill>
+                        <a:srgbClr val="D1DDE8"/>
+                      </a:solidFill>
+                      <a:prstDash val="solid"/>
+                      <a:round/>
+                      <a:headEnd type="none" w="med" len="med"/>
+                      <a:tailEnd type="none" w="med" len="med"/>
+                    </a:lnT>
+                    <a:lnB w="5080" cap="flat" cmpd="sng" algn="ctr">
+                      <a:solidFill>
+                        <a:srgbClr val="D1DDE8"/>
+                      </a:solidFill>
+                      <a:prstDash val="solid"/>
+                      <a:round/>
+                      <a:headEnd type="none" w="med" len="med"/>
+                      <a:tailEnd type="none" w="med" len="med"/>
+                    </a:lnB>
+                    <a:solidFill>
+                      <a:srgbClr val="FFF1F1"/>
+                    </a:solidFill>
+                  </a:tcPr>
+                </a:tc>
+                <a:tc>
+                  <a:txBody>
+                    <a:bodyPr/>
+                    <a:lstStyle/>
+                    <a:p>
+                      <a:pPr marL="0" indent="0" algn="ctr">
+                        <a:buNone/>
+                      </a:pPr>
+                      <a:r>
+                        <a:rPr lang="en-US" sz="900" b="1" dirty="0">
+                          <a:solidFill>
+                            <a:srgbClr val="991B1B"/>
+                          </a:solidFill>
+                          <a:latin typeface="Calibri" pitchFamily="34" charset="0"/>
+                          <a:ea typeface="Calibri" pitchFamily="34" charset="-122"/>
+                          <a:cs typeface="Calibri" pitchFamily="34" charset="-120"/>
+                        </a:rPr>
+                        <a:t>691</a:t>
+                      </a:r>
+                      <a:endParaRPr lang="en-US" sz="900" dirty="0">
+                        <a:latin typeface="Calibri" charset="0"/>
+                        <a:ea typeface="Calibri" charset="0"/>
+                        <a:cs typeface="Calibri" charset="0"/>
+                      </a:endParaRPr>
+                    </a:p>
+                  </a:txBody>
+                  <a:tcPr>
+                    <a:lnL w="5080" cap="flat" cmpd="sng" algn="ctr">
+                      <a:solidFill>
+                        <a:srgbClr val="D1DDE8"/>
+                      </a:solidFill>
+                      <a:prstDash val="solid"/>
+                      <a:round/>
+                      <a:headEnd type="none" w="med" len="med"/>
+                      <a:tailEnd type="none" w="med" len="med"/>
+                    </a:lnL>
+                    <a:lnR w="5080" cap="flat" cmpd="sng" algn="ctr">
+                      <a:solidFill>
+                        <a:srgbClr val="D1DDE8"/>
+                      </a:solidFill>
+                      <a:prstDash val="solid"/>
+                      <a:round/>
+                      <a:headEnd type="none" w="med" len="med"/>
+                      <a:tailEnd type="none" w="med" len="med"/>
+                    </a:lnR>
+                    <a:lnT w="5080" cap="flat" cmpd="sng" algn="ctr">
+                      <a:solidFill>
+                        <a:srgbClr val="D1DDE8"/>
+                      </a:solidFill>
+                      <a:prstDash val="solid"/>
+                      <a:round/>
+                      <a:headEnd type="none" w="med" len="med"/>
+                      <a:tailEnd type="none" w="med" len="med"/>
+                    </a:lnT>
+                    <a:lnB w="5080" cap="flat" cmpd="sng" algn="ctr">
+                      <a:solidFill>
+                        <a:srgbClr val="D1DDE8"/>
+                      </a:solidFill>
+                      <a:prstDash val="solid"/>
+                      <a:round/>
+                      <a:headEnd type="none" w="med" len="med"/>
+                      <a:tailEnd type="none" w="med" len="med"/>
+                    </a:lnB>
+                    <a:solidFill>
+                      <a:srgbClr val="FFF1F1"/>
+                    </a:solidFill>
+                  </a:tcPr>
+                </a:tc>
+                <a:tc>
+                  <a:txBody>
+                    <a:bodyPr/>
+                    <a:lstStyle/>
+                    <a:p>
+                      <a:pPr marL="0" indent="0" algn="ctr">
+                        <a:buNone/>
+                      </a:pPr>
+                      <a:r>
+                        <a:rPr lang="en-US" sz="900" b="1" dirty="0">
+                          <a:solidFill>
+                            <a:srgbClr val="B45309"/>
+                          </a:solidFill>
+                          <a:latin typeface="Calibri" pitchFamily="34" charset="0"/>
+                          <a:ea typeface="Calibri" pitchFamily="34" charset="-122"/>
+                          <a:cs typeface="Calibri" pitchFamily="34" charset="-120"/>
+                        </a:rPr>
+                        <a:t>50%</a:t>
+                      </a:r>
+                      <a:endParaRPr lang="en-US" sz="900" dirty="0">
+                        <a:latin typeface="Calibri" charset="0"/>
+                        <a:ea typeface="Calibri" charset="0"/>
+                        <a:cs typeface="Calibri" charset="0"/>
+                      </a:endParaRPr>
+                    </a:p>
+                  </a:txBody>
+                  <a:tcPr>
+                    <a:lnL w="5080" cap="flat" cmpd="sng" algn="ctr">
+                      <a:solidFill>
+                        <a:srgbClr val="D1DDE8"/>
+                      </a:solidFill>
+                      <a:prstDash val="solid"/>
+                      <a:round/>
+                      <a:headEnd type="none" w="med" len="med"/>
+                      <a:tailEnd type="none" w="med" len="med"/>
+                    </a:lnL>
+                    <a:lnR w="5080" cap="flat" cmpd="sng" algn="ctr">
+                      <a:solidFill>
+                        <a:srgbClr val="D1DDE8"/>
+                      </a:solidFill>
+                      <a:prstDash val="solid"/>
+                      <a:round/>
+                      <a:headEnd type="none" w="med" len="med"/>
+                      <a:tailEnd type="none" w="med" len="med"/>
+                    </a:lnR>
+                    <a:lnT w="5080" cap="flat" cmpd="sng" algn="ctr">
+                      <a:solidFill>
+                        <a:srgbClr val="D1DDE8"/>
+                      </a:solidFill>
+                      <a:prstDash val="solid"/>
+                      <a:round/>
+                      <a:headEnd type="none" w="med" len="med"/>
+                      <a:tailEnd type="none" w="med" len="med"/>
+                    </a:lnT>
+                    <a:lnB w="5080" cap="flat" cmpd="sng" algn="ctr">
+                      <a:solidFill>
+                        <a:srgbClr val="D1DDE8"/>
+                      </a:solidFill>
+                      <a:prstDash val="solid"/>
+                      <a:round/>
+                      <a:headEnd type="none" w="med" len="med"/>
+                      <a:tailEnd type="none" w="med" len="med"/>
+                    </a:lnB>
+                    <a:solidFill>
+                      <a:srgbClr val="FFF1F1"/>
+                    </a:solidFill>
+                  </a:tcPr>
+                </a:tc>
+                <a:tc>
+                  <a:txBody>
+                    <a:bodyPr/>
+                    <a:lstStyle/>
+                    <a:p>
+                      <a:pPr marL="0" indent="0">
+                        <a:buNone/>
+                      </a:pPr>
+                      <a:r>
+                        <a:rPr lang="en-US" sz="750" i="1" dirty="0">
+                          <a:solidFill>
+                            <a:srgbClr val="64748B"/>
+                          </a:solidFill>
+                          <a:latin typeface="Calibri" pitchFamily="34" charset="0"/>
+                          <a:ea typeface="Calibri" pitchFamily="34" charset="-122"/>
+                          <a:cs typeface="Calibri" pitchFamily="34" charset="-120"/>
+                        </a:rPr>
+                        <a:t>Sin respuesta hasta fines junio</a:t>
+                      </a:r>
+                      <a:endParaRPr lang="en-US" sz="750" dirty="0">
+                        <a:latin typeface="Calibri" charset="0"/>
+                        <a:ea typeface="Calibri" charset="0"/>
+                        <a:cs typeface="Calibri" charset="0"/>
+                      </a:endParaRPr>
+                    </a:p>
+                  </a:txBody>
+                  <a:tcPr>
+                    <a:lnL w="5080" cap="flat" cmpd="sng" algn="ctr">
+                      <a:solidFill>
+                        <a:srgbClr val="D1DDE8"/>
+                      </a:solidFill>
+                      <a:prstDash val="solid"/>
+                      <a:round/>
+                      <a:headEnd type="none" w="med" len="med"/>
+                      <a:tailEnd type="none" w="med" len="med"/>
+                    </a:lnL>
+                    <a:lnR w="5080" cap="flat" cmpd="sng" algn="ctr">
+                      <a:solidFill>
+                        <a:srgbClr val="D1DDE8"/>
+                      </a:solidFill>
+                      <a:prstDash val="solid"/>
+                      <a:round/>
+                      <a:headEnd type="none" w="med" len="med"/>
+                      <a:tailEnd type="none" w="med" len="med"/>
+                    </a:lnR>
+                    <a:lnT w="5080" cap="flat" cmpd="sng" algn="ctr">
+                      <a:solidFill>
+                        <a:srgbClr val="D1DDE8"/>
+                      </a:solidFill>
+                      <a:prstDash val="solid"/>
+                      <a:round/>
+                      <a:headEnd type="none" w="med" len="med"/>
+                      <a:tailEnd type="none" w="med" len="med"/>
+                    </a:lnT>
+                    <a:lnB w="5080" cap="flat" cmpd="sng" algn="ctr">
+                      <a:solidFill>
+                        <a:srgbClr val="D1DDE8"/>
+                      </a:solidFill>
+                      <a:prstDash val="solid"/>
+                      <a:round/>
+                      <a:headEnd type="none" w="med" len="med"/>
+                      <a:tailEnd type="none" w="med" len="med"/>
+                    </a:lnB>
+                    <a:solidFill>
+                      <a:srgbClr val="FFF1F1"/>
+                    </a:solidFill>
+                  </a:tcPr>
+                </a:tc>
+                <a:extLst>
+                  <a:ext uri="{0D108BD9-81ED-4DB2-BD59-A6C34878D82A}">
+                    <a16:rowId xmlns:a16="http://schemas.microsoft.com/office/drawing/2014/main" val="10005"/>
+                  </a:ext>
+                </a:extLst>
+              </a:tr>
+              <a:tr h="301752">
+                <a:tc>
+                  <a:txBody>
+                    <a:bodyPr/>
+                    <a:lstStyle/>
+                    <a:p>
+                      <a:pPr marL="0" indent="0" algn="ctr">
+                        <a:buNone/>
+                      </a:pPr>
+                      <a:r>
+                        <a:rPr lang="en-US" sz="850" dirty="0">
+                          <a:solidFill>
+                            <a:srgbClr val="1E293B"/>
+                          </a:solidFill>
+                          <a:latin typeface="Calibri" pitchFamily="34" charset="0"/>
+                          <a:ea typeface="Calibri" pitchFamily="34" charset="-122"/>
+                          <a:cs typeface="Calibri" pitchFamily="34" charset="-120"/>
+                        </a:rPr>
+                        <a:t>6</a:t>
+                      </a:r>
+                      <a:endParaRPr lang="en-US" sz="850" dirty="0">
+                        <a:latin typeface="Calibri" charset="0"/>
+                        <a:ea typeface="Calibri" charset="0"/>
+                        <a:cs typeface="Calibri" charset="0"/>
+                      </a:endParaRPr>
+                    </a:p>
+                  </a:txBody>
+                  <a:tcPr>
+                    <a:lnL w="5080" cap="flat" cmpd="sng" algn="ctr">
+                      <a:solidFill>
+                        <a:srgbClr val="D1DDE8"/>
+                      </a:solidFill>
+                      <a:prstDash val="solid"/>
+                      <a:round/>
+                      <a:headEnd type="none" w="med" len="med"/>
+                      <a:tailEnd type="none" w="med" len="med"/>
+                    </a:lnL>
+                    <a:lnR w="5080" cap="flat" cmpd="sng" algn="ctr">
+                      <a:solidFill>
+                        <a:srgbClr val="D1DDE8"/>
+                      </a:solidFill>
+                      <a:prstDash val="solid"/>
+                      <a:round/>
+                      <a:headEnd type="none" w="med" len="med"/>
+                      <a:tailEnd type="none" w="med" len="med"/>
+                    </a:lnR>
+                    <a:lnT w="5080" cap="flat" cmpd="sng" algn="ctr">
+                      <a:solidFill>
+                        <a:srgbClr val="D1DDE8"/>
+                      </a:solidFill>
+                      <a:prstDash val="solid"/>
+                      <a:round/>
+                      <a:headEnd type="none" w="med" len="med"/>
+                      <a:tailEnd type="none" w="med" len="med"/>
+                    </a:lnT>
+                    <a:lnB w="5080" cap="flat" cmpd="sng" algn="ctr">
+                      <a:solidFill>
+                        <a:srgbClr val="D1DDE8"/>
+                      </a:solidFill>
+                      <a:prstDash val="solid"/>
+                      <a:round/>
+                      <a:headEnd type="none" w="med" len="med"/>
+                      <a:tailEnd type="none" w="med" len="med"/>
+                    </a:lnB>
+                    <a:solidFill>
+                      <a:srgbClr val="FFF1F1"/>
+                    </a:solidFill>
+                  </a:tcPr>
+                </a:tc>
+                <a:tc>
+                  <a:txBody>
+                    <a:bodyPr/>
+                    <a:lstStyle/>
+                    <a:p>
+                      <a:pPr marL="0" indent="0">
+                        <a:buNone/>
+                      </a:pPr>
+                      <a:r>
+                        <a:rPr lang="en-US" sz="850" b="1" dirty="0">
+                          <a:solidFill>
+                            <a:srgbClr val="1E293B"/>
+                          </a:solidFill>
+                          <a:latin typeface="Calibri" pitchFamily="34" charset="0"/>
+                          <a:ea typeface="Calibri" pitchFamily="34" charset="-122"/>
+                          <a:cs typeface="Calibri" pitchFamily="34" charset="-120"/>
+                        </a:rPr>
+                        <a:t>182774</a:t>
+                      </a:r>
+                      <a:endParaRPr lang="en-US" sz="850" dirty="0">
+                        <a:latin typeface="Calibri" charset="0"/>
+                        <a:ea typeface="Calibri" charset="0"/>
+                        <a:cs typeface="Calibri" charset="0"/>
+                      </a:endParaRPr>
+                    </a:p>
+                  </a:txBody>
+                  <a:tcPr>
+                    <a:lnL w="5080" cap="flat" cmpd="sng" algn="ctr">
+                      <a:solidFill>
+                        <a:srgbClr val="D1DDE8"/>
+                      </a:solidFill>
+                      <a:prstDash val="solid"/>
+                      <a:round/>
+                      <a:headEnd type="none" w="med" len="med"/>
+                      <a:tailEnd type="none" w="med" len="med"/>
+                    </a:lnL>
+                    <a:lnR w="5080" cap="flat" cmpd="sng" algn="ctr">
+                      <a:solidFill>
+                        <a:srgbClr val="D1DDE8"/>
+                      </a:solidFill>
+                      <a:prstDash val="solid"/>
+                      <a:round/>
+                      <a:headEnd type="none" w="med" len="med"/>
+                      <a:tailEnd type="none" w="med" len="med"/>
+                    </a:lnR>
+                    <a:lnT w="5080" cap="flat" cmpd="sng" algn="ctr">
+                      <a:solidFill>
+                        <a:srgbClr val="D1DDE8"/>
+                      </a:solidFill>
+                      <a:prstDash val="solid"/>
+                      <a:round/>
+                      <a:headEnd type="none" w="med" len="med"/>
+                      <a:tailEnd type="none" w="med" len="med"/>
+                    </a:lnT>
+                    <a:lnB w="5080" cap="flat" cmpd="sng" algn="ctr">
+                      <a:solidFill>
+                        <a:srgbClr val="D1DDE8"/>
+                      </a:solidFill>
+                      <a:prstDash val="solid"/>
+                      <a:round/>
+                      <a:headEnd type="none" w="med" len="med"/>
+                      <a:tailEnd type="none" w="med" len="med"/>
+                    </a:lnB>
+                    <a:solidFill>
+                      <a:srgbClr val="FFF1F1"/>
+                    </a:solidFill>
+                  </a:tcPr>
+                </a:tc>
+                <a:tc>
+                  <a:txBody>
+                    <a:bodyPr/>
+                    <a:lstStyle/>
+                    <a:p>
+                      <a:pPr marL="0" indent="0">
+                        <a:buNone/>
+                      </a:pPr>
+                      <a:r>
+                        <a:rPr lang="en-US" sz="850" dirty="0">
+                          <a:solidFill>
+                            <a:srgbClr val="1E293B"/>
+                          </a:solidFill>
+                          <a:latin typeface="Calibri" pitchFamily="34" charset="0"/>
+                          <a:ea typeface="Calibri" pitchFamily="34" charset="-122"/>
+                          <a:cs typeface="Calibri" pitchFamily="34" charset="-120"/>
+                        </a:rPr>
+                        <a:t>Inundación gasoducto E. Limache</a:t>
+                      </a:r>
+                      <a:endParaRPr lang="en-US" sz="850" dirty="0">
+                        <a:latin typeface="Calibri" charset="0"/>
+                        <a:ea typeface="Calibri" charset="0"/>
+                        <a:cs typeface="Calibri" charset="0"/>
+                      </a:endParaRPr>
+                    </a:p>
+                  </a:txBody>
+                  <a:tcPr>
+                    <a:lnL w="5080" cap="flat" cmpd="sng" algn="ctr">
+                      <a:solidFill>
+                        <a:srgbClr val="D1DDE8"/>
+                      </a:solidFill>
+                      <a:prstDash val="solid"/>
+                      <a:round/>
+                      <a:headEnd type="none" w="med" len="med"/>
+                      <a:tailEnd type="none" w="med" len="med"/>
+                    </a:lnL>
+                    <a:lnR w="5080" cap="flat" cmpd="sng" algn="ctr">
+                      <a:solidFill>
+                        <a:srgbClr val="D1DDE8"/>
+                      </a:solidFill>
+                      <a:prstDash val="solid"/>
+                      <a:round/>
+                      <a:headEnd type="none" w="med" len="med"/>
+                      <a:tailEnd type="none" w="med" len="med"/>
+                    </a:lnR>
+                    <a:lnT w="5080" cap="flat" cmpd="sng" algn="ctr">
+                      <a:solidFill>
+                        <a:srgbClr val="D1DDE8"/>
+                      </a:solidFill>
+                      <a:prstDash val="solid"/>
+                      <a:round/>
+                      <a:headEnd type="none" w="med" len="med"/>
+                      <a:tailEnd type="none" w="med" len="med"/>
+                    </a:lnT>
+                    <a:lnB w="5080" cap="flat" cmpd="sng" algn="ctr">
+                      <a:solidFill>
+                        <a:srgbClr val="D1DDE8"/>
+                      </a:solidFill>
+                      <a:prstDash val="solid"/>
+                      <a:round/>
+                      <a:headEnd type="none" w="med" len="med"/>
+                      <a:tailEnd type="none" w="med" len="med"/>
+                    </a:lnB>
+                    <a:solidFill>
+                      <a:srgbClr val="FFF1F1"/>
+                    </a:solidFill>
+                  </a:tcPr>
+                </a:tc>
+                <a:tc>
+                  <a:txBody>
+                    <a:bodyPr/>
+                    <a:lstStyle/>
+                    <a:p>
+                      <a:pPr marL="0" indent="0" algn="ctr">
+                        <a:buNone/>
+                      </a:pPr>
+                      <a:r>
+                        <a:rPr lang="en-US" sz="850" dirty="0">
+                          <a:solidFill>
+                            <a:srgbClr val="64748B"/>
+                          </a:solidFill>
+                          <a:latin typeface="Calibri" pitchFamily="34" charset="0"/>
+                          <a:ea typeface="Calibri" pitchFamily="34" charset="-122"/>
+                          <a:cs typeface="Calibri" pitchFamily="34" charset="-120"/>
+                        </a:rPr>
+                        <a:t>USD</a:t>
+                      </a:r>
+                      <a:endParaRPr lang="en-US" sz="850" dirty="0">
+                        <a:latin typeface="Calibri" charset="0"/>
+                        <a:ea typeface="Calibri" charset="0"/>
+                        <a:cs typeface="Calibri" charset="0"/>
+                      </a:endParaRPr>
+                    </a:p>
+                  </a:txBody>
+                  <a:tcPr>
+                    <a:lnL w="5080" cap="flat" cmpd="sng" algn="ctr">
+                      <a:solidFill>
+                        <a:srgbClr val="D1DDE8"/>
+                      </a:solidFill>
+                      <a:prstDash val="solid"/>
+                      <a:round/>
+                      <a:headEnd type="none" w="med" len="med"/>
+                      <a:tailEnd type="none" w="med" len="med"/>
+                    </a:lnL>
+                    <a:lnR w="5080" cap="flat" cmpd="sng" algn="ctr">
+                      <a:solidFill>
+                        <a:srgbClr val="D1DDE8"/>
+                      </a:solidFill>
+                      <a:prstDash val="solid"/>
+                      <a:round/>
+                      <a:headEnd type="none" w="med" len="med"/>
+                      <a:tailEnd type="none" w="med" len="med"/>
+                    </a:lnR>
+                    <a:lnT w="5080" cap="flat" cmpd="sng" algn="ctr">
+                      <a:solidFill>
+                        <a:srgbClr val="D1DDE8"/>
+                      </a:solidFill>
+                      <a:prstDash val="solid"/>
+                      <a:round/>
+                      <a:headEnd type="none" w="med" len="med"/>
+                      <a:tailEnd type="none" w="med" len="med"/>
+                    </a:lnT>
+                    <a:lnB w="5080" cap="flat" cmpd="sng" algn="ctr">
+                      <a:solidFill>
+                        <a:srgbClr val="D1DDE8"/>
+                      </a:solidFill>
+                      <a:prstDash val="solid"/>
+                      <a:round/>
+                      <a:headEnd type="none" w="med" len="med"/>
+                      <a:tailEnd type="none" w="med" len="med"/>
+                    </a:lnB>
+                    <a:solidFill>
+                      <a:srgbClr val="FFF1F1"/>
+                    </a:solidFill>
+                  </a:tcPr>
+                </a:tc>
+                <a:tc>
+                  <a:txBody>
+                    <a:bodyPr/>
+                    <a:lstStyle/>
+                    <a:p>
+                      <a:pPr marL="0" indent="0" algn="ctr">
+                        <a:buNone/>
+                      </a:pPr>
+                      <a:r>
+                        <a:rPr lang="en-US" sz="900" b="1" dirty="0">
+                          <a:solidFill>
+                            <a:srgbClr val="991B1B"/>
+                          </a:solidFill>
+                          <a:latin typeface="Calibri" pitchFamily="34" charset="0"/>
+                          <a:ea typeface="Calibri" pitchFamily="34" charset="-122"/>
+                          <a:cs typeface="Calibri" pitchFamily="34" charset="-120"/>
+                        </a:rPr>
+                        <a:t>685</a:t>
+                      </a:r>
+                      <a:endParaRPr lang="en-US" sz="900" dirty="0">
+                        <a:latin typeface="Calibri" charset="0"/>
+                        <a:ea typeface="Calibri" charset="0"/>
+                        <a:cs typeface="Calibri" charset="0"/>
+                      </a:endParaRPr>
+                    </a:p>
+                  </a:txBody>
+                  <a:tcPr>
+                    <a:lnL w="5080" cap="flat" cmpd="sng" algn="ctr">
+                      <a:solidFill>
+                        <a:srgbClr val="D1DDE8"/>
+                      </a:solidFill>
+                      <a:prstDash val="solid"/>
+                      <a:round/>
+                      <a:headEnd type="none" w="med" len="med"/>
+                      <a:tailEnd type="none" w="med" len="med"/>
+                    </a:lnL>
+                    <a:lnR w="5080" cap="flat" cmpd="sng" algn="ctr">
+                      <a:solidFill>
+                        <a:srgbClr val="D1DDE8"/>
+                      </a:solidFill>
+                      <a:prstDash val="solid"/>
+                      <a:round/>
+                      <a:headEnd type="none" w="med" len="med"/>
+                      <a:tailEnd type="none" w="med" len="med"/>
+                    </a:lnR>
+                    <a:lnT w="5080" cap="flat" cmpd="sng" algn="ctr">
+                      <a:solidFill>
+                        <a:srgbClr val="D1DDE8"/>
+                      </a:solidFill>
+                      <a:prstDash val="solid"/>
+                      <a:round/>
+                      <a:headEnd type="none" w="med" len="med"/>
+                      <a:tailEnd type="none" w="med" len="med"/>
+                    </a:lnT>
+                    <a:lnB w="5080" cap="flat" cmpd="sng" algn="ctr">
+                      <a:solidFill>
+                        <a:srgbClr val="D1DDE8"/>
+                      </a:solidFill>
+                      <a:prstDash val="solid"/>
+                      <a:round/>
+                      <a:headEnd type="none" w="med" len="med"/>
+                      <a:tailEnd type="none" w="med" len="med"/>
+                    </a:lnB>
+                    <a:solidFill>
+                      <a:srgbClr val="FFF1F1"/>
+                    </a:solidFill>
+                  </a:tcPr>
+                </a:tc>
+                <a:tc>
+                  <a:txBody>
+                    <a:bodyPr/>
+                    <a:lstStyle/>
+                    <a:p>
+                      <a:pPr marL="0" indent="0" algn="ctr">
+                        <a:buNone/>
+                      </a:pPr>
+                      <a:r>
+                        <a:rPr lang="en-US" sz="900" b="1" dirty="0">
+                          <a:solidFill>
+                            <a:srgbClr val="B45309"/>
+                          </a:solidFill>
+                          <a:latin typeface="Calibri" pitchFamily="34" charset="0"/>
+                          <a:ea typeface="Calibri" pitchFamily="34" charset="-122"/>
+                          <a:cs typeface="Calibri" pitchFamily="34" charset="-120"/>
+                        </a:rPr>
+                        <a:t>50%</a:t>
+                      </a:r>
+                      <a:endParaRPr lang="en-US" sz="900" dirty="0">
+                        <a:latin typeface="Calibri" charset="0"/>
+                        <a:ea typeface="Calibri" charset="0"/>
+                        <a:cs typeface="Calibri" charset="0"/>
+                      </a:endParaRPr>
+                    </a:p>
+                  </a:txBody>
+                  <a:tcPr>
+                    <a:lnL w="5080" cap="flat" cmpd="sng" algn="ctr">
+                      <a:solidFill>
+                        <a:srgbClr val="D1DDE8"/>
+                      </a:solidFill>
+                      <a:prstDash val="solid"/>
+                      <a:round/>
+                      <a:headEnd type="none" w="med" len="med"/>
+                      <a:tailEnd type="none" w="med" len="med"/>
+                    </a:lnL>
+                    <a:lnR w="5080" cap="flat" cmpd="sng" algn="ctr">
+                      <a:solidFill>
+                        <a:srgbClr val="D1DDE8"/>
+                      </a:solidFill>
+                      <a:prstDash val="solid"/>
+                      <a:round/>
+                      <a:headEnd type="none" w="med" len="med"/>
+                      <a:tailEnd type="none" w="med" len="med"/>
+                    </a:lnR>
+                    <a:lnT w="5080" cap="flat" cmpd="sng" algn="ctr">
+                      <a:solidFill>
+                        <a:srgbClr val="D1DDE8"/>
+                      </a:solidFill>
+                      <a:prstDash val="solid"/>
+                      <a:round/>
+                      <a:headEnd type="none" w="med" len="med"/>
+                      <a:tailEnd type="none" w="med" len="med"/>
+                    </a:lnT>
+                    <a:lnB w="5080" cap="flat" cmpd="sng" algn="ctr">
+                      <a:solidFill>
+                        <a:srgbClr val="D1DDE8"/>
+                      </a:solidFill>
+                      <a:prstDash val="solid"/>
+                      <a:round/>
+                      <a:headEnd type="none" w="med" len="med"/>
+                      <a:tailEnd type="none" w="med" len="med"/>
+                    </a:lnB>
+                    <a:solidFill>
+                      <a:srgbClr val="FFF1F1"/>
+                    </a:solidFill>
+                  </a:tcPr>
+                </a:tc>
+                <a:tc>
+                  <a:txBody>
+                    <a:bodyPr/>
+                    <a:lstStyle/>
+                    <a:p>
+                      <a:pPr marL="0" indent="0">
+                        <a:buNone/>
+                      </a:pPr>
+                      <a:r>
+                        <a:rPr lang="en-US" sz="750" i="1" dirty="0">
+                          <a:solidFill>
+                            <a:srgbClr val="64748B"/>
+                          </a:solidFill>
+                          <a:latin typeface="Calibri" pitchFamily="34" charset="0"/>
+                          <a:ea typeface="Calibri" pitchFamily="34" charset="-122"/>
+                          <a:cs typeface="Calibri" pitchFamily="34" charset="-120"/>
+                        </a:rPr>
+                        <a:t>Inspección pendiente</a:t>
+                      </a:r>
+                      <a:endParaRPr lang="en-US" sz="750" dirty="0">
+                        <a:latin typeface="Calibri" charset="0"/>
+                        <a:ea typeface="Calibri" charset="0"/>
+                        <a:cs typeface="Calibri" charset="0"/>
+                      </a:endParaRPr>
+                    </a:p>
+                  </a:txBody>
+                  <a:tcPr>
+                    <a:lnL w="5080" cap="flat" cmpd="sng" algn="ctr">
+                      <a:solidFill>
+                        <a:srgbClr val="D1DDE8"/>
+                      </a:solidFill>
+                      <a:prstDash val="solid"/>
+                      <a:round/>
+                      <a:headEnd type="none" w="med" len="med"/>
+                      <a:tailEnd type="none" w="med" len="med"/>
+                    </a:lnL>
+                    <a:lnR w="5080" cap="flat" cmpd="sng" algn="ctr">
+                      <a:solidFill>
+                        <a:srgbClr val="D1DDE8"/>
+                      </a:solidFill>
+                      <a:prstDash val="solid"/>
+                      <a:round/>
+                      <a:headEnd type="none" w="med" len="med"/>
+                      <a:tailEnd type="none" w="med" len="med"/>
+                    </a:lnR>
+                    <a:lnT w="5080" cap="flat" cmpd="sng" algn="ctr">
+                      <a:solidFill>
+                        <a:srgbClr val="D1DDE8"/>
+                      </a:solidFill>
+                      <a:prstDash val="solid"/>
+                      <a:round/>
+                      <a:headEnd type="none" w="med" len="med"/>
+                      <a:tailEnd type="none" w="med" len="med"/>
+                    </a:lnT>
+                    <a:lnB w="5080" cap="flat" cmpd="sng" algn="ctr">
+                      <a:solidFill>
+                        <a:srgbClr val="D1DDE8"/>
+                      </a:solidFill>
+                      <a:prstDash val="solid"/>
+                      <a:round/>
+                      <a:headEnd type="none" w="med" len="med"/>
+                      <a:tailEnd type="none" w="med" len="med"/>
+                    </a:lnB>
+                    <a:solidFill>
+                      <a:srgbClr val="FFF1F1"/>
+                    </a:solidFill>
+                  </a:tcPr>
+                </a:tc>
+                <a:extLst>
+                  <a:ext uri="{0D108BD9-81ED-4DB2-BD59-A6C34878D82A}">
+                    <a16:rowId xmlns:a16="http://schemas.microsoft.com/office/drawing/2014/main" val="10006"/>
+                  </a:ext>
+                </a:extLst>
+              </a:tr>
+              <a:tr h="301752">
+                <a:tc>
+                  <a:txBody>
+                    <a:bodyPr/>
+                    <a:lstStyle/>
+                    <a:p>
+                      <a:pPr marL="0" indent="0" algn="ctr">
+                        <a:buNone/>
+                      </a:pPr>
+                      <a:r>
+                        <a:rPr lang="en-US" sz="850" dirty="0">
+                          <a:solidFill>
+                            <a:srgbClr val="1E293B"/>
+                          </a:solidFill>
+                          <a:latin typeface="Calibri" pitchFamily="34" charset="0"/>
+                          <a:ea typeface="Calibri" pitchFamily="34" charset="-122"/>
+                          <a:cs typeface="Calibri" pitchFamily="34" charset="-120"/>
+                        </a:rPr>
+                        <a:t>7</a:t>
+                      </a:r>
+                      <a:endParaRPr lang="en-US" sz="850" dirty="0">
+                        <a:latin typeface="Calibri" charset="0"/>
+                        <a:ea typeface="Calibri" charset="0"/>
+                        <a:cs typeface="Calibri" charset="0"/>
+                      </a:endParaRPr>
+                    </a:p>
+                  </a:txBody>
+                  <a:tcPr>
+                    <a:lnL w="5080" cap="flat" cmpd="sng" algn="ctr">
+                      <a:solidFill>
+                        <a:srgbClr val="D1DDE8"/>
+                      </a:solidFill>
+                      <a:prstDash val="solid"/>
+                      <a:round/>
+                      <a:headEnd type="none" w="med" len="med"/>
+                      <a:tailEnd type="none" w="med" len="med"/>
+                    </a:lnL>
+                    <a:lnR w="5080" cap="flat" cmpd="sng" algn="ctr">
+                      <a:solidFill>
+                        <a:srgbClr val="D1DDE8"/>
+                      </a:solidFill>
+                      <a:prstDash val="solid"/>
+                      <a:round/>
+                      <a:headEnd type="none" w="med" len="med"/>
+                      <a:tailEnd type="none" w="med" len="med"/>
+                    </a:lnR>
+                    <a:lnT w="5080" cap="flat" cmpd="sng" algn="ctr">
+                      <a:solidFill>
+                        <a:srgbClr val="D1DDE8"/>
+                      </a:solidFill>
+                      <a:prstDash val="solid"/>
+                      <a:round/>
+                      <a:headEnd type="none" w="med" len="med"/>
+                      <a:tailEnd type="none" w="med" len="med"/>
+                    </a:lnT>
+                    <a:lnB w="5080" cap="flat" cmpd="sng" algn="ctr">
+                      <a:solidFill>
+                        <a:srgbClr val="D1DDE8"/>
+                      </a:solidFill>
+                      <a:prstDash val="solid"/>
+                      <a:round/>
+                      <a:headEnd type="none" w="med" len="med"/>
+                      <a:tailEnd type="none" w="med" len="med"/>
+                    </a:lnB>
+                    <a:solidFill>
+                      <a:srgbClr val="FEF3C7"/>
+                    </a:solidFill>
+                  </a:tcPr>
+                </a:tc>
+                <a:tc>
+                  <a:txBody>
+                    <a:bodyPr/>
+                    <a:lstStyle/>
+                    <a:p>
+                      <a:pPr marL="0" indent="0">
+                        <a:buNone/>
+                      </a:pPr>
+                      <a:r>
+                        <a:rPr lang="en-US" sz="850" b="1" dirty="0">
+                          <a:solidFill>
+                            <a:srgbClr val="1E293B"/>
+                          </a:solidFill>
+                          <a:latin typeface="Calibri" pitchFamily="34" charset="0"/>
+                          <a:ea typeface="Calibri" pitchFamily="34" charset="-122"/>
+                          <a:cs typeface="Calibri" pitchFamily="34" charset="-120"/>
+                        </a:rPr>
+                        <a:t>188864</a:t>
+                      </a:r>
+                      <a:endParaRPr lang="en-US" sz="850" dirty="0">
+                        <a:latin typeface="Calibri" charset="0"/>
+                        <a:ea typeface="Calibri" charset="0"/>
+                        <a:cs typeface="Calibri" charset="0"/>
+                      </a:endParaRPr>
+                    </a:p>
+                  </a:txBody>
+                  <a:tcPr>
+                    <a:lnL w="5080" cap="flat" cmpd="sng" algn="ctr">
+                      <a:solidFill>
+                        <a:srgbClr val="D1DDE8"/>
+                      </a:solidFill>
+                      <a:prstDash val="solid"/>
+                      <a:round/>
+                      <a:headEnd type="none" w="med" len="med"/>
+                      <a:tailEnd type="none" w="med" len="med"/>
+                    </a:lnL>
+                    <a:lnR w="5080" cap="flat" cmpd="sng" algn="ctr">
+                      <a:solidFill>
+                        <a:srgbClr val="D1DDE8"/>
+                      </a:solidFill>
+                      <a:prstDash val="solid"/>
+                      <a:round/>
+                      <a:headEnd type="none" w="med" len="med"/>
+                      <a:tailEnd type="none" w="med" len="med"/>
+                    </a:lnR>
+                    <a:lnT w="5080" cap="flat" cmpd="sng" algn="ctr">
+                      <a:solidFill>
+                        <a:srgbClr val="D1DDE8"/>
+                      </a:solidFill>
+                      <a:prstDash val="solid"/>
+                      <a:round/>
+                      <a:headEnd type="none" w="med" len="med"/>
+                      <a:tailEnd type="none" w="med" len="med"/>
+                    </a:lnT>
+                    <a:lnB w="5080" cap="flat" cmpd="sng" algn="ctr">
+                      <a:solidFill>
+                        <a:srgbClr val="D1DDE8"/>
+                      </a:solidFill>
+                      <a:prstDash val="solid"/>
+                      <a:round/>
+                      <a:headEnd type="none" w="med" len="med"/>
+                      <a:tailEnd type="none" w="med" len="med"/>
+                    </a:lnB>
+                    <a:solidFill>
+                      <a:srgbClr val="FEF3C7"/>
+                    </a:solidFill>
+                  </a:tcPr>
+                </a:tc>
+                <a:tc>
+                  <a:txBody>
+                    <a:bodyPr/>
+                    <a:lstStyle/>
+                    <a:p>
+                      <a:pPr marL="0" indent="0">
+                        <a:buNone/>
+                      </a:pPr>
+                      <a:r>
+                        <a:rPr lang="en-US" sz="850" dirty="0">
+                          <a:solidFill>
+                            <a:srgbClr val="1E293B"/>
+                          </a:solidFill>
+                          <a:latin typeface="Calibri" pitchFamily="34" charset="0"/>
+                          <a:ea typeface="Calibri" pitchFamily="34" charset="-122"/>
+                          <a:cs typeface="Calibri" pitchFamily="34" charset="-120"/>
+                        </a:rPr>
+                        <a:t>Nuevosur – Temporal ago-2024</a:t>
+                      </a:r>
+                      <a:endParaRPr lang="en-US" sz="850" dirty="0">
+                        <a:latin typeface="Calibri" charset="0"/>
+                        <a:ea typeface="Calibri" charset="0"/>
+                        <a:cs typeface="Calibri" charset="0"/>
+                      </a:endParaRPr>
+                    </a:p>
+                  </a:txBody>
+                  <a:tcPr>
+                    <a:lnL w="5080" cap="flat" cmpd="sng" algn="ctr">
+                      <a:solidFill>
+                        <a:srgbClr val="D1DDE8"/>
+                      </a:solidFill>
+                      <a:prstDash val="solid"/>
+                      <a:round/>
+                      <a:headEnd type="none" w="med" len="med"/>
+                      <a:tailEnd type="none" w="med" len="med"/>
+                    </a:lnL>
+                    <a:lnR w="5080" cap="flat" cmpd="sng" algn="ctr">
+                      <a:solidFill>
+                        <a:srgbClr val="D1DDE8"/>
+                      </a:solidFill>
+                      <a:prstDash val="solid"/>
+                      <a:round/>
+                      <a:headEnd type="none" w="med" len="med"/>
+                      <a:tailEnd type="none" w="med" len="med"/>
+                    </a:lnR>
+                    <a:lnT w="5080" cap="flat" cmpd="sng" algn="ctr">
+                      <a:solidFill>
+                        <a:srgbClr val="D1DDE8"/>
+                      </a:solidFill>
+                      <a:prstDash val="solid"/>
+                      <a:round/>
+                      <a:headEnd type="none" w="med" len="med"/>
+                      <a:tailEnd type="none" w="med" len="med"/>
+                    </a:lnT>
+                    <a:lnB w="5080" cap="flat" cmpd="sng" algn="ctr">
+                      <a:solidFill>
+                        <a:srgbClr val="D1DDE8"/>
+                      </a:solidFill>
+                      <a:prstDash val="solid"/>
+                      <a:round/>
+                      <a:headEnd type="none" w="med" len="med"/>
+                      <a:tailEnd type="none" w="med" len="med"/>
+                    </a:lnB>
+                    <a:solidFill>
+                      <a:srgbClr val="FEF3C7"/>
+                    </a:solidFill>
+                  </a:tcPr>
+                </a:tc>
+                <a:tc>
+                  <a:txBody>
+                    <a:bodyPr/>
+                    <a:lstStyle/>
+                    <a:p>
+                      <a:pPr marL="0" indent="0" algn="ctr">
+                        <a:buNone/>
+                      </a:pPr>
+                      <a:r>
+                        <a:rPr lang="en-US" sz="850" dirty="0">
+                          <a:solidFill>
+                            <a:srgbClr val="64748B"/>
+                          </a:solidFill>
+                          <a:latin typeface="Calibri" pitchFamily="34" charset="0"/>
+                          <a:ea typeface="Calibri" pitchFamily="34" charset="-122"/>
+                          <a:cs typeface="Calibri" pitchFamily="34" charset="-120"/>
+                        </a:rPr>
+                        <a:t>UF</a:t>
+                      </a:r>
+                      <a:endParaRPr lang="en-US" sz="850" dirty="0">
+                        <a:latin typeface="Calibri" charset="0"/>
+                        <a:ea typeface="Calibri" charset="0"/>
+                        <a:cs typeface="Calibri" charset="0"/>
+                      </a:endParaRPr>
+                    </a:p>
+                  </a:txBody>
+                  <a:tcPr>
+                    <a:lnL w="5080" cap="flat" cmpd="sng" algn="ctr">
+                      <a:solidFill>
+                        <a:srgbClr val="D1DDE8"/>
+                      </a:solidFill>
+                      <a:prstDash val="solid"/>
+                      <a:round/>
+                      <a:headEnd type="none" w="med" len="med"/>
+                      <a:tailEnd type="none" w="med" len="med"/>
+                    </a:lnL>
+                    <a:lnR w="5080" cap="flat" cmpd="sng" algn="ctr">
+                      <a:solidFill>
+                        <a:srgbClr val="D1DDE8"/>
+                      </a:solidFill>
+                      <a:prstDash val="solid"/>
+                      <a:round/>
+                      <a:headEnd type="none" w="med" len="med"/>
+                      <a:tailEnd type="none" w="med" len="med"/>
+                    </a:lnR>
+                    <a:lnT w="5080" cap="flat" cmpd="sng" algn="ctr">
+                      <a:solidFill>
+                        <a:srgbClr val="D1DDE8"/>
+                      </a:solidFill>
+                      <a:prstDash val="solid"/>
+                      <a:round/>
+                      <a:headEnd type="none" w="med" len="med"/>
+                      <a:tailEnd type="none" w="med" len="med"/>
+                    </a:lnT>
+                    <a:lnB w="5080" cap="flat" cmpd="sng" algn="ctr">
+                      <a:solidFill>
+                        <a:srgbClr val="D1DDE8"/>
+                      </a:solidFill>
+                      <a:prstDash val="solid"/>
+                      <a:round/>
+                      <a:headEnd type="none" w="med" len="med"/>
+                      <a:tailEnd type="none" w="med" len="med"/>
+                    </a:lnB>
+                    <a:solidFill>
+                      <a:srgbClr val="FEF3C7"/>
+                    </a:solidFill>
+                  </a:tcPr>
+                </a:tc>
+                <a:tc>
+                  <a:txBody>
+                    <a:bodyPr/>
+                    <a:lstStyle/>
+                    <a:p>
+                      <a:pPr marL="0" indent="0" algn="ctr">
+                        <a:buNone/>
+                      </a:pPr>
+                      <a:r>
+                        <a:rPr lang="en-US" sz="900" b="1" dirty="0">
+                          <a:solidFill>
+                            <a:srgbClr val="1E293B"/>
+                          </a:solidFill>
+                          <a:latin typeface="Calibri" pitchFamily="34" charset="0"/>
+                          <a:ea typeface="Calibri" pitchFamily="34" charset="-122"/>
+                          <a:cs typeface="Calibri" pitchFamily="34" charset="-120"/>
+                        </a:rPr>
+                        <a:t>600</a:t>
+                      </a:r>
+                      <a:endParaRPr lang="en-US" sz="900" dirty="0">
+                        <a:latin typeface="Calibri" charset="0"/>
+                        <a:ea typeface="Calibri" charset="0"/>
+                        <a:cs typeface="Calibri" charset="0"/>
+                      </a:endParaRPr>
+                    </a:p>
+                  </a:txBody>
+                  <a:tcPr>
+                    <a:lnL w="5080" cap="flat" cmpd="sng" algn="ctr">
+                      <a:solidFill>
+                        <a:srgbClr val="D1DDE8"/>
+                      </a:solidFill>
+                      <a:prstDash val="solid"/>
+                      <a:round/>
+                      <a:headEnd type="none" w="med" len="med"/>
+                      <a:tailEnd type="none" w="med" len="med"/>
+                    </a:lnL>
+                    <a:lnR w="5080" cap="flat" cmpd="sng" algn="ctr">
+                      <a:solidFill>
+                        <a:srgbClr val="D1DDE8"/>
+                      </a:solidFill>
+                      <a:prstDash val="solid"/>
+                      <a:round/>
+                      <a:headEnd type="none" w="med" len="med"/>
+                      <a:tailEnd type="none" w="med" len="med"/>
+                    </a:lnR>
+                    <a:lnT w="5080" cap="flat" cmpd="sng" algn="ctr">
+                      <a:solidFill>
+                        <a:srgbClr val="D1DDE8"/>
+                      </a:solidFill>
+                      <a:prstDash val="solid"/>
+                      <a:round/>
+                      <a:headEnd type="none" w="med" len="med"/>
+                      <a:tailEnd type="none" w="med" len="med"/>
+                    </a:lnT>
+                    <a:lnB w="5080" cap="flat" cmpd="sng" algn="ctr">
+                      <a:solidFill>
+                        <a:srgbClr val="D1DDE8"/>
+                      </a:solidFill>
+                      <a:prstDash val="solid"/>
+                      <a:round/>
+                      <a:headEnd type="none" w="med" len="med"/>
+                      <a:tailEnd type="none" w="med" len="med"/>
+                    </a:lnB>
+                    <a:solidFill>
+                      <a:srgbClr val="FEF3C7"/>
+                    </a:solidFill>
+                  </a:tcPr>
+                </a:tc>
+                <a:tc>
+                  <a:txBody>
+                    <a:bodyPr/>
+                    <a:lstStyle/>
+                    <a:p>
+                      <a:pPr marL="0" indent="0" algn="ctr">
+                        <a:buNone/>
+                      </a:pPr>
+                      <a:r>
+                        <a:rPr lang="en-US" sz="900" b="1" dirty="0">
+                          <a:solidFill>
+                            <a:srgbClr val="B45309"/>
+                          </a:solidFill>
+                          <a:latin typeface="Calibri" pitchFamily="34" charset="0"/>
+                          <a:ea typeface="Calibri" pitchFamily="34" charset="-122"/>
+                          <a:cs typeface="Calibri" pitchFamily="34" charset="-120"/>
+                        </a:rPr>
+                        <a:t>50%</a:t>
+                      </a:r>
+                      <a:endParaRPr lang="en-US" sz="900" dirty="0">
+                        <a:latin typeface="Calibri" charset="0"/>
+                        <a:ea typeface="Calibri" charset="0"/>
+                        <a:cs typeface="Calibri" charset="0"/>
+                      </a:endParaRPr>
+                    </a:p>
+                  </a:txBody>
+                  <a:tcPr>
+                    <a:lnL w="5080" cap="flat" cmpd="sng" algn="ctr">
+                      <a:solidFill>
+                        <a:srgbClr val="D1DDE8"/>
+                      </a:solidFill>
+                      <a:prstDash val="solid"/>
+                      <a:round/>
+                      <a:headEnd type="none" w="med" len="med"/>
+                      <a:tailEnd type="none" w="med" len="med"/>
+                    </a:lnL>
+                    <a:lnR w="5080" cap="flat" cmpd="sng" algn="ctr">
+                      <a:solidFill>
+                        <a:srgbClr val="D1DDE8"/>
+                      </a:solidFill>
+                      <a:prstDash val="solid"/>
+                      <a:round/>
+                      <a:headEnd type="none" w="med" len="med"/>
+                      <a:tailEnd type="none" w="med" len="med"/>
+                    </a:lnR>
+                    <a:lnT w="5080" cap="flat" cmpd="sng" algn="ctr">
+                      <a:solidFill>
+                        <a:srgbClr val="D1DDE8"/>
+                      </a:solidFill>
+                      <a:prstDash val="solid"/>
+                      <a:round/>
+                      <a:headEnd type="none" w="med" len="med"/>
+                      <a:tailEnd type="none" w="med" len="med"/>
+                    </a:lnT>
+                    <a:lnB w="5080" cap="flat" cmpd="sng" algn="ctr">
+                      <a:solidFill>
+                        <a:srgbClr val="D1DDE8"/>
+                      </a:solidFill>
+                      <a:prstDash val="solid"/>
+                      <a:round/>
+                      <a:headEnd type="none" w="med" len="med"/>
+                      <a:tailEnd type="none" w="med" len="med"/>
+                    </a:lnB>
+                    <a:solidFill>
+                      <a:srgbClr val="FEF3C7"/>
+                    </a:solidFill>
+                  </a:tcPr>
+                </a:tc>
+                <a:tc>
+                  <a:txBody>
+                    <a:bodyPr/>
+                    <a:lstStyle/>
+                    <a:p>
+                      <a:pPr marL="0" indent="0">
+                        <a:buNone/>
+                      </a:pPr>
+                      <a:r>
+                        <a:rPr lang="en-US" sz="750" i="1" dirty="0">
+                          <a:solidFill>
+                            <a:srgbClr val="64748B"/>
+                          </a:solidFill>
+                          <a:latin typeface="Calibri" pitchFamily="34" charset="0"/>
+                          <a:ea typeface="Calibri" pitchFamily="34" charset="-122"/>
+                          <a:cs typeface="Calibri" pitchFamily="34" charset="-120"/>
+                        </a:rPr>
+                        <a:t>Antecedentes a fines de julio</a:t>
+                      </a:r>
+                      <a:endParaRPr lang="en-US" sz="750" dirty="0">
+                        <a:latin typeface="Calibri" charset="0"/>
+                        <a:ea typeface="Calibri" charset="0"/>
+                        <a:cs typeface="Calibri" charset="0"/>
+                      </a:endParaRPr>
+                    </a:p>
+                  </a:txBody>
+                  <a:tcPr>
+                    <a:lnL w="5080" cap="flat" cmpd="sng" algn="ctr">
+                      <a:solidFill>
+                        <a:srgbClr val="D1DDE8"/>
+                      </a:solidFill>
+                      <a:prstDash val="solid"/>
+                      <a:round/>
+                      <a:headEnd type="none" w="med" len="med"/>
+                      <a:tailEnd type="none" w="med" len="med"/>
+                    </a:lnL>
+                    <a:lnR w="5080" cap="flat" cmpd="sng" algn="ctr">
+                      <a:solidFill>
+                        <a:srgbClr val="D1DDE8"/>
+                      </a:solidFill>
+                      <a:prstDash val="solid"/>
+                      <a:round/>
+                      <a:headEnd type="none" w="med" len="med"/>
+                      <a:tailEnd type="none" w="med" len="med"/>
+                    </a:lnR>
+                    <a:lnT w="5080" cap="flat" cmpd="sng" algn="ctr">
+                      <a:solidFill>
+                        <a:srgbClr val="D1DDE8"/>
+                      </a:solidFill>
+                      <a:prstDash val="solid"/>
+                      <a:round/>
+                      <a:headEnd type="none" w="med" len="med"/>
+                      <a:tailEnd type="none" w="med" len="med"/>
+                    </a:lnT>
+                    <a:lnB w="5080" cap="flat" cmpd="sng" algn="ctr">
+                      <a:solidFill>
+                        <a:srgbClr val="D1DDE8"/>
+                      </a:solidFill>
+                      <a:prstDash val="solid"/>
+                      <a:round/>
+                      <a:headEnd type="none" w="med" len="med"/>
+                      <a:tailEnd type="none" w="med" len="med"/>
+                    </a:lnB>
+                    <a:solidFill>
+                      <a:srgbClr val="FEF3C7"/>
+                    </a:solidFill>
+                  </a:tcPr>
+                </a:tc>
+                <a:extLst>
+                  <a:ext uri="{0D108BD9-81ED-4DB2-BD59-A6C34878D82A}">
+                    <a16:rowId xmlns:a16="http://schemas.microsoft.com/office/drawing/2014/main" val="10007"/>
+                  </a:ext>
+                </a:extLst>
+              </a:tr>
+              <a:tr h="301752">
+                <a:tc>
+                  <a:txBody>
+                    <a:bodyPr/>
+                    <a:lstStyle/>
+                    <a:p>
+                      <a:pPr marL="0" indent="0" algn="ctr">
+                        <a:buNone/>
+                      </a:pPr>
+                      <a:r>
+                        <a:rPr lang="en-US" sz="850" dirty="0">
+                          <a:solidFill>
+                            <a:srgbClr val="1E293B"/>
+                          </a:solidFill>
+                          <a:latin typeface="Calibri" pitchFamily="34" charset="0"/>
+                          <a:ea typeface="Calibri" pitchFamily="34" charset="-122"/>
+                          <a:cs typeface="Calibri" pitchFamily="34" charset="-120"/>
+                        </a:rPr>
+                        <a:t>8</a:t>
+                      </a:r>
+                      <a:endParaRPr lang="en-US" sz="850" dirty="0">
+                        <a:latin typeface="Calibri" charset="0"/>
+                        <a:ea typeface="Calibri" charset="0"/>
+                        <a:cs typeface="Calibri" charset="0"/>
+                      </a:endParaRPr>
+                    </a:p>
+                  </a:txBody>
+                  <a:tcPr>
+                    <a:lnL w="5080" cap="flat" cmpd="sng" algn="ctr">
+                      <a:solidFill>
+                        <a:srgbClr val="D1DDE8"/>
+                      </a:solidFill>
+                      <a:prstDash val="solid"/>
+                      <a:round/>
+                      <a:headEnd type="none" w="med" len="med"/>
+                      <a:tailEnd type="none" w="med" len="med"/>
+                    </a:lnL>
+                    <a:lnR w="5080" cap="flat" cmpd="sng" algn="ctr">
+                      <a:solidFill>
+                        <a:srgbClr val="D1DDE8"/>
+                      </a:solidFill>
+                      <a:prstDash val="solid"/>
+                      <a:round/>
+                      <a:headEnd type="none" w="med" len="med"/>
+                      <a:tailEnd type="none" w="med" len="med"/>
+                    </a:lnR>
+                    <a:lnT w="5080" cap="flat" cmpd="sng" algn="ctr">
+                      <a:solidFill>
+                        <a:srgbClr val="D1DDE8"/>
+                      </a:solidFill>
+                      <a:prstDash val="solid"/>
+                      <a:round/>
+                      <a:headEnd type="none" w="med" len="med"/>
+                      <a:tailEnd type="none" w="med" len="med"/>
+                    </a:lnT>
+                    <a:lnB w="5080" cap="flat" cmpd="sng" algn="ctr">
+                      <a:solidFill>
+                        <a:srgbClr val="D1DDE8"/>
+                      </a:solidFill>
+                      <a:prstDash val="solid"/>
+                      <a:round/>
+                      <a:headEnd type="none" w="med" len="med"/>
+                      <a:tailEnd type="none" w="med" len="med"/>
+                    </a:lnB>
+                    <a:solidFill>
+                      <a:srgbClr val="FFFFFF"/>
+                    </a:solidFill>
+                  </a:tcPr>
+                </a:tc>
+                <a:tc>
+                  <a:txBody>
+                    <a:bodyPr/>
+                    <a:lstStyle/>
+                    <a:p>
+                      <a:pPr marL="0" indent="0">
+                        <a:buNone/>
+                      </a:pPr>
+                      <a:r>
+                        <a:rPr lang="en-US" sz="850" b="1" dirty="0">
+                          <a:solidFill>
+                            <a:srgbClr val="1E293B"/>
+                          </a:solidFill>
+                          <a:latin typeface="Calibri" pitchFamily="34" charset="0"/>
+                          <a:ea typeface="Calibri" pitchFamily="34" charset="-122"/>
+                          <a:cs typeface="Calibri" pitchFamily="34" charset="-120"/>
+                        </a:rPr>
+                        <a:t>189752</a:t>
+                      </a:r>
+                      <a:endParaRPr lang="en-US" sz="850" dirty="0">
+                        <a:latin typeface="Calibri" charset="0"/>
+                        <a:ea typeface="Calibri" charset="0"/>
+                        <a:cs typeface="Calibri" charset="0"/>
+                      </a:endParaRPr>
+                    </a:p>
+                  </a:txBody>
+                  <a:tcPr>
+                    <a:lnL w="5080" cap="flat" cmpd="sng" algn="ctr">
+                      <a:solidFill>
+                        <a:srgbClr val="D1DDE8"/>
+                      </a:solidFill>
+                      <a:prstDash val="solid"/>
+                      <a:round/>
+                      <a:headEnd type="none" w="med" len="med"/>
+                      <a:tailEnd type="none" w="med" len="med"/>
+                    </a:lnL>
+                    <a:lnR w="5080" cap="flat" cmpd="sng" algn="ctr">
+                      <a:solidFill>
+                        <a:srgbClr val="D1DDE8"/>
+                      </a:solidFill>
+                      <a:prstDash val="solid"/>
+                      <a:round/>
+                      <a:headEnd type="none" w="med" len="med"/>
+                      <a:tailEnd type="none" w="med" len="med"/>
+                    </a:lnR>
+                    <a:lnT w="5080" cap="flat" cmpd="sng" algn="ctr">
+                      <a:solidFill>
+                        <a:srgbClr val="D1DDE8"/>
+                      </a:solidFill>
+                      <a:prstDash val="solid"/>
+                      <a:round/>
+                      <a:headEnd type="none" w="med" len="med"/>
+                      <a:tailEnd type="none" w="med" len="med"/>
+                    </a:lnT>
+                    <a:lnB w="5080" cap="flat" cmpd="sng" algn="ctr">
+                      <a:solidFill>
+                        <a:srgbClr val="D1DDE8"/>
+                      </a:solidFill>
+                      <a:prstDash val="solid"/>
+                      <a:round/>
+                      <a:headEnd type="none" w="med" len="med"/>
+                      <a:tailEnd type="none" w="med" len="med"/>
+                    </a:lnB>
+                    <a:solidFill>
+                      <a:srgbClr val="FFFFFF"/>
+                    </a:solidFill>
+                  </a:tcPr>
+                </a:tc>
+                <a:tc>
+                  <a:txBody>
+                    <a:bodyPr/>
+                    <a:lstStyle/>
+                    <a:p>
+                      <a:pPr marL="0" indent="0">
+                        <a:buNone/>
+                      </a:pPr>
+                      <a:r>
+                        <a:rPr lang="en-US" sz="850" dirty="0">
+                          <a:solidFill>
+                            <a:srgbClr val="1E293B"/>
+                          </a:solidFill>
+                          <a:latin typeface="Calibri" pitchFamily="34" charset="0"/>
+                          <a:ea typeface="Calibri" pitchFamily="34" charset="-122"/>
+                          <a:cs typeface="Calibri" pitchFamily="34" charset="-120"/>
+                        </a:rPr>
+                        <a:t>Essbio – PTAS Cabrero (membrana)</a:t>
+                      </a:r>
+                      <a:endParaRPr lang="en-US" sz="850" dirty="0">
+                        <a:latin typeface="Calibri" charset="0"/>
+                        <a:ea typeface="Calibri" charset="0"/>
+                        <a:cs typeface="Calibri" charset="0"/>
+                      </a:endParaRPr>
+                    </a:p>
+                  </a:txBody>
+                  <a:tcPr>
+                    <a:lnL w="5080" cap="flat" cmpd="sng" algn="ctr">
+                      <a:solidFill>
+                        <a:srgbClr val="D1DDE8"/>
+                      </a:solidFill>
+                      <a:prstDash val="solid"/>
+                      <a:round/>
+                      <a:headEnd type="none" w="med" len="med"/>
+                      <a:tailEnd type="none" w="med" len="med"/>
+                    </a:lnL>
+                    <a:lnR w="5080" cap="flat" cmpd="sng" algn="ctr">
+                      <a:solidFill>
+                        <a:srgbClr val="D1DDE8"/>
+                      </a:solidFill>
+                      <a:prstDash val="solid"/>
+                      <a:round/>
+                      <a:headEnd type="none" w="med" len="med"/>
+                      <a:tailEnd type="none" w="med" len="med"/>
+                    </a:lnR>
+                    <a:lnT w="5080" cap="flat" cmpd="sng" algn="ctr">
+                      <a:solidFill>
+                        <a:srgbClr val="D1DDE8"/>
+                      </a:solidFill>
+                      <a:prstDash val="solid"/>
+                      <a:round/>
+                      <a:headEnd type="none" w="med" len="med"/>
+                      <a:tailEnd type="none" w="med" len="med"/>
+                    </a:lnT>
+                    <a:lnB w="5080" cap="flat" cmpd="sng" algn="ctr">
+                      <a:solidFill>
+                        <a:srgbClr val="D1DDE8"/>
+                      </a:solidFill>
+                      <a:prstDash val="solid"/>
+                      <a:round/>
+                      <a:headEnd type="none" w="med" len="med"/>
+                      <a:tailEnd type="none" w="med" len="med"/>
+                    </a:lnB>
+                    <a:solidFill>
+                      <a:srgbClr val="FFFFFF"/>
+                    </a:solidFill>
+                  </a:tcPr>
+                </a:tc>
+                <a:tc>
+                  <a:txBody>
+                    <a:bodyPr/>
+                    <a:lstStyle/>
+                    <a:p>
+                      <a:pPr marL="0" indent="0" algn="ctr">
+                        <a:buNone/>
+                      </a:pPr>
+                      <a:r>
+                        <a:rPr lang="en-US" sz="850" dirty="0">
+                          <a:solidFill>
+                            <a:srgbClr val="64748B"/>
+                          </a:solidFill>
+                          <a:latin typeface="Calibri" pitchFamily="34" charset="0"/>
+                          <a:ea typeface="Calibri" pitchFamily="34" charset="-122"/>
+                          <a:cs typeface="Calibri" pitchFamily="34" charset="-120"/>
+                        </a:rPr>
+                        <a:t>UF</a:t>
+                      </a:r>
+                      <a:endParaRPr lang="en-US" sz="850" dirty="0">
+                        <a:latin typeface="Calibri" charset="0"/>
+                        <a:ea typeface="Calibri" charset="0"/>
+                        <a:cs typeface="Calibri" charset="0"/>
+                      </a:endParaRPr>
+                    </a:p>
+                  </a:txBody>
+                  <a:tcPr>
+                    <a:lnL w="5080" cap="flat" cmpd="sng" algn="ctr">
+                      <a:solidFill>
+                        <a:srgbClr val="D1DDE8"/>
+                      </a:solidFill>
+                      <a:prstDash val="solid"/>
+                      <a:round/>
+                      <a:headEnd type="none" w="med" len="med"/>
+                      <a:tailEnd type="none" w="med" len="med"/>
+                    </a:lnL>
+                    <a:lnR w="5080" cap="flat" cmpd="sng" algn="ctr">
+                      <a:solidFill>
+                        <a:srgbClr val="D1DDE8"/>
+                      </a:solidFill>
+                      <a:prstDash val="solid"/>
+                      <a:round/>
+                      <a:headEnd type="none" w="med" len="med"/>
+                      <a:tailEnd type="none" w="med" len="med"/>
+                    </a:lnR>
+                    <a:lnT w="5080" cap="flat" cmpd="sng" algn="ctr">
+                      <a:solidFill>
+                        <a:srgbClr val="D1DDE8"/>
+                      </a:solidFill>
+                      <a:prstDash val="solid"/>
+                      <a:round/>
+                      <a:headEnd type="none" w="med" len="med"/>
+                      <a:tailEnd type="none" w="med" len="med"/>
+                    </a:lnT>
+                    <a:lnB w="5080" cap="flat" cmpd="sng" algn="ctr">
+                      <a:solidFill>
+                        <a:srgbClr val="D1DDE8"/>
+                      </a:solidFill>
+                      <a:prstDash val="solid"/>
+                      <a:round/>
+                      <a:headEnd type="none" w="med" len="med"/>
+                      <a:tailEnd type="none" w="med" len="med"/>
+                    </a:lnB>
+                    <a:solidFill>
+                      <a:srgbClr val="FFFFFF"/>
+                    </a:solidFill>
+                  </a:tcPr>
+                </a:tc>
+                <a:tc>
+                  <a:txBody>
+                    <a:bodyPr/>
+                    <a:lstStyle/>
+                    <a:p>
+                      <a:pPr marL="0" indent="0" algn="ctr">
+                        <a:buNone/>
+                      </a:pPr>
+                      <a:r>
+                        <a:rPr lang="en-US" sz="900" b="1" dirty="0">
+                          <a:solidFill>
+                            <a:srgbClr val="1E293B"/>
+                          </a:solidFill>
+                          <a:latin typeface="Calibri" pitchFamily="34" charset="0"/>
+                          <a:ea typeface="Calibri" pitchFamily="34" charset="-122"/>
+                          <a:cs typeface="Calibri" pitchFamily="34" charset="-120"/>
+                        </a:rPr>
+                        <a:t>579</a:t>
+                      </a:r>
+                      <a:endParaRPr lang="en-US" sz="900" dirty="0">
+                        <a:latin typeface="Calibri" charset="0"/>
+                        <a:ea typeface="Calibri" charset="0"/>
+                        <a:cs typeface="Calibri" charset="0"/>
+                      </a:endParaRPr>
+                    </a:p>
+                  </a:txBody>
+                  <a:tcPr>
+                    <a:lnL w="5080" cap="flat" cmpd="sng" algn="ctr">
+                      <a:solidFill>
+                        <a:srgbClr val="D1DDE8"/>
+                      </a:solidFill>
+                      <a:prstDash val="solid"/>
+                      <a:round/>
+                      <a:headEnd type="none" w="med" len="med"/>
+                      <a:tailEnd type="none" w="med" len="med"/>
+                    </a:lnL>
+                    <a:lnR w="5080" cap="flat" cmpd="sng" algn="ctr">
+                      <a:solidFill>
+                        <a:srgbClr val="D1DDE8"/>
+                      </a:solidFill>
+                      <a:prstDash val="solid"/>
+                      <a:round/>
+                      <a:headEnd type="none" w="med" len="med"/>
+                      <a:tailEnd type="none" w="med" len="med"/>
+                    </a:lnR>
+                    <a:lnT w="5080" cap="flat" cmpd="sng" algn="ctr">
+                      <a:solidFill>
+                        <a:srgbClr val="D1DDE8"/>
+                      </a:solidFill>
+                      <a:prstDash val="solid"/>
+                      <a:round/>
+                      <a:headEnd type="none" w="med" len="med"/>
+                      <a:tailEnd type="none" w="med" len="med"/>
+                    </a:lnT>
+                    <a:lnB w="5080" cap="flat" cmpd="sng" algn="ctr">
+                      <a:solidFill>
+                        <a:srgbClr val="D1DDE8"/>
+                      </a:solidFill>
+                      <a:prstDash val="solid"/>
+                      <a:round/>
+                      <a:headEnd type="none" w="med" len="med"/>
+                      <a:tailEnd type="none" w="med" len="med"/>
+                    </a:lnB>
+                    <a:solidFill>
+                      <a:srgbClr val="FFFFFF"/>
+                    </a:solidFill>
+                  </a:tcPr>
+                </a:tc>
+                <a:tc>
+                  <a:txBody>
+                    <a:bodyPr/>
+                    <a:lstStyle/>
+                    <a:p>
+                      <a:pPr marL="0" indent="0" algn="ctr">
+                        <a:buNone/>
+                      </a:pPr>
+                      <a:r>
+                        <a:rPr lang="en-US" sz="900" b="1" dirty="0">
+                          <a:solidFill>
+                            <a:srgbClr val="065F46"/>
+                          </a:solidFill>
+                          <a:latin typeface="Calibri" pitchFamily="34" charset="0"/>
+                          <a:ea typeface="Calibri" pitchFamily="34" charset="-122"/>
+                          <a:cs typeface="Calibri" pitchFamily="34" charset="-120"/>
+                        </a:rPr>
+                        <a:t>100%</a:t>
+                      </a:r>
+                      <a:endParaRPr lang="en-US" sz="900" dirty="0">
+                        <a:latin typeface="Calibri" charset="0"/>
+                        <a:ea typeface="Calibri" charset="0"/>
+                        <a:cs typeface="Calibri" charset="0"/>
+                      </a:endParaRPr>
+                    </a:p>
+                  </a:txBody>
+                  <a:tcPr>
+                    <a:lnL w="5080" cap="flat" cmpd="sng" algn="ctr">
+                      <a:solidFill>
+                        <a:srgbClr val="D1DDE8"/>
+                      </a:solidFill>
+                      <a:prstDash val="solid"/>
+                      <a:round/>
+                      <a:headEnd type="none" w="med" len="med"/>
+                      <a:tailEnd type="none" w="med" len="med"/>
+                    </a:lnL>
+                    <a:lnR w="5080" cap="flat" cmpd="sng" algn="ctr">
+                      <a:solidFill>
+                        <a:srgbClr val="D1DDE8"/>
+                      </a:solidFill>
+                      <a:prstDash val="solid"/>
+                      <a:round/>
+                      <a:headEnd type="none" w="med" len="med"/>
+                      <a:tailEnd type="none" w="med" len="med"/>
+                    </a:lnR>
+                    <a:lnT w="5080" cap="flat" cmpd="sng" algn="ctr">
+                      <a:solidFill>
+                        <a:srgbClr val="D1DDE8"/>
+                      </a:solidFill>
+                      <a:prstDash val="solid"/>
+                      <a:round/>
+                      <a:headEnd type="none" w="med" len="med"/>
+                      <a:tailEnd type="none" w="med" len="med"/>
+                    </a:lnT>
+                    <a:lnB w="5080" cap="flat" cmpd="sng" algn="ctr">
+                      <a:solidFill>
+                        <a:srgbClr val="D1DDE8"/>
+                      </a:solidFill>
+                      <a:prstDash val="solid"/>
+                      <a:round/>
+                      <a:headEnd type="none" w="med" len="med"/>
+                      <a:tailEnd type="none" w="med" len="med"/>
+                    </a:lnB>
+                    <a:solidFill>
+                      <a:srgbClr val="FFFFFF"/>
+                    </a:solidFill>
+                  </a:tcPr>
+                </a:tc>
+                <a:tc>
+                  <a:txBody>
+                    <a:bodyPr/>
+                    <a:lstStyle/>
+                    <a:p>
+                      <a:pPr marL="0" indent="0">
+                        <a:buNone/>
+                      </a:pPr>
+                      <a:r>
+                        <a:rPr lang="en-US" sz="750" i="1" dirty="0">
+                          <a:solidFill>
+                            <a:srgbClr val="64748B"/>
+                          </a:solidFill>
+                          <a:latin typeface="Calibri" pitchFamily="34" charset="0"/>
+                          <a:ea typeface="Calibri" pitchFamily="34" charset="-122"/>
+                          <a:cs typeface="Calibri" pitchFamily="34" charset="-120"/>
+                        </a:rPr>
+                        <a:t>Informe intermedio en proceso</a:t>
+                      </a:r>
+                      <a:endParaRPr lang="en-US" sz="750" dirty="0">
+                        <a:latin typeface="Calibri" charset="0"/>
+                        <a:ea typeface="Calibri" charset="0"/>
+                        <a:cs typeface="Calibri" charset="0"/>
+                      </a:endParaRPr>
+                    </a:p>
+                  </a:txBody>
+                  <a:tcPr>
+                    <a:lnL w="5080" cap="flat" cmpd="sng" algn="ctr">
+                      <a:solidFill>
+                        <a:srgbClr val="D1DDE8"/>
+                      </a:solidFill>
+                      <a:prstDash val="solid"/>
+                      <a:round/>
+                      <a:headEnd type="none" w="med" len="med"/>
+                      <a:tailEnd type="none" w="med" len="med"/>
+                    </a:lnL>
+                    <a:lnR w="5080" cap="flat" cmpd="sng" algn="ctr">
+                      <a:solidFill>
+                        <a:srgbClr val="D1DDE8"/>
+                      </a:solidFill>
+                      <a:prstDash val="solid"/>
+                      <a:round/>
+                      <a:headEnd type="none" w="med" len="med"/>
+                      <a:tailEnd type="none" w="med" len="med"/>
+                    </a:lnR>
+                    <a:lnT w="5080" cap="flat" cmpd="sng" algn="ctr">
+                      <a:solidFill>
+                        <a:srgbClr val="D1DDE8"/>
+                      </a:solidFill>
+                      <a:prstDash val="solid"/>
+                      <a:round/>
+                      <a:headEnd type="none" w="med" len="med"/>
+                      <a:tailEnd type="none" w="med" len="med"/>
+                    </a:lnT>
+                    <a:lnB w="5080" cap="flat" cmpd="sng" algn="ctr">
+                      <a:solidFill>
+                        <a:srgbClr val="D1DDE8"/>
+                      </a:solidFill>
+                      <a:prstDash val="solid"/>
+                      <a:round/>
+                      <a:headEnd type="none" w="med" len="med"/>
+                      <a:tailEnd type="none" w="med" len="med"/>
+                    </a:lnB>
+                    <a:solidFill>
+                      <a:srgbClr val="FFFFFF"/>
+                    </a:solidFill>
+                  </a:tcPr>
+                </a:tc>
+                <a:extLst>
+                  <a:ext uri="{0D108BD9-81ED-4DB2-BD59-A6C34878D82A}">
+                    <a16:rowId xmlns:a16="http://schemas.microsoft.com/office/drawing/2014/main" val="10008"/>
+                  </a:ext>
+                </a:extLst>
+              </a:tr>
+              <a:tr h="301752">
+                <a:tc>
+                  <a:txBody>
+                    <a:bodyPr/>
+                    <a:lstStyle/>
+                    <a:p>
+                      <a:pPr marL="0" indent="0" algn="ctr">
+                        <a:buNone/>
+                      </a:pPr>
+                      <a:r>
+                        <a:rPr lang="en-US" sz="850" dirty="0">
+                          <a:solidFill>
+                            <a:srgbClr val="1E293B"/>
+                          </a:solidFill>
+                          <a:latin typeface="Calibri" pitchFamily="34" charset="0"/>
+                          <a:ea typeface="Calibri" pitchFamily="34" charset="-122"/>
+                          <a:cs typeface="Calibri" pitchFamily="34" charset="-120"/>
+                        </a:rPr>
+                        <a:t>9</a:t>
+                      </a:r>
+                      <a:endParaRPr lang="en-US" sz="850" dirty="0">
+                        <a:latin typeface="Calibri" charset="0"/>
+                        <a:ea typeface="Calibri" charset="0"/>
+                        <a:cs typeface="Calibri" charset="0"/>
+                      </a:endParaRPr>
+                    </a:p>
+                  </a:txBody>
+                  <a:tcPr>
+                    <a:lnL w="5080" cap="flat" cmpd="sng" algn="ctr">
+                      <a:solidFill>
+                        <a:srgbClr val="D1DDE8"/>
+                      </a:solidFill>
+                      <a:prstDash val="solid"/>
+                      <a:round/>
+                      <a:headEnd type="none" w="med" len="med"/>
+                      <a:tailEnd type="none" w="med" len="med"/>
+                    </a:lnL>
+                    <a:lnR w="5080" cap="flat" cmpd="sng" algn="ctr">
+                      <a:solidFill>
+                        <a:srgbClr val="D1DDE8"/>
+                      </a:solidFill>
+                      <a:prstDash val="solid"/>
+                      <a:round/>
+                      <a:headEnd type="none" w="med" len="med"/>
+                      <a:tailEnd type="none" w="med" len="med"/>
+                    </a:lnR>
+                    <a:lnT w="5080" cap="flat" cmpd="sng" algn="ctr">
+                      <a:solidFill>
+                        <a:srgbClr val="D1DDE8"/>
+                      </a:solidFill>
+                      <a:prstDash val="solid"/>
+                      <a:round/>
+                      <a:headEnd type="none" w="med" len="med"/>
+                      <a:tailEnd type="none" w="med" len="med"/>
+                    </a:lnT>
+                    <a:lnB w="5080" cap="flat" cmpd="sng" algn="ctr">
+                      <a:solidFill>
+                        <a:srgbClr val="D1DDE8"/>
+                      </a:solidFill>
+                      <a:prstDash val="solid"/>
+                      <a:round/>
+                      <a:headEnd type="none" w="med" len="med"/>
+                      <a:tailEnd type="none" w="med" len="med"/>
+                    </a:lnB>
+                    <a:solidFill>
+                      <a:srgbClr val="FFFFFF"/>
+                    </a:solidFill>
+                  </a:tcPr>
+                </a:tc>
+                <a:tc>
+                  <a:txBody>
+                    <a:bodyPr/>
+                    <a:lstStyle/>
+                    <a:p>
+                      <a:pPr marL="0" indent="0">
+                        <a:buNone/>
+                      </a:pPr>
+                      <a:r>
+                        <a:rPr lang="en-US" sz="850" b="1" dirty="0">
+                          <a:solidFill>
+                            <a:srgbClr val="1E293B"/>
+                          </a:solidFill>
+                          <a:latin typeface="Calibri" pitchFamily="34" charset="0"/>
+                          <a:ea typeface="Calibri" pitchFamily="34" charset="-122"/>
+                          <a:cs typeface="Calibri" pitchFamily="34" charset="-120"/>
+                        </a:rPr>
+                        <a:t>198260</a:t>
+                      </a:r>
+                      <a:endParaRPr lang="en-US" sz="850" dirty="0">
+                        <a:latin typeface="Calibri" charset="0"/>
+                        <a:ea typeface="Calibri" charset="0"/>
+                        <a:cs typeface="Calibri" charset="0"/>
+                      </a:endParaRPr>
+                    </a:p>
+                  </a:txBody>
+                  <a:tcPr>
+                    <a:lnL w="5080" cap="flat" cmpd="sng" algn="ctr">
+                      <a:solidFill>
+                        <a:srgbClr val="D1DDE8"/>
+                      </a:solidFill>
+                      <a:prstDash val="solid"/>
+                      <a:round/>
+                      <a:headEnd type="none" w="med" len="med"/>
+                      <a:tailEnd type="none" w="med" len="med"/>
+                    </a:lnL>
+                    <a:lnR w="5080" cap="flat" cmpd="sng" algn="ctr">
+                      <a:solidFill>
+                        <a:srgbClr val="D1DDE8"/>
+                      </a:solidFill>
+                      <a:prstDash val="solid"/>
+                      <a:round/>
+                      <a:headEnd type="none" w="med" len="med"/>
+                      <a:tailEnd type="none" w="med" len="med"/>
+                    </a:lnR>
+                    <a:lnT w="5080" cap="flat" cmpd="sng" algn="ctr">
+                      <a:solidFill>
+                        <a:srgbClr val="D1DDE8"/>
+                      </a:solidFill>
+                      <a:prstDash val="solid"/>
+                      <a:round/>
+                      <a:headEnd type="none" w="med" len="med"/>
+                      <a:tailEnd type="none" w="med" len="med"/>
+                    </a:lnT>
+                    <a:lnB w="5080" cap="flat" cmpd="sng" algn="ctr">
+                      <a:solidFill>
+                        <a:srgbClr val="D1DDE8"/>
+                      </a:solidFill>
+                      <a:prstDash val="solid"/>
+                      <a:round/>
+                      <a:headEnd type="none" w="med" len="med"/>
+                      <a:tailEnd type="none" w="med" len="med"/>
+                    </a:lnB>
+                    <a:solidFill>
+                      <a:srgbClr val="FFFFFF"/>
+                    </a:solidFill>
+                  </a:tcPr>
+                </a:tc>
+                <a:tc>
+                  <a:txBody>
+                    <a:bodyPr/>
+                    <a:lstStyle/>
+                    <a:p>
+                      <a:pPr marL="0" indent="0">
+                        <a:buNone/>
+                      </a:pPr>
+                      <a:r>
+                        <a:rPr lang="en-US" sz="850" dirty="0">
+                          <a:solidFill>
+                            <a:srgbClr val="1E293B"/>
+                          </a:solidFill>
+                          <a:latin typeface="Calibri" pitchFamily="34" charset="0"/>
+                          <a:ea typeface="Calibri" pitchFamily="34" charset="-122"/>
+                          <a:cs typeface="Calibri" pitchFamily="34" charset="-120"/>
+                        </a:rPr>
+                        <a:t>Essbio – Temporal Viento ago-2024</a:t>
+                      </a:r>
+                      <a:endParaRPr lang="en-US" sz="850" dirty="0">
+                        <a:latin typeface="Calibri" charset="0"/>
+                        <a:ea typeface="Calibri" charset="0"/>
+                        <a:cs typeface="Calibri" charset="0"/>
+                      </a:endParaRPr>
+                    </a:p>
+                  </a:txBody>
+                  <a:tcPr>
+                    <a:lnL w="5080" cap="flat" cmpd="sng" algn="ctr">
+                      <a:solidFill>
+                        <a:srgbClr val="D1DDE8"/>
+                      </a:solidFill>
+                      <a:prstDash val="solid"/>
+                      <a:round/>
+                      <a:headEnd type="none" w="med" len="med"/>
+                      <a:tailEnd type="none" w="med" len="med"/>
+                    </a:lnL>
+                    <a:lnR w="5080" cap="flat" cmpd="sng" algn="ctr">
+                      <a:solidFill>
+                        <a:srgbClr val="D1DDE8"/>
+                      </a:solidFill>
+                      <a:prstDash val="solid"/>
+                      <a:round/>
+                      <a:headEnd type="none" w="med" len="med"/>
+                      <a:tailEnd type="none" w="med" len="med"/>
+                    </a:lnR>
+                    <a:lnT w="5080" cap="flat" cmpd="sng" algn="ctr">
+                      <a:solidFill>
+                        <a:srgbClr val="D1DDE8"/>
+                      </a:solidFill>
+                      <a:prstDash val="solid"/>
+                      <a:round/>
+                      <a:headEnd type="none" w="med" len="med"/>
+                      <a:tailEnd type="none" w="med" len="med"/>
+                    </a:lnT>
+                    <a:lnB w="5080" cap="flat" cmpd="sng" algn="ctr">
+                      <a:solidFill>
+                        <a:srgbClr val="D1DDE8"/>
+                      </a:solidFill>
+                      <a:prstDash val="solid"/>
+                      <a:round/>
+                      <a:headEnd type="none" w="med" len="med"/>
+                      <a:tailEnd type="none" w="med" len="med"/>
+                    </a:lnB>
+                    <a:solidFill>
+                      <a:srgbClr val="FFFFFF"/>
+                    </a:solidFill>
+                  </a:tcPr>
+                </a:tc>
+                <a:tc>
+                  <a:txBody>
+                    <a:bodyPr/>
+                    <a:lstStyle/>
+                    <a:p>
+                      <a:pPr marL="0" indent="0" algn="ctr">
+                        <a:buNone/>
+                      </a:pPr>
+                      <a:r>
+                        <a:rPr lang="en-US" sz="850" dirty="0">
+                          <a:solidFill>
+                            <a:srgbClr val="64748B"/>
+                          </a:solidFill>
+                          <a:latin typeface="Calibri" pitchFamily="34" charset="0"/>
+                          <a:ea typeface="Calibri" pitchFamily="34" charset="-122"/>
+                          <a:cs typeface="Calibri" pitchFamily="34" charset="-120"/>
+                        </a:rPr>
+                        <a:t>UF</a:t>
+                      </a:r>
+                      <a:endParaRPr lang="en-US" sz="850" dirty="0">
+                        <a:latin typeface="Calibri" charset="0"/>
+                        <a:ea typeface="Calibri" charset="0"/>
+                        <a:cs typeface="Calibri" charset="0"/>
+                      </a:endParaRPr>
+                    </a:p>
+                  </a:txBody>
+                  <a:tcPr>
+                    <a:lnL w="5080" cap="flat" cmpd="sng" algn="ctr">
+                      <a:solidFill>
+                        <a:srgbClr val="D1DDE8"/>
+                      </a:solidFill>
+                      <a:prstDash val="solid"/>
+                      <a:round/>
+                      <a:headEnd type="none" w="med" len="med"/>
+                      <a:tailEnd type="none" w="med" len="med"/>
+                    </a:lnL>
+                    <a:lnR w="5080" cap="flat" cmpd="sng" algn="ctr">
+                      <a:solidFill>
+                        <a:srgbClr val="D1DDE8"/>
+                      </a:solidFill>
+                      <a:prstDash val="solid"/>
+                      <a:round/>
+                      <a:headEnd type="none" w="med" len="med"/>
+                      <a:tailEnd type="none" w="med" len="med"/>
+                    </a:lnR>
+                    <a:lnT w="5080" cap="flat" cmpd="sng" algn="ctr">
+                      <a:solidFill>
+                        <a:srgbClr val="D1DDE8"/>
+                      </a:solidFill>
+                      <a:prstDash val="solid"/>
+                      <a:round/>
+                      <a:headEnd type="none" w="med" len="med"/>
+                      <a:tailEnd type="none" w="med" len="med"/>
+                    </a:lnT>
+                    <a:lnB w="5080" cap="flat" cmpd="sng" algn="ctr">
+                      <a:solidFill>
+                        <a:srgbClr val="D1DDE8"/>
+                      </a:solidFill>
+                      <a:prstDash val="solid"/>
+                      <a:round/>
+                      <a:headEnd type="none" w="med" len="med"/>
+                      <a:tailEnd type="none" w="med" len="med"/>
+                    </a:lnB>
+                    <a:solidFill>
+                      <a:srgbClr val="FFFFFF"/>
+                    </a:solidFill>
+                  </a:tcPr>
+                </a:tc>
+                <a:tc>
+                  <a:txBody>
+                    <a:bodyPr/>
+                    <a:lstStyle/>
+                    <a:p>
+                      <a:pPr marL="0" indent="0" algn="ctr">
+                        <a:buNone/>
+                      </a:pPr>
+                      <a:r>
+                        <a:rPr lang="en-US" sz="900" b="1" dirty="0">
+                          <a:solidFill>
+                            <a:srgbClr val="1E293B"/>
+                          </a:solidFill>
+                          <a:latin typeface="Calibri" pitchFamily="34" charset="0"/>
+                          <a:ea typeface="Calibri" pitchFamily="34" charset="-122"/>
+                          <a:cs typeface="Calibri" pitchFamily="34" charset="-120"/>
+                        </a:rPr>
+                        <a:t>437</a:t>
+                      </a:r>
+                      <a:endParaRPr lang="en-US" sz="900" dirty="0">
+                        <a:latin typeface="Calibri" charset="0"/>
+                        <a:ea typeface="Calibri" charset="0"/>
+                        <a:cs typeface="Calibri" charset="0"/>
+                      </a:endParaRPr>
+                    </a:p>
+                  </a:txBody>
+                  <a:tcPr>
+                    <a:lnL w="5080" cap="flat" cmpd="sng" algn="ctr">
+                      <a:solidFill>
+                        <a:srgbClr val="D1DDE8"/>
+                      </a:solidFill>
+                      <a:prstDash val="solid"/>
+                      <a:round/>
+                      <a:headEnd type="none" w="med" len="med"/>
+                      <a:tailEnd type="none" w="med" len="med"/>
+                    </a:lnL>
+                    <a:lnR w="5080" cap="flat" cmpd="sng" algn="ctr">
+                      <a:solidFill>
+                        <a:srgbClr val="D1DDE8"/>
+                      </a:solidFill>
+                      <a:prstDash val="solid"/>
+                      <a:round/>
+                      <a:headEnd type="none" w="med" len="med"/>
+                      <a:tailEnd type="none" w="med" len="med"/>
+                    </a:lnR>
+                    <a:lnT w="5080" cap="flat" cmpd="sng" algn="ctr">
+                      <a:solidFill>
+                        <a:srgbClr val="D1DDE8"/>
+                      </a:solidFill>
+                      <a:prstDash val="solid"/>
+                      <a:round/>
+                      <a:headEnd type="none" w="med" len="med"/>
+                      <a:tailEnd type="none" w="med" len="med"/>
+                    </a:lnT>
+                    <a:lnB w="5080" cap="flat" cmpd="sng" algn="ctr">
+                      <a:solidFill>
+                        <a:srgbClr val="D1DDE8"/>
+                      </a:solidFill>
+                      <a:prstDash val="solid"/>
+                      <a:round/>
+                      <a:headEnd type="none" w="med" len="med"/>
+                      <a:tailEnd type="none" w="med" len="med"/>
+                    </a:lnB>
+                    <a:solidFill>
+                      <a:srgbClr val="FFFFFF"/>
+                    </a:solidFill>
+                  </a:tcPr>
+                </a:tc>
+                <a:tc>
+                  <a:txBody>
+                    <a:bodyPr/>
+                    <a:lstStyle/>
+                    <a:p>
+                      <a:pPr marL="0" indent="0" algn="ctr">
+                        <a:buNone/>
+                      </a:pPr>
+                      <a:r>
+                        <a:rPr lang="en-US" sz="900" b="1" dirty="0">
+                          <a:solidFill>
+                            <a:srgbClr val="065F46"/>
+                          </a:solidFill>
+                          <a:latin typeface="Calibri" pitchFamily="34" charset="0"/>
+                          <a:ea typeface="Calibri" pitchFamily="34" charset="-122"/>
+                          <a:cs typeface="Calibri" pitchFamily="34" charset="-120"/>
+                        </a:rPr>
+                        <a:t>100%</a:t>
+                      </a:r>
+                      <a:endParaRPr lang="en-US" sz="900" dirty="0">
+                        <a:latin typeface="Calibri" charset="0"/>
+                        <a:ea typeface="Calibri" charset="0"/>
+                        <a:cs typeface="Calibri" charset="0"/>
+                      </a:endParaRPr>
+                    </a:p>
+                  </a:txBody>
+                  <a:tcPr>
+                    <a:lnL w="5080" cap="flat" cmpd="sng" algn="ctr">
+                      <a:solidFill>
+                        <a:srgbClr val="D1DDE8"/>
+                      </a:solidFill>
+                      <a:prstDash val="solid"/>
+                      <a:round/>
+                      <a:headEnd type="none" w="med" len="med"/>
+                      <a:tailEnd type="none" w="med" len="med"/>
+                    </a:lnL>
+                    <a:lnR w="5080" cap="flat" cmpd="sng" algn="ctr">
+                      <a:solidFill>
+                        <a:srgbClr val="D1DDE8"/>
+                      </a:solidFill>
+                      <a:prstDash val="solid"/>
+                      <a:round/>
+                      <a:headEnd type="none" w="med" len="med"/>
+                      <a:tailEnd type="none" w="med" len="med"/>
+                    </a:lnR>
+                    <a:lnT w="5080" cap="flat" cmpd="sng" algn="ctr">
+                      <a:solidFill>
+                        <a:srgbClr val="D1DDE8"/>
+                      </a:solidFill>
+                      <a:prstDash val="solid"/>
+                      <a:round/>
+                      <a:headEnd type="none" w="med" len="med"/>
+                      <a:tailEnd type="none" w="med" len="med"/>
+                    </a:lnT>
+                    <a:lnB w="5080" cap="flat" cmpd="sng" algn="ctr">
+                      <a:solidFill>
+                        <a:srgbClr val="D1DDE8"/>
+                      </a:solidFill>
+                      <a:prstDash val="solid"/>
+                      <a:round/>
+                      <a:headEnd type="none" w="med" len="med"/>
+                      <a:tailEnd type="none" w="med" len="med"/>
+                    </a:lnB>
+                    <a:solidFill>
+                      <a:srgbClr val="FFFFFF"/>
+                    </a:solidFill>
+                  </a:tcPr>
+                </a:tc>
+                <a:tc>
+                  <a:txBody>
+                    <a:bodyPr/>
+                    <a:lstStyle/>
+                    <a:p>
+                      <a:pPr marL="0" indent="0">
+                        <a:buNone/>
+                      </a:pPr>
+                      <a:r>
+                        <a:rPr lang="en-US" sz="750" i="1" dirty="0">
+                          <a:solidFill>
+                            <a:srgbClr val="64748B"/>
+                          </a:solidFill>
+                          <a:latin typeface="Calibri" pitchFamily="34" charset="0"/>
+                          <a:ea typeface="Calibri" pitchFamily="34" charset="-122"/>
+                          <a:cs typeface="Calibri" pitchFamily="34" charset="-120"/>
+                        </a:rPr>
+                        <a:t>Espera </a:t>
+                      </a:r>
+                      <a:r>
+                        <a:rPr lang="en-US" sz="750" i="1" dirty="0" err="1">
+                          <a:solidFill>
+                            <a:srgbClr val="64748B"/>
+                          </a:solidFill>
+                          <a:latin typeface="Calibri" pitchFamily="34" charset="0"/>
+                          <a:ea typeface="Calibri" pitchFamily="34" charset="-122"/>
+                          <a:cs typeface="Calibri" pitchFamily="34" charset="-120"/>
+                        </a:rPr>
+                        <a:t>aprobac</a:t>
+                      </a:r>
+                      <a:r>
+                        <a:rPr lang="en-US" sz="750" i="1" dirty="0">
+                          <a:solidFill>
+                            <a:srgbClr val="64748B"/>
+                          </a:solidFill>
+                          <a:latin typeface="Calibri" pitchFamily="34" charset="0"/>
+                          <a:ea typeface="Calibri" pitchFamily="34" charset="-122"/>
+                          <a:cs typeface="Calibri" pitchFamily="34" charset="-120"/>
+                        </a:rPr>
+                        <a:t> </a:t>
+                      </a:r>
+                      <a:r>
+                        <a:rPr lang="en-US" sz="750" i="1" dirty="0" err="1">
+                          <a:solidFill>
+                            <a:srgbClr val="64748B"/>
+                          </a:solidFill>
+                          <a:latin typeface="Calibri" pitchFamily="34" charset="0"/>
+                          <a:ea typeface="Calibri" pitchFamily="34" charset="-122"/>
+                          <a:cs typeface="Calibri" pitchFamily="34" charset="-120"/>
+                        </a:rPr>
+                        <a:t>ajuste</a:t>
+                      </a:r>
+                      <a:r>
+                        <a:rPr lang="en-US" sz="750" i="1" dirty="0">
+                          <a:solidFill>
+                            <a:srgbClr val="64748B"/>
+                          </a:solidFill>
+                          <a:latin typeface="Calibri" pitchFamily="34" charset="0"/>
+                          <a:ea typeface="Calibri" pitchFamily="34" charset="-122"/>
+                          <a:cs typeface="Calibri" pitchFamily="34" charset="-120"/>
+                        </a:rPr>
+                        <a:t> </a:t>
+                      </a:r>
+                      <a:r>
+                        <a:rPr lang="en-US" sz="750" i="1" dirty="0" err="1">
+                          <a:solidFill>
+                            <a:srgbClr val="64748B"/>
+                          </a:solidFill>
+                          <a:latin typeface="Calibri" pitchFamily="34" charset="0"/>
+                          <a:ea typeface="Calibri" pitchFamily="34" charset="-122"/>
+                          <a:cs typeface="Calibri" pitchFamily="34" charset="-120"/>
+                        </a:rPr>
+                        <a:t>enviado</a:t>
+                      </a:r>
+                      <a:r>
+                        <a:rPr lang="en-US" sz="750" i="1" dirty="0">
+                          <a:solidFill>
+                            <a:srgbClr val="64748B"/>
+                          </a:solidFill>
+                          <a:latin typeface="Calibri" pitchFamily="34" charset="0"/>
+                          <a:ea typeface="Calibri" pitchFamily="34" charset="-122"/>
+                          <a:cs typeface="Calibri" pitchFamily="34" charset="-120"/>
+                        </a:rPr>
+                        <a:t> 06/02/26 y/o </a:t>
+                      </a:r>
+                      <a:r>
+                        <a:rPr lang="en-US" sz="750" i="1" dirty="0" err="1">
+                          <a:solidFill>
+                            <a:srgbClr val="64748B"/>
+                          </a:solidFill>
+                          <a:latin typeface="Calibri" pitchFamily="34" charset="0"/>
+                          <a:ea typeface="Calibri" pitchFamily="34" charset="-122"/>
+                          <a:cs typeface="Calibri" pitchFamily="34" charset="-120"/>
+                        </a:rPr>
+                        <a:t>nuevas</a:t>
+                      </a:r>
+                      <a:r>
+                        <a:rPr lang="en-US" sz="750" i="1" dirty="0">
+                          <a:solidFill>
+                            <a:srgbClr val="64748B"/>
+                          </a:solidFill>
+                          <a:latin typeface="Calibri" pitchFamily="34" charset="0"/>
+                          <a:ea typeface="Calibri" pitchFamily="34" charset="-122"/>
+                          <a:cs typeface="Calibri" pitchFamily="34" charset="-120"/>
+                        </a:rPr>
+                        <a:t> </a:t>
+                      </a:r>
+                      <a:r>
+                        <a:rPr lang="en-US" sz="750" i="1" dirty="0" err="1">
+                          <a:solidFill>
+                            <a:srgbClr val="64748B"/>
+                          </a:solidFill>
+                          <a:latin typeface="Calibri" pitchFamily="34" charset="0"/>
+                          <a:ea typeface="Calibri" pitchFamily="34" charset="-122"/>
+                          <a:cs typeface="Calibri" pitchFamily="34" charset="-120"/>
+                        </a:rPr>
+                        <a:t>reclamaciones</a:t>
+                      </a:r>
+                      <a:endParaRPr lang="en-US" sz="750" dirty="0">
+                        <a:latin typeface="Calibri" charset="0"/>
+                        <a:ea typeface="Calibri" charset="0"/>
+                        <a:cs typeface="Calibri" charset="0"/>
+                      </a:endParaRPr>
+                    </a:p>
+                  </a:txBody>
+                  <a:tcPr>
+                    <a:lnL w="5080" cap="flat" cmpd="sng" algn="ctr">
+                      <a:solidFill>
+                        <a:srgbClr val="D1DDE8"/>
+                      </a:solidFill>
+                      <a:prstDash val="solid"/>
+                      <a:round/>
+                      <a:headEnd type="none" w="med" len="med"/>
+                      <a:tailEnd type="none" w="med" len="med"/>
+                    </a:lnL>
+                    <a:lnR w="5080" cap="flat" cmpd="sng" algn="ctr">
+                      <a:solidFill>
+                        <a:srgbClr val="D1DDE8"/>
+                      </a:solidFill>
+                      <a:prstDash val="solid"/>
+                      <a:round/>
+                      <a:headEnd type="none" w="med" len="med"/>
+                      <a:tailEnd type="none" w="med" len="med"/>
+                    </a:lnR>
+                    <a:lnT w="5080" cap="flat" cmpd="sng" algn="ctr">
+                      <a:solidFill>
+                        <a:srgbClr val="D1DDE8"/>
+                      </a:solidFill>
+                      <a:prstDash val="solid"/>
+                      <a:round/>
+                      <a:headEnd type="none" w="med" len="med"/>
+                      <a:tailEnd type="none" w="med" len="med"/>
+                    </a:lnT>
+                    <a:lnB w="5080" cap="flat" cmpd="sng" algn="ctr">
+                      <a:solidFill>
+                        <a:srgbClr val="D1DDE8"/>
+                      </a:solidFill>
+                      <a:prstDash val="solid"/>
+                      <a:round/>
+                      <a:headEnd type="none" w="med" len="med"/>
+                      <a:tailEnd type="none" w="med" len="med"/>
+                    </a:lnB>
+                    <a:solidFill>
+                      <a:srgbClr val="FFFFFF"/>
+                    </a:solidFill>
+                  </a:tcPr>
+                </a:tc>
+                <a:extLst>
+                  <a:ext uri="{0D108BD9-81ED-4DB2-BD59-A6C34878D82A}">
+                    <a16:rowId xmlns:a16="http://schemas.microsoft.com/office/drawing/2014/main" val="10009"/>
+                  </a:ext>
+                </a:extLst>
+              </a:tr>
+              <a:tr h="301752">
+                <a:tc>
+                  <a:txBody>
+                    <a:bodyPr/>
+                    <a:lstStyle/>
+                    <a:p>
+                      <a:pPr marL="0" indent="0" algn="ctr">
+                        <a:buNone/>
+                      </a:pPr>
+                      <a:r>
+                        <a:rPr lang="en-US" sz="850" dirty="0">
+                          <a:solidFill>
+                            <a:srgbClr val="1E293B"/>
+                          </a:solidFill>
+                          <a:latin typeface="Calibri" pitchFamily="34" charset="0"/>
+                          <a:ea typeface="Calibri" pitchFamily="34" charset="-122"/>
+                          <a:cs typeface="Calibri" pitchFamily="34" charset="-120"/>
+                        </a:rPr>
+                        <a:t>10</a:t>
+                      </a:r>
+                      <a:endParaRPr lang="en-US" sz="850" dirty="0">
+                        <a:latin typeface="Calibri" charset="0"/>
+                        <a:ea typeface="Calibri" charset="0"/>
+                        <a:cs typeface="Calibri" charset="0"/>
+                      </a:endParaRPr>
+                    </a:p>
+                  </a:txBody>
+                  <a:tcPr>
+                    <a:lnL w="5080" cap="flat" cmpd="sng" algn="ctr">
+                      <a:solidFill>
+                        <a:srgbClr val="D1DDE8"/>
+                      </a:solidFill>
+                      <a:prstDash val="solid"/>
+                      <a:round/>
+                      <a:headEnd type="none" w="med" len="med"/>
+                      <a:tailEnd type="none" w="med" len="med"/>
+                    </a:lnL>
+                    <a:lnR w="5080" cap="flat" cmpd="sng" algn="ctr">
+                      <a:solidFill>
+                        <a:srgbClr val="D1DDE8"/>
+                      </a:solidFill>
+                      <a:prstDash val="solid"/>
+                      <a:round/>
+                      <a:headEnd type="none" w="med" len="med"/>
+                      <a:tailEnd type="none" w="med" len="med"/>
+                    </a:lnR>
+                    <a:lnT w="5080" cap="flat" cmpd="sng" algn="ctr">
+                      <a:solidFill>
+                        <a:srgbClr val="D1DDE8"/>
+                      </a:solidFill>
+                      <a:prstDash val="solid"/>
+                      <a:round/>
+                      <a:headEnd type="none" w="med" len="med"/>
+                      <a:tailEnd type="none" w="med" len="med"/>
+                    </a:lnT>
+                    <a:lnB w="5080" cap="flat" cmpd="sng" algn="ctr">
+                      <a:solidFill>
+                        <a:srgbClr val="D1DDE8"/>
+                      </a:solidFill>
+                      <a:prstDash val="solid"/>
+                      <a:round/>
+                      <a:headEnd type="none" w="med" len="med"/>
+                      <a:tailEnd type="none" w="med" len="med"/>
+                    </a:lnB>
+                    <a:solidFill>
+                      <a:srgbClr val="FFFFFF"/>
+                    </a:solidFill>
+                  </a:tcPr>
+                </a:tc>
+                <a:tc>
+                  <a:txBody>
+                    <a:bodyPr/>
+                    <a:lstStyle/>
+                    <a:p>
+                      <a:pPr marL="0" indent="0">
+                        <a:buNone/>
+                      </a:pPr>
+                      <a:r>
+                        <a:rPr lang="en-US" sz="850" b="1" dirty="0">
+                          <a:solidFill>
+                            <a:srgbClr val="1E293B"/>
+                          </a:solidFill>
+                          <a:latin typeface="Calibri" pitchFamily="34" charset="0"/>
+                          <a:ea typeface="Calibri" pitchFamily="34" charset="-122"/>
+                          <a:cs typeface="Calibri" pitchFamily="34" charset="-120"/>
+                        </a:rPr>
+                        <a:t>200832</a:t>
+                      </a:r>
+                      <a:endParaRPr lang="en-US" sz="850" dirty="0">
+                        <a:latin typeface="Calibri" charset="0"/>
+                        <a:ea typeface="Calibri" charset="0"/>
+                        <a:cs typeface="Calibri" charset="0"/>
+                      </a:endParaRPr>
+                    </a:p>
+                  </a:txBody>
+                  <a:tcPr>
+                    <a:lnL w="5080" cap="flat" cmpd="sng" algn="ctr">
+                      <a:solidFill>
+                        <a:srgbClr val="D1DDE8"/>
+                      </a:solidFill>
+                      <a:prstDash val="solid"/>
+                      <a:round/>
+                      <a:headEnd type="none" w="med" len="med"/>
+                      <a:tailEnd type="none" w="med" len="med"/>
+                    </a:lnL>
+                    <a:lnR w="5080" cap="flat" cmpd="sng" algn="ctr">
+                      <a:solidFill>
+                        <a:srgbClr val="D1DDE8"/>
+                      </a:solidFill>
+                      <a:prstDash val="solid"/>
+                      <a:round/>
+                      <a:headEnd type="none" w="med" len="med"/>
+                      <a:tailEnd type="none" w="med" len="med"/>
+                    </a:lnR>
+                    <a:lnT w="5080" cap="flat" cmpd="sng" algn="ctr">
+                      <a:solidFill>
+                        <a:srgbClr val="D1DDE8"/>
+                      </a:solidFill>
+                      <a:prstDash val="solid"/>
+                      <a:round/>
+                      <a:headEnd type="none" w="med" len="med"/>
+                      <a:tailEnd type="none" w="med" len="med"/>
+                    </a:lnT>
+                    <a:lnB w="5080" cap="flat" cmpd="sng" algn="ctr">
+                      <a:solidFill>
+                        <a:srgbClr val="D1DDE8"/>
+                      </a:solidFill>
+                      <a:prstDash val="solid"/>
+                      <a:round/>
+                      <a:headEnd type="none" w="med" len="med"/>
+                      <a:tailEnd type="none" w="med" len="med"/>
+                    </a:lnB>
+                    <a:solidFill>
+                      <a:srgbClr val="FFFFFF"/>
+                    </a:solidFill>
+                  </a:tcPr>
+                </a:tc>
+                <a:tc>
+                  <a:txBody>
+                    <a:bodyPr/>
+                    <a:lstStyle/>
+                    <a:p>
+                      <a:pPr marL="0" indent="0">
+                        <a:buNone/>
+                      </a:pPr>
+                      <a:r>
+                        <a:rPr lang="en-US" sz="850" dirty="0">
+                          <a:solidFill>
+                            <a:srgbClr val="1E293B"/>
+                          </a:solidFill>
+                          <a:latin typeface="Calibri" pitchFamily="34" charset="0"/>
+                          <a:ea typeface="Calibri" pitchFamily="34" charset="-122"/>
+                          <a:cs typeface="Calibri" pitchFamily="34" charset="-120"/>
+                        </a:rPr>
+                        <a:t>Autopista Central – Av. Matta</a:t>
+                      </a:r>
+                      <a:endParaRPr lang="en-US" sz="850" dirty="0">
+                        <a:latin typeface="Calibri" charset="0"/>
+                        <a:ea typeface="Calibri" charset="0"/>
+                        <a:cs typeface="Calibri" charset="0"/>
+                      </a:endParaRPr>
+                    </a:p>
+                  </a:txBody>
+                  <a:tcPr>
+                    <a:lnL w="5080" cap="flat" cmpd="sng" algn="ctr">
+                      <a:solidFill>
+                        <a:srgbClr val="D1DDE8"/>
+                      </a:solidFill>
+                      <a:prstDash val="solid"/>
+                      <a:round/>
+                      <a:headEnd type="none" w="med" len="med"/>
+                      <a:tailEnd type="none" w="med" len="med"/>
+                    </a:lnL>
+                    <a:lnR w="5080" cap="flat" cmpd="sng" algn="ctr">
+                      <a:solidFill>
+                        <a:srgbClr val="D1DDE8"/>
+                      </a:solidFill>
+                      <a:prstDash val="solid"/>
+                      <a:round/>
+                      <a:headEnd type="none" w="med" len="med"/>
+                      <a:tailEnd type="none" w="med" len="med"/>
+                    </a:lnR>
+                    <a:lnT w="5080" cap="flat" cmpd="sng" algn="ctr">
+                      <a:solidFill>
+                        <a:srgbClr val="D1DDE8"/>
+                      </a:solidFill>
+                      <a:prstDash val="solid"/>
+                      <a:round/>
+                      <a:headEnd type="none" w="med" len="med"/>
+                      <a:tailEnd type="none" w="med" len="med"/>
+                    </a:lnT>
+                    <a:lnB w="5080" cap="flat" cmpd="sng" algn="ctr">
+                      <a:solidFill>
+                        <a:srgbClr val="D1DDE8"/>
+                      </a:solidFill>
+                      <a:prstDash val="solid"/>
+                      <a:round/>
+                      <a:headEnd type="none" w="med" len="med"/>
+                      <a:tailEnd type="none" w="med" len="med"/>
+                    </a:lnB>
+                    <a:solidFill>
+                      <a:srgbClr val="FFFFFF"/>
+                    </a:solidFill>
+                  </a:tcPr>
+                </a:tc>
+                <a:tc>
+                  <a:txBody>
+                    <a:bodyPr/>
+                    <a:lstStyle/>
+                    <a:p>
+                      <a:pPr marL="0" indent="0" algn="ctr">
+                        <a:buNone/>
+                      </a:pPr>
+                      <a:r>
+                        <a:rPr lang="en-US" sz="850" dirty="0">
+                          <a:solidFill>
+                            <a:srgbClr val="64748B"/>
+                          </a:solidFill>
+                          <a:latin typeface="Calibri" pitchFamily="34" charset="0"/>
+                          <a:ea typeface="Calibri" pitchFamily="34" charset="-122"/>
+                          <a:cs typeface="Calibri" pitchFamily="34" charset="-120"/>
+                        </a:rPr>
+                        <a:t>UF</a:t>
+                      </a:r>
+                      <a:endParaRPr lang="en-US" sz="850" dirty="0">
+                        <a:latin typeface="Calibri" charset="0"/>
+                        <a:ea typeface="Calibri" charset="0"/>
+                        <a:cs typeface="Calibri" charset="0"/>
+                      </a:endParaRPr>
+                    </a:p>
+                  </a:txBody>
+                  <a:tcPr>
+                    <a:lnL w="5080" cap="flat" cmpd="sng" algn="ctr">
+                      <a:solidFill>
+                        <a:srgbClr val="D1DDE8"/>
+                      </a:solidFill>
+                      <a:prstDash val="solid"/>
+                      <a:round/>
+                      <a:headEnd type="none" w="med" len="med"/>
+                      <a:tailEnd type="none" w="med" len="med"/>
+                    </a:lnL>
+                    <a:lnR w="5080" cap="flat" cmpd="sng" algn="ctr">
+                      <a:solidFill>
+                        <a:srgbClr val="D1DDE8"/>
+                      </a:solidFill>
+                      <a:prstDash val="solid"/>
+                      <a:round/>
+                      <a:headEnd type="none" w="med" len="med"/>
+                      <a:tailEnd type="none" w="med" len="med"/>
+                    </a:lnR>
+                    <a:lnT w="5080" cap="flat" cmpd="sng" algn="ctr">
+                      <a:solidFill>
+                        <a:srgbClr val="D1DDE8"/>
+                      </a:solidFill>
+                      <a:prstDash val="solid"/>
+                      <a:round/>
+                      <a:headEnd type="none" w="med" len="med"/>
+                      <a:tailEnd type="none" w="med" len="med"/>
+                    </a:lnT>
+                    <a:lnB w="5080" cap="flat" cmpd="sng" algn="ctr">
+                      <a:solidFill>
+                        <a:srgbClr val="D1DDE8"/>
+                      </a:solidFill>
+                      <a:prstDash val="solid"/>
+                      <a:round/>
+                      <a:headEnd type="none" w="med" len="med"/>
+                      <a:tailEnd type="none" w="med" len="med"/>
+                    </a:lnB>
+                    <a:solidFill>
+                      <a:srgbClr val="FFFFFF"/>
+                    </a:solidFill>
+                  </a:tcPr>
+                </a:tc>
+                <a:tc>
+                  <a:txBody>
+                    <a:bodyPr/>
+                    <a:lstStyle/>
+                    <a:p>
+                      <a:pPr marL="0" indent="0" algn="ctr">
+                        <a:buNone/>
+                      </a:pPr>
+                      <a:r>
+                        <a:rPr lang="en-US" sz="900" b="1" dirty="0">
+                          <a:solidFill>
+                            <a:srgbClr val="1E293B"/>
+                          </a:solidFill>
+                          <a:latin typeface="Calibri" pitchFamily="34" charset="0"/>
+                          <a:ea typeface="Calibri" pitchFamily="34" charset="-122"/>
+                          <a:cs typeface="Calibri" pitchFamily="34" charset="-120"/>
+                        </a:rPr>
+                        <a:t>364</a:t>
+                      </a:r>
+                      <a:endParaRPr lang="en-US" sz="900" dirty="0">
+                        <a:latin typeface="Calibri" charset="0"/>
+                        <a:ea typeface="Calibri" charset="0"/>
+                        <a:cs typeface="Calibri" charset="0"/>
+                      </a:endParaRPr>
+                    </a:p>
+                  </a:txBody>
+                  <a:tcPr>
+                    <a:lnL w="5080" cap="flat" cmpd="sng" algn="ctr">
+                      <a:solidFill>
+                        <a:srgbClr val="D1DDE8"/>
+                      </a:solidFill>
+                      <a:prstDash val="solid"/>
+                      <a:round/>
+                      <a:headEnd type="none" w="med" len="med"/>
+                      <a:tailEnd type="none" w="med" len="med"/>
+                    </a:lnL>
+                    <a:lnR w="5080" cap="flat" cmpd="sng" algn="ctr">
+                      <a:solidFill>
+                        <a:srgbClr val="D1DDE8"/>
+                      </a:solidFill>
+                      <a:prstDash val="solid"/>
+                      <a:round/>
+                      <a:headEnd type="none" w="med" len="med"/>
+                      <a:tailEnd type="none" w="med" len="med"/>
+                    </a:lnR>
+                    <a:lnT w="5080" cap="flat" cmpd="sng" algn="ctr">
+                      <a:solidFill>
+                        <a:srgbClr val="D1DDE8"/>
+                      </a:solidFill>
+                      <a:prstDash val="solid"/>
+                      <a:round/>
+                      <a:headEnd type="none" w="med" len="med"/>
+                      <a:tailEnd type="none" w="med" len="med"/>
+                    </a:lnT>
+                    <a:lnB w="5080" cap="flat" cmpd="sng" algn="ctr">
+                      <a:solidFill>
+                        <a:srgbClr val="D1DDE8"/>
+                      </a:solidFill>
+                      <a:prstDash val="solid"/>
+                      <a:round/>
+                      <a:headEnd type="none" w="med" len="med"/>
+                      <a:tailEnd type="none" w="med" len="med"/>
+                    </a:lnB>
+                    <a:solidFill>
+                      <a:srgbClr val="FFFFFF"/>
+                    </a:solidFill>
+                  </a:tcPr>
+                </a:tc>
+                <a:tc>
+                  <a:txBody>
+                    <a:bodyPr/>
+                    <a:lstStyle/>
+                    <a:p>
+                      <a:pPr marL="0" indent="0" algn="ctr">
+                        <a:buNone/>
+                      </a:pPr>
+                      <a:r>
+                        <a:rPr lang="en-US" sz="900" b="1" dirty="0">
+                          <a:solidFill>
+                            <a:srgbClr val="065F46"/>
+                          </a:solidFill>
+                          <a:latin typeface="Calibri" pitchFamily="34" charset="0"/>
+                          <a:ea typeface="Calibri" pitchFamily="34" charset="-122"/>
+                          <a:cs typeface="Calibri" pitchFamily="34" charset="-120"/>
+                        </a:rPr>
+                        <a:t>100%</a:t>
+                      </a:r>
+                      <a:endParaRPr lang="en-US" sz="900" dirty="0">
+                        <a:latin typeface="Calibri" charset="0"/>
+                        <a:ea typeface="Calibri" charset="0"/>
+                        <a:cs typeface="Calibri" charset="0"/>
+                      </a:endParaRPr>
+                    </a:p>
+                  </a:txBody>
+                  <a:tcPr>
+                    <a:lnL w="5080" cap="flat" cmpd="sng" algn="ctr">
+                      <a:solidFill>
+                        <a:srgbClr val="D1DDE8"/>
+                      </a:solidFill>
+                      <a:prstDash val="solid"/>
+                      <a:round/>
+                      <a:headEnd type="none" w="med" len="med"/>
+                      <a:tailEnd type="none" w="med" len="med"/>
+                    </a:lnL>
+                    <a:lnR w="5080" cap="flat" cmpd="sng" algn="ctr">
+                      <a:solidFill>
+                        <a:srgbClr val="D1DDE8"/>
+                      </a:solidFill>
+                      <a:prstDash val="solid"/>
+                      <a:round/>
+                      <a:headEnd type="none" w="med" len="med"/>
+                      <a:tailEnd type="none" w="med" len="med"/>
+                    </a:lnR>
+                    <a:lnT w="5080" cap="flat" cmpd="sng" algn="ctr">
+                      <a:solidFill>
+                        <a:srgbClr val="D1DDE8"/>
+                      </a:solidFill>
+                      <a:prstDash val="solid"/>
+                      <a:round/>
+                      <a:headEnd type="none" w="med" len="med"/>
+                      <a:tailEnd type="none" w="med" len="med"/>
+                    </a:lnT>
+                    <a:lnB w="5080" cap="flat" cmpd="sng" algn="ctr">
+                      <a:solidFill>
+                        <a:srgbClr val="D1DDE8"/>
+                      </a:solidFill>
+                      <a:prstDash val="solid"/>
+                      <a:round/>
+                      <a:headEnd type="none" w="med" len="med"/>
+                      <a:tailEnd type="none" w="med" len="med"/>
+                    </a:lnB>
+                    <a:solidFill>
+                      <a:srgbClr val="FFFFFF"/>
+                    </a:solidFill>
+                  </a:tcPr>
+                </a:tc>
+                <a:tc>
+                  <a:txBody>
+                    <a:bodyPr/>
+                    <a:lstStyle/>
+                    <a:p>
+                      <a:pPr marL="0" indent="0">
+                        <a:buNone/>
+                      </a:pPr>
+                      <a:r>
+                        <a:rPr lang="en-US" sz="750" i="1" dirty="0">
+                          <a:solidFill>
+                            <a:srgbClr val="64748B"/>
+                          </a:solidFill>
+                          <a:latin typeface="Calibri" pitchFamily="34" charset="0"/>
+                          <a:ea typeface="Calibri" pitchFamily="34" charset="-122"/>
+                          <a:cs typeface="Calibri" pitchFamily="34" charset="-120"/>
+                        </a:rPr>
+                        <a:t>Antecedentes 1ª semana junio</a:t>
+                      </a:r>
+                      <a:endParaRPr lang="en-US" sz="750" dirty="0">
+                        <a:latin typeface="Calibri" charset="0"/>
+                        <a:ea typeface="Calibri" charset="0"/>
+                        <a:cs typeface="Calibri" charset="0"/>
+                      </a:endParaRPr>
+                    </a:p>
+                  </a:txBody>
+                  <a:tcPr>
+                    <a:lnL w="5080" cap="flat" cmpd="sng" algn="ctr">
+                      <a:solidFill>
+                        <a:srgbClr val="D1DDE8"/>
+                      </a:solidFill>
+                      <a:prstDash val="solid"/>
+                      <a:round/>
+                      <a:headEnd type="none" w="med" len="med"/>
+                      <a:tailEnd type="none" w="med" len="med"/>
+                    </a:lnL>
+                    <a:lnR w="5080" cap="flat" cmpd="sng" algn="ctr">
+                      <a:solidFill>
+                        <a:srgbClr val="D1DDE8"/>
+                      </a:solidFill>
+                      <a:prstDash val="solid"/>
+                      <a:round/>
+                      <a:headEnd type="none" w="med" len="med"/>
+                      <a:tailEnd type="none" w="med" len="med"/>
+                    </a:lnR>
+                    <a:lnT w="5080" cap="flat" cmpd="sng" algn="ctr">
+                      <a:solidFill>
+                        <a:srgbClr val="D1DDE8"/>
+                      </a:solidFill>
+                      <a:prstDash val="solid"/>
+                      <a:round/>
+                      <a:headEnd type="none" w="med" len="med"/>
+                      <a:tailEnd type="none" w="med" len="med"/>
+                    </a:lnT>
+                    <a:lnB w="5080" cap="flat" cmpd="sng" algn="ctr">
+                      <a:solidFill>
+                        <a:srgbClr val="D1DDE8"/>
+                      </a:solidFill>
+                      <a:prstDash val="solid"/>
+                      <a:round/>
+                      <a:headEnd type="none" w="med" len="med"/>
+                      <a:tailEnd type="none" w="med" len="med"/>
+                    </a:lnB>
+                    <a:solidFill>
+                      <a:srgbClr val="FFFFFF"/>
+                    </a:solidFill>
+                  </a:tcPr>
+                </a:tc>
+                <a:extLst>
+                  <a:ext uri="{0D108BD9-81ED-4DB2-BD59-A6C34878D82A}">
+                    <a16:rowId xmlns:a16="http://schemas.microsoft.com/office/drawing/2014/main" val="10010"/>
+                  </a:ext>
+                </a:extLst>
+              </a:tr>
+            </a:tbl>
+          </a:graphicData>
+        </a:graphic>
+      </p:graphicFrame>
+      <p:pic>
+        <p:nvPicPr>
+          <p:cNvPr id="18" name="Imagen 17" descr="logoJPV2-[Convertido]">
+            <a:extLst>
+              <a:ext uri="{FF2B5EF4-FFF2-40B4-BE49-F238E27FC236}">
+                <a16:creationId xmlns:a16="http://schemas.microsoft.com/office/drawing/2014/main" id="{28053F3B-1BA6-AB0A-1512-2D4EC795BB40}"/>
+              </a:ext>
+            </a:extLst>
+          </p:cNvPr>
+          <p:cNvPicPr>
+            <a:picLocks noChangeAspect="1"/>
+          </p:cNvPicPr>
+          <p:nvPr/>
+        </p:nvPicPr>
+        <p:blipFill>
+          <a:blip r:embed="rId2">
+            <a:extLst>
+              <a:ext uri="{28A0092B-C50C-407E-A947-70E740481C1C}">
+                <a14:useLocalDpi xmlns:a14="http://schemas.microsoft.com/office/drawing/2010/main" val="0"/>
+              </a:ext>
+            </a:extLst>
+          </a:blip>
+          <a:srcRect/>
+          <a:stretch>
+            <a:fillRect/>
+          </a:stretch>
+        </p:blipFill>
+        <p:spPr bwMode="auto">
+          <a:xfrm>
+            <a:off x="48142" y="76341"/>
+            <a:ext cx="1030366" cy="528226"/>
+          </a:xfrm>
+          <a:prstGeom prst="rect">
+            <a:avLst/>
+          </a:prstGeom>
+          <a:noFill/>
+          <a:ln>
+            <a:noFill/>
+          </a:ln>
+        </p:spPr>
+      </p:pic>
     </p:spTree>
   </p:cSld>
   <p:clrMapOvr>
